--- a/lessons/lesson-07/slides.pptx
+++ b/lessons/lesson-07/slides.pptx
@@ -414,7 +414,12 @@
           </a:p>
           <a:p xmlns:a="http://schemas.openxmlformats.org/drawingml/2006/main">
             <a:r>
-              <a:t>讲义位置：本课讲义；见逐页母稿映射表</a:t>
+              <a:t>讲述与校准：</a:t>
+            </a:r>
+          </a:p>
+          <a:p xmlns:a="http://schemas.openxmlformats.org/drawingml/2006/main">
+            <a:r>
+              <a:t>开场放下问题门的成果。问题门确认"问题问得清、做得了"，但没确认"假设成立"。本课把可证伪命题配上一个能被实验支持、削弱或推翻的机制，并当场记录设计取舍，避免事后反向改写"最初为什么这样设计"。</a:t>
             </a:r>
           </a:p>
           <a:p xmlns:a="http://schemas.openxmlformats.org/drawingml/2006/main">
@@ -424,12 +429,12 @@
           </a:p>
           <a:p xmlns:a="http://schemas.openxmlformats.org/drawingml/2006/main">
             <a:r>
-              <a:t>屏显核对：</a:t>
-            </a:r>
-          </a:p>
-          <a:p xmlns:a="http://schemas.openxmlformats.org/drawingml/2006/main">
-            <a:r>
-              <a:t>第7讲 机制假设、研究判断与实验设计</a:t>
+              <a:t>学生动作：</a:t>
+            </a:r>
+          </a:p>
+          <a:p xmlns:a="http://schemas.openxmlformats.org/drawingml/2006/main">
+            <a:r>
+              <a:t>不展开课程行政信息，直接进入下一页回扣。</a:t>
             </a:r>
           </a:p>
           <a:p xmlns:a="http://schemas.openxmlformats.org/drawingml/2006/main">
@@ -439,12 +444,7 @@
           </a:p>
           <a:p xmlns:a="http://schemas.openxmlformats.org/drawingml/2006/main">
             <a:r>
-              <a:t>教师讲述：</a:t>
-            </a:r>
-          </a:p>
-          <a:p xmlns:a="http://schemas.openxmlformats.org/drawingml/2006/main">
-            <a:r>
-              <a:t>开场放下问题门的成果。问题门确认"问题问得清、做得了"，但没确认"假设成立"。本课把可证伪命题配上一个能被实验支持、削弱或推翻的机制，并当场记录设计取舍，避免事后反向改写"最初为什么这样设计"。</a:t>
+              <a:t>课堂安排：按本稿下方 90 分钟教学路由安排；此页不另占独立时段。</a:t>
             </a:r>
           </a:p>
           <a:p xmlns:a="http://schemas.openxmlformats.org/drawingml/2006/main">
@@ -454,12 +454,12 @@
           </a:p>
           <a:p xmlns:a="http://schemas.openxmlformats.org/drawingml/2006/main">
             <a:r>
-              <a:t>学生动作：</a:t>
-            </a:r>
-          </a:p>
-          <a:p xmlns:a="http://schemas.openxmlformats.org/drawingml/2006/main">
-            <a:r>
-              <a:t>不展开课程行政信息，直接进入下一页回扣。</a:t>
+              <a:t>[Sources]</a:t>
+            </a:r>
+          </a:p>
+          <a:p xmlns:a="http://schemas.openxmlformats.org/drawingml/2006/main">
+            <a:r>
+              <a:t>课程定位以 [syllabus.md](../../course/syllabus.md) 与 [备课规划.md](../备课规划.md) 第 7 课段为准。</a:t>
             </a:r>
           </a:p>
           <a:p xmlns:a="http://schemas.openxmlformats.org/drawingml/2006/main">
@@ -469,57 +469,7 @@
           </a:p>
           <a:p xmlns:a="http://schemas.openxmlformats.org/drawingml/2006/main">
             <a:r>
-              <a:t>来源与边界：</a:t>
-            </a:r>
-          </a:p>
-          <a:p xmlns:a="http://schemas.openxmlformats.org/drawingml/2006/main">
-            <a:r>
-              <a:t>课程定位以 [syllabus.md](../../course/syllabus.md) 与 [备课规划.md](../备课规划.md) 第 7 课段为准。</a:t>
-            </a:r>
-          </a:p>
-          <a:p xmlns:a="http://schemas.openxmlformats.org/drawingml/2006/main">
-            <a:r>
-              <a:t/>
-            </a:r>
-          </a:p>
-          <a:p xmlns:a="http://schemas.openxmlformats.org/drawingml/2006/main">
-            <a:r>
-              <a:t>---</a:t>
-            </a:r>
-          </a:p>
-          <a:p xmlns:a="http://schemas.openxmlformats.org/drawingml/2006/main">
-            <a:r>
-              <a:t/>
-            </a:r>
-          </a:p>
-          <a:p xmlns:a="http://schemas.openxmlformats.org/drawingml/2006/main">
-            <a:r>
-              <a:t>[Sources]</a:t>
-            </a:r>
-          </a:p>
-          <a:p xmlns:a="http://schemas.openxmlformats.org/drawingml/2006/main">
-            <a:r>
-              <a:t/>
-            </a:r>
-          </a:p>
-          <a:p xmlns:a="http://schemas.openxmlformats.org/drawingml/2006/main">
-            <a:r>
-              <a:t>- 本课 handout.md 与 slides.md</a:t>
-            </a:r>
-          </a:p>
-          <a:p xmlns:a="http://schemas.openxmlformats.org/drawingml/2006/main">
-            <a:r>
-              <a:t/>
-            </a:r>
-          </a:p>
-          <a:p xmlns:a="http://schemas.openxmlformats.org/drawingml/2006/main">
-            <a:r>
-              <a:t>- ../../course/reading-card-case.md</a:t>
-            </a:r>
-          </a:p>
-          <a:p xmlns:a="http://schemas.openxmlformats.org/drawingml/2006/main">
-            <a:r>
-              <a:t/>
+              <a:t>本课 handout.md、judgment-task.md；../../course/judgment-path.md。</a:t>
             </a:r>
           </a:p>
           <a:p xmlns:a="http://schemas.openxmlformats.org/drawingml/2006/main">
@@ -604,7 +554,12 @@
           </a:p>
           <a:p xmlns:a="http://schemas.openxmlformats.org/drawingml/2006/main">
             <a:r>
-              <a:t>讲义位置：本课讲义；见逐页母稿映射表</a:t>
+              <a:t>讲述与校准：</a:t>
+            </a:r>
+          </a:p>
+          <a:p xmlns:a="http://schemas.openxmlformats.org/drawingml/2006/main">
+            <a:r>
+              <a:t>AI 可以生成候选机制、提示替代假设、草拟实验规格，但所有产出只能作为草稿或线索。本课要求至少记录一条 AI 使用记录：工具、用途、Context、输出用途、人工核验方式、问题。核验清单在课堂逐条讲。</a:t>
             </a:r>
           </a:p>
           <a:p xmlns:a="http://schemas.openxmlformats.org/drawingml/2006/main">
@@ -614,12 +569,12 @@
           </a:p>
           <a:p xmlns:a="http://schemas.openxmlformats.org/drawingml/2006/main">
             <a:r>
-              <a:t>屏显核对：</a:t>
-            </a:r>
-          </a:p>
-          <a:p xmlns:a="http://schemas.openxmlformats.org/drawingml/2006/main">
-            <a:r>
-              <a:t>对 AI 给出的候选假设、替代假设或实验规格草稿，至少检查：</a:t>
+              <a:t>学生动作：</a:t>
+            </a:r>
+          </a:p>
+          <a:p xmlns:a="http://schemas.openxmlformats.org/drawingml/2006/main">
+            <a:r>
+              <a:t>让学生预判：AI 给你的候选最可能在哪一条上不通过？</a:t>
             </a:r>
           </a:p>
           <a:p xmlns:a="http://schemas.openxmlformats.org/drawingml/2006/main">
@@ -629,32 +584,7 @@
           </a:p>
           <a:p xmlns:a="http://schemas.openxmlformats.org/drawingml/2006/main">
             <a:r>
-              <a:t>1. 候选是否含中间过程，还是结果预测换说法</a:t>
-            </a:r>
-          </a:p>
-          <a:p xmlns:a="http://schemas.openxmlformats.org/drawingml/2006/main">
-            <a:r>
-              <a:t>2. 候选是否可证伪——是否存在能推翻它的观察</a:t>
-            </a:r>
-          </a:p>
-          <a:p xmlns:a="http://schemas.openxmlformats.org/drawingml/2006/main">
-            <a:r>
-              <a:t>3. 替代假设是否真的与主假设可区分</a:t>
-            </a:r>
-          </a:p>
-          <a:p xmlns:a="http://schemas.openxmlformats.org/drawingml/2006/main">
-            <a:r>
-              <a:t>4. 引文、常数、设置是否回到可核验来源</a:t>
-            </a:r>
-          </a:p>
-          <a:p xmlns:a="http://schemas.openxmlformats.org/drawingml/2006/main">
-            <a:r>
-              <a:t>5. 实验规格是否暗中改变评价标准或引入不公平 baseline</a:t>
-            </a:r>
-          </a:p>
-          <a:p xmlns:a="http://schemas.openxmlformats.org/drawingml/2006/main">
-            <a:r>
-              <a:t>6. 停止条件是否会导致"跑到显著为止"</a:t>
+              <a:t>课堂安排：按本稿下方 90 分钟教学路由安排；此页不另占独立时段。</a:t>
             </a:r>
           </a:p>
           <a:p xmlns:a="http://schemas.openxmlformats.org/drawingml/2006/main">
@@ -664,7 +594,12 @@
           </a:p>
           <a:p xmlns:a="http://schemas.openxmlformats.org/drawingml/2006/main">
             <a:r>
-              <a:t>&gt; 未完成这些步骤前，AI 产出只能留在探索线索区，不能进入假设列表主格。</a:t>
+              <a:t>[Sources]</a:t>
+            </a:r>
+          </a:p>
+          <a:p xmlns:a="http://schemas.openxmlformats.org/drawingml/2006/main">
+            <a:r>
+              <a:t>讲义 §五；第 3 课来源审计；[AGENTS.md](../../AGENTS.md) 证据标准。</a:t>
             </a:r>
           </a:p>
           <a:p xmlns:a="http://schemas.openxmlformats.org/drawingml/2006/main">
@@ -674,87 +609,7 @@
           </a:p>
           <a:p xmlns:a="http://schemas.openxmlformats.org/drawingml/2006/main">
             <a:r>
-              <a:t>教师讲述：</a:t>
-            </a:r>
-          </a:p>
-          <a:p xmlns:a="http://schemas.openxmlformats.org/drawingml/2006/main">
-            <a:r>
-              <a:t>AI 可以生成候选机制、提示替代假设、草拟实验规格，但所有产出只能作为草稿或线索。本课要求至少记录一条 AI 使用记录：工具、用途、Context、输出用途、人工核验方式、问题。核验清单在课堂逐条讲。</a:t>
-            </a:r>
-          </a:p>
-          <a:p xmlns:a="http://schemas.openxmlformats.org/drawingml/2006/main">
-            <a:r>
-              <a:t/>
-            </a:r>
-          </a:p>
-          <a:p xmlns:a="http://schemas.openxmlformats.org/drawingml/2006/main">
-            <a:r>
-              <a:t>学生动作：</a:t>
-            </a:r>
-          </a:p>
-          <a:p xmlns:a="http://schemas.openxmlformats.org/drawingml/2006/main">
-            <a:r>
-              <a:t>让学生预判：AI 给你的候选最可能在哪一条上不通过？</a:t>
-            </a:r>
-          </a:p>
-          <a:p xmlns:a="http://schemas.openxmlformats.org/drawingml/2006/main">
-            <a:r>
-              <a:t/>
-            </a:r>
-          </a:p>
-          <a:p xmlns:a="http://schemas.openxmlformats.org/drawingml/2006/main">
-            <a:r>
-              <a:t>来源与边界：</a:t>
-            </a:r>
-          </a:p>
-          <a:p xmlns:a="http://schemas.openxmlformats.org/drawingml/2006/main">
-            <a:r>
-              <a:t>讲义 §五；第 3 课来源审计；[AGENTS.md](../../AGENTS.md) 证据标准。</a:t>
-            </a:r>
-          </a:p>
-          <a:p xmlns:a="http://schemas.openxmlformats.org/drawingml/2006/main">
-            <a:r>
-              <a:t/>
-            </a:r>
-          </a:p>
-          <a:p xmlns:a="http://schemas.openxmlformats.org/drawingml/2006/main">
-            <a:r>
-              <a:t>---</a:t>
-            </a:r>
-          </a:p>
-          <a:p xmlns:a="http://schemas.openxmlformats.org/drawingml/2006/main">
-            <a:r>
-              <a:t/>
-            </a:r>
-          </a:p>
-          <a:p xmlns:a="http://schemas.openxmlformats.org/drawingml/2006/main">
-            <a:r>
-              <a:t>[Sources]</a:t>
-            </a:r>
-          </a:p>
-          <a:p xmlns:a="http://schemas.openxmlformats.org/drawingml/2006/main">
-            <a:r>
-              <a:t/>
-            </a:r>
-          </a:p>
-          <a:p xmlns:a="http://schemas.openxmlformats.org/drawingml/2006/main">
-            <a:r>
-              <a:t>- 本课 handout.md 与 slides.md</a:t>
-            </a:r>
-          </a:p>
-          <a:p xmlns:a="http://schemas.openxmlformats.org/drawingml/2006/main">
-            <a:r>
-              <a:t/>
-            </a:r>
-          </a:p>
-          <a:p xmlns:a="http://schemas.openxmlformats.org/drawingml/2006/main">
-            <a:r>
-              <a:t>- ../../course/reading-card-case.md</a:t>
-            </a:r>
-          </a:p>
-          <a:p xmlns:a="http://schemas.openxmlformats.org/drawingml/2006/main">
-            <a:r>
-              <a:t/>
+              <a:t>本课 handout.md、judgment-task.md；../../course/judgment-path.md。</a:t>
             </a:r>
           </a:p>
           <a:p xmlns:a="http://schemas.openxmlformats.org/drawingml/2006/main">
@@ -839,7 +694,12 @@
           </a:p>
           <a:p xmlns:a="http://schemas.openxmlformats.org/drawingml/2006/main">
             <a:r>
-              <a:t>讲义位置：handout.md §二、从问题到机制假设；四、从假设到区分观察的映射草图</a:t>
+              <a:t>讲述与校准：</a:t>
+            </a:r>
+          </a:p>
+          <a:p xmlns:a="http://schemas.openxmlformats.org/drawingml/2006/main">
+            <a:r>
+              <a:t>从问题到观察，再到能做出的判断，按这个顺序填表。不要先填“支持”再找一个指标装进去。完整实验规格留到第9课。</a:t>
             </a:r>
           </a:p>
           <a:p xmlns:a="http://schemas.openxmlformats.org/drawingml/2006/main">
@@ -849,32 +709,12 @@
           </a:p>
           <a:p xmlns:a="http://schemas.openxmlformats.org/drawingml/2006/main">
             <a:r>
-              <a:t>屏显核对：</a:t>
-            </a:r>
-          </a:p>
-          <a:p xmlns:a="http://schemas.openxmlformats.org/drawingml/2006/main">
-            <a:r>
-              <a:t>| 对象 | 要看的材料 | 当前能否判断 |</a:t>
-            </a:r>
-          </a:p>
-          <a:p xmlns:a="http://schemas.openxmlformats.org/drawingml/2006/main">
-            <a:r>
-              <a:t>| --- | --- | --- |</a:t>
-            </a:r>
-          </a:p>
-          <a:p xmlns:a="http://schemas.openxmlformats.org/drawingml/2006/main">
-            <a:r>
-              <a:t>| Q1 | 同口径输出与遗漏率 | 结果方向 |</a:t>
-            </a:r>
-          </a:p>
-          <a:p xmlns:a="http://schemas.openxmlformats.org/drawingml/2006/main">
-            <a:r>
-              <a:t>| H1 | 条件保留与生成过程/对照 | 机制待检验 |</a:t>
-            </a:r>
-          </a:p>
-          <a:p xmlns:a="http://schemas.openxmlformats.org/drawingml/2006/main">
-            <a:r>
-              <a:t>| A2 | 隐去组别后的标注比较 | 测量解释待检验 |</a:t>
+              <a:t>学生动作：</a:t>
+            </a:r>
+          </a:p>
+          <a:p xmlns:a="http://schemas.openxmlformats.org/drawingml/2006/main">
+            <a:r>
+              <a:t>学生给本人主假设和一个替代各填一行，保留不能区分的格子。</a:t>
             </a:r>
           </a:p>
           <a:p xmlns:a="http://schemas.openxmlformats.org/drawingml/2006/main">
@@ -884,12 +724,7 @@
           </a:p>
           <a:p xmlns:a="http://schemas.openxmlformats.org/drawingml/2006/main">
             <a:r>
-              <a:t>教师讲述：</a:t>
-            </a:r>
-          </a:p>
-          <a:p xmlns:a="http://schemas.openxmlformats.org/drawingml/2006/main">
-            <a:r>
-              <a:t>从问题到观察，再到能做出的判断，按这个顺序填表。不要先填“支持”再找一个指标装进去。完整实验规格留到第9课。</a:t>
+              <a:t>课堂安排：按本稿下方 90 分钟教学路由安排；此页不另占独立时段。</a:t>
             </a:r>
           </a:p>
           <a:p xmlns:a="http://schemas.openxmlformats.org/drawingml/2006/main">
@@ -899,12 +734,12 @@
           </a:p>
           <a:p xmlns:a="http://schemas.openxmlformats.org/drawingml/2006/main">
             <a:r>
-              <a:t>学生动作：</a:t>
-            </a:r>
-          </a:p>
-          <a:p xmlns:a="http://schemas.openxmlformats.org/drawingml/2006/main">
-            <a:r>
-              <a:t>学生给本人主假设和一个替代各填一行，保留不能区分的格子。</a:t>
+              <a:t>[Sources]</a:t>
+            </a:r>
+          </a:p>
+          <a:p xmlns:a="http://schemas.openxmlformats.org/drawingml/2006/main">
+            <a:r>
+              <a:t>./handout.md；课堂示例与构造数据见 ../../course/reading-card-case.md</a:t>
             </a:r>
           </a:p>
           <a:p xmlns:a="http://schemas.openxmlformats.org/drawingml/2006/main">
@@ -914,47 +749,7 @@
           </a:p>
           <a:p xmlns:a="http://schemas.openxmlformats.org/drawingml/2006/main">
             <a:r>
-              <a:t>来源与边界：</a:t>
-            </a:r>
-          </a:p>
-          <a:p xmlns:a="http://schemas.openxmlformats.org/drawingml/2006/main">
-            <a:r>
-              <a:t>./handout.md；课堂示例与构造数据见 ../../course/reading-card-case.md</a:t>
-            </a:r>
-          </a:p>
-          <a:p xmlns:a="http://schemas.openxmlformats.org/drawingml/2006/main">
-            <a:r>
-              <a:t/>
-            </a:r>
-          </a:p>
-          <a:p xmlns:a="http://schemas.openxmlformats.org/drawingml/2006/main">
-            <a:r>
-              <a:t>[Sources]</a:t>
-            </a:r>
-          </a:p>
-          <a:p xmlns:a="http://schemas.openxmlformats.org/drawingml/2006/main">
-            <a:r>
-              <a:t/>
-            </a:r>
-          </a:p>
-          <a:p xmlns:a="http://schemas.openxmlformats.org/drawingml/2006/main">
-            <a:r>
-              <a:t>- 本课 handout.md 与 slides.md</a:t>
-            </a:r>
-          </a:p>
-          <a:p xmlns:a="http://schemas.openxmlformats.org/drawingml/2006/main">
-            <a:r>
-              <a:t/>
-            </a:r>
-          </a:p>
-          <a:p xmlns:a="http://schemas.openxmlformats.org/drawingml/2006/main">
-            <a:r>
-              <a:t>- ../../course/reading-card-case.md</a:t>
-            </a:r>
-          </a:p>
-          <a:p xmlns:a="http://schemas.openxmlformats.org/drawingml/2006/main">
-            <a:r>
-              <a:t/>
+              <a:t>本课 handout.md、judgment-task.md；../../course/judgment-path.md。</a:t>
             </a:r>
           </a:p>
           <a:p xmlns:a="http://schemas.openxmlformats.org/drawingml/2006/main">
@@ -1039,7 +834,12 @@
           </a:p>
           <a:p xmlns:a="http://schemas.openxmlformats.org/drawingml/2006/main">
             <a:r>
-              <a:t>讲义位置：handout.md §二、从问题到机制假设；四、从假设到区分观察的映射草图</a:t>
+              <a:t>讲述与校准：</a:t>
+            </a:r>
+          </a:p>
+          <a:p xmlns:a="http://schemas.openxmlformats.org/drawingml/2006/main">
+            <a:r>
+              <a:t>说明研究判断是“现在为什么这样推进”，不是提前确认机制。让学生把“我觉得有效”改为有依据、有未决项的研究动作。</a:t>
             </a:r>
           </a:p>
           <a:p xmlns:a="http://schemas.openxmlformats.org/drawingml/2006/main">
@@ -1049,32 +849,12 @@
           </a:p>
           <a:p xmlns:a="http://schemas.openxmlformats.org/drawingml/2006/main">
             <a:r>
-              <a:t>屏显核对：</a:t>
-            </a:r>
-          </a:p>
-          <a:p xmlns:a="http://schemas.openxmlformats.org/drawingml/2006/main">
-            <a:r>
-              <a:t>当前决定：先检查输出是否保留限定条件。</a:t>
-            </a:r>
-          </a:p>
-          <a:p xmlns:a="http://schemas.openxmlformats.org/drawingml/2006/main">
-            <a:r>
-              <a:t>依据：这是 Q1 的直接结果对象。</a:t>
-            </a:r>
-          </a:p>
-          <a:p xmlns:a="http://schemas.openxmlformats.org/drawingml/2006/main">
-            <a:r>
-              <a:t>暂缓：H1 与 A2 的区分尚需过程与评价对照。</a:t>
-            </a:r>
-          </a:p>
-          <a:p xmlns:a="http://schemas.openxmlformats.org/drawingml/2006/main">
-            <a:r>
-              <a:t>边界：A1 质量代价、A3 材料范围另查。</a:t>
-            </a:r>
-          </a:p>
-          <a:p xmlns:a="http://schemas.openxmlformats.org/drawingml/2006/main">
-            <a:r>
-              <a:t>下一步：把区分观察带到第 8 课质询。</a:t>
+              <a:t>学生动作：</a:t>
+            </a:r>
+          </a:p>
+          <a:p xmlns:a="http://schemas.openxmlformats.org/drawingml/2006/main">
+            <a:r>
+              <a:t>保存一条判断记录，注明依据、范围和下一项观察。</a:t>
             </a:r>
           </a:p>
           <a:p xmlns:a="http://schemas.openxmlformats.org/drawingml/2006/main">
@@ -1084,12 +864,7 @@
           </a:p>
           <a:p xmlns:a="http://schemas.openxmlformats.org/drawingml/2006/main">
             <a:r>
-              <a:t>教师讲述：</a:t>
-            </a:r>
-          </a:p>
-          <a:p xmlns:a="http://schemas.openxmlformats.org/drawingml/2006/main">
-            <a:r>
-              <a:t>说明研究判断是“现在为什么这样推进”，不是提前确认机制。让学生把“我觉得有效”改为有依据、有未决项的研究动作。</a:t>
+              <a:t>课堂安排：按本稿下方 90 分钟教学路由安排；此页不另占独立时段。</a:t>
             </a:r>
           </a:p>
           <a:p xmlns:a="http://schemas.openxmlformats.org/drawingml/2006/main">
@@ -1099,12 +874,12 @@
           </a:p>
           <a:p xmlns:a="http://schemas.openxmlformats.org/drawingml/2006/main">
             <a:r>
-              <a:t>学生动作：</a:t>
-            </a:r>
-          </a:p>
-          <a:p xmlns:a="http://schemas.openxmlformats.org/drawingml/2006/main">
-            <a:r>
-              <a:t>保存一条判断记录，注明依据、范围和下一项观察。</a:t>
+              <a:t>[Sources]</a:t>
+            </a:r>
+          </a:p>
+          <a:p xmlns:a="http://schemas.openxmlformats.org/drawingml/2006/main">
+            <a:r>
+              <a:t>./handout.md；课堂示例与构造数据见 ../../course/reading-card-case.md</a:t>
             </a:r>
           </a:p>
           <a:p xmlns:a="http://schemas.openxmlformats.org/drawingml/2006/main">
@@ -1114,47 +889,7 @@
           </a:p>
           <a:p xmlns:a="http://schemas.openxmlformats.org/drawingml/2006/main">
             <a:r>
-              <a:t>来源与边界：</a:t>
-            </a:r>
-          </a:p>
-          <a:p xmlns:a="http://schemas.openxmlformats.org/drawingml/2006/main">
-            <a:r>
-              <a:t>./handout.md；课堂示例与构造数据见 ../../course/reading-card-case.md</a:t>
-            </a:r>
-          </a:p>
-          <a:p xmlns:a="http://schemas.openxmlformats.org/drawingml/2006/main">
-            <a:r>
-              <a:t/>
-            </a:r>
-          </a:p>
-          <a:p xmlns:a="http://schemas.openxmlformats.org/drawingml/2006/main">
-            <a:r>
-              <a:t>[Sources]</a:t>
-            </a:r>
-          </a:p>
-          <a:p xmlns:a="http://schemas.openxmlformats.org/drawingml/2006/main">
-            <a:r>
-              <a:t/>
-            </a:r>
-          </a:p>
-          <a:p xmlns:a="http://schemas.openxmlformats.org/drawingml/2006/main">
-            <a:r>
-              <a:t>- 本课 handout.md 与 slides.md</a:t>
-            </a:r>
-          </a:p>
-          <a:p xmlns:a="http://schemas.openxmlformats.org/drawingml/2006/main">
-            <a:r>
-              <a:t/>
-            </a:r>
-          </a:p>
-          <a:p xmlns:a="http://schemas.openxmlformats.org/drawingml/2006/main">
-            <a:r>
-              <a:t>- ../../course/reading-card-case.md</a:t>
-            </a:r>
-          </a:p>
-          <a:p xmlns:a="http://schemas.openxmlformats.org/drawingml/2006/main">
-            <a:r>
-              <a:t/>
+              <a:t>本课 handout.md、judgment-task.md；../../course/judgment-path.md。</a:t>
             </a:r>
           </a:p>
           <a:p xmlns:a="http://schemas.openxmlformats.org/drawingml/2006/main">
@@ -1239,7 +974,12 @@
           </a:p>
           <a:p xmlns:a="http://schemas.openxmlformats.org/drawingml/2006/main">
             <a:r>
-              <a:t>讲义位置：本课讲义；见逐页母稿映射表</a:t>
+              <a:t>讲述与校准：</a:t>
+            </a:r>
+          </a:p>
+          <a:p xmlns:a="http://schemas.openxmlformats.org/drawingml/2006/main">
+            <a:r>
+              <a:t>把演示中的判断点与常见错误对应。每个错误都对应贯穿案例中的一个步骤。重点强调第 10 条：实验如果不能改变研究判断，就不算验证——这是第 8 课同伴会追问的核心。</a:t>
             </a:r>
           </a:p>
           <a:p xmlns:a="http://schemas.openxmlformats.org/drawingml/2006/main">
@@ -1249,62 +989,12 @@
           </a:p>
           <a:p xmlns:a="http://schemas.openxmlformats.org/drawingml/2006/main">
             <a:r>
-              <a:t>屏显核对：</a:t>
-            </a:r>
-          </a:p>
-          <a:p xmlns:a="http://schemas.openxmlformats.org/drawingml/2006/main">
-            <a:r>
-              <a:t>常见错误：</a:t>
-            </a:r>
-          </a:p>
-          <a:p xmlns:a="http://schemas.openxmlformats.org/drawingml/2006/main">
-            <a:r>
-              <a:t>1. 结果预测当机制假设</a:t>
-            </a:r>
-          </a:p>
-          <a:p xmlns:a="http://schemas.openxmlformats.org/drawingml/2006/main">
-            <a:r>
-              <a:t>2. 黑箱归因（"模型理解了原文"）</a:t>
-            </a:r>
-          </a:p>
-          <a:p xmlns:a="http://schemas.openxmlformats.org/drawingml/2006/main">
-            <a:r>
-              <a:t>3. 无反证点</a:t>
-            </a:r>
-          </a:p>
-          <a:p xmlns:a="http://schemas.openxmlformats.org/drawingml/2006/main">
-            <a:r>
-              <a:t>4. 替代假设不可区分</a:t>
-            </a:r>
-          </a:p>
-          <a:p xmlns:a="http://schemas.openxmlformats.org/drawingml/2006/main">
-            <a:r>
-              <a:t>5. 事后改判断</a:t>
-            </a:r>
-          </a:p>
-          <a:p xmlns:a="http://schemas.openxmlformats.org/drawingml/2006/main">
-            <a:r>
-              <a:t>6. baseline 不公平</a:t>
-            </a:r>
-          </a:p>
-          <a:p xmlns:a="http://schemas.openxmlformats.org/drawingml/2006/main">
-            <a:r>
-              <a:t>7. 无停止条件</a:t>
-            </a:r>
-          </a:p>
-          <a:p xmlns:a="http://schemas.openxmlformats.org/drawingml/2006/main">
-            <a:r>
-              <a:t>8. AI 候选直接进列表</a:t>
-            </a:r>
-          </a:p>
-          <a:p xmlns:a="http://schemas.openxmlformats.org/drawingml/2006/main">
-            <a:r>
-              <a:t>9. 混淆事实与假设</a:t>
-            </a:r>
-          </a:p>
-          <a:p xmlns:a="http://schemas.openxmlformats.org/drawingml/2006/main">
-            <a:r>
-              <a:t>10. 实验不能改变判断</a:t>
+              <a:t>学生动作：</a:t>
+            </a:r>
+          </a:p>
+          <a:p xmlns:a="http://schemas.openxmlformats.org/drawingml/2006/main">
+            <a:r>
+              <a:t>无。直接进入实践说明。</a:t>
             </a:r>
           </a:p>
           <a:p xmlns:a="http://schemas.openxmlformats.org/drawingml/2006/main">
@@ -1314,32 +1004,7 @@
           </a:p>
           <a:p xmlns:a="http://schemas.openxmlformats.org/drawingml/2006/main">
             <a:r>
-              <a:t>演示判断点：</a:t>
-            </a:r>
-          </a:p>
-          <a:p xmlns:a="http://schemas.openxmlformats.org/drawingml/2006/main">
-            <a:r>
-              <a:t>- 结果预测和机制假设差在哪？</a:t>
-            </a:r>
-          </a:p>
-          <a:p xmlns:a="http://schemas.openxmlformats.org/drawingml/2006/main">
-            <a:r>
-              <a:t>- 替代假设为什么不能只是"另一个题目"？</a:t>
-            </a:r>
-          </a:p>
-          <a:p xmlns:a="http://schemas.openxmlformats.org/drawingml/2006/main">
-            <a:r>
-              <a:t>- 研究判断为什么要当场写？</a:t>
-            </a:r>
-          </a:p>
-          <a:p xmlns:a="http://schemas.openxmlformats.org/drawingml/2006/main">
-            <a:r>
-              <a:t>- 实验无法区分主假设与替代假设时，能"支持"主假设吗？</a:t>
-            </a:r>
-          </a:p>
-          <a:p xmlns:a="http://schemas.openxmlformats.org/drawingml/2006/main">
-            <a:r>
-              <a:t>- AI 候选在什么步骤前只能算探索线索？</a:t>
+              <a:t>课堂安排：按本稿下方 90 分钟教学路由安排；此页不另占独立时段。</a:t>
             </a:r>
           </a:p>
           <a:p xmlns:a="http://schemas.openxmlformats.org/drawingml/2006/main">
@@ -1349,12 +1014,12 @@
           </a:p>
           <a:p xmlns:a="http://schemas.openxmlformats.org/drawingml/2006/main">
             <a:r>
-              <a:t>教师讲述：</a:t>
-            </a:r>
-          </a:p>
-          <a:p xmlns:a="http://schemas.openxmlformats.org/drawingml/2006/main">
-            <a:r>
-              <a:t>把演示中的判断点与常见错误对应。每个错误都对应贯穿案例中的一个步骤。重点强调第 10 条：实验如果不能改变研究判断，就不算验证——这是第 8 课同伴会追问的核心。</a:t>
+              <a:t>[Sources]</a:t>
+            </a:r>
+          </a:p>
+          <a:p xmlns:a="http://schemas.openxmlformats.org/drawingml/2006/main">
+            <a:r>
+              <a:t>讲义 §六 常见错误；演示判断点。</a:t>
             </a:r>
           </a:p>
           <a:p xmlns:a="http://schemas.openxmlformats.org/drawingml/2006/main">
@@ -1364,72 +1029,7 @@
           </a:p>
           <a:p xmlns:a="http://schemas.openxmlformats.org/drawingml/2006/main">
             <a:r>
-              <a:t>学生动作：</a:t>
-            </a:r>
-          </a:p>
-          <a:p xmlns:a="http://schemas.openxmlformats.org/drawingml/2006/main">
-            <a:r>
-              <a:t>无。直接进入实践说明。</a:t>
-            </a:r>
-          </a:p>
-          <a:p xmlns:a="http://schemas.openxmlformats.org/drawingml/2006/main">
-            <a:r>
-              <a:t/>
-            </a:r>
-          </a:p>
-          <a:p xmlns:a="http://schemas.openxmlformats.org/drawingml/2006/main">
-            <a:r>
-              <a:t>来源与边界：</a:t>
-            </a:r>
-          </a:p>
-          <a:p xmlns:a="http://schemas.openxmlformats.org/drawingml/2006/main">
-            <a:r>
-              <a:t>讲义 §六 常见错误；演示判断点。</a:t>
-            </a:r>
-          </a:p>
-          <a:p xmlns:a="http://schemas.openxmlformats.org/drawingml/2006/main">
-            <a:r>
-              <a:t/>
-            </a:r>
-          </a:p>
-          <a:p xmlns:a="http://schemas.openxmlformats.org/drawingml/2006/main">
-            <a:r>
-              <a:t>---</a:t>
-            </a:r>
-          </a:p>
-          <a:p xmlns:a="http://schemas.openxmlformats.org/drawingml/2006/main">
-            <a:r>
-              <a:t/>
-            </a:r>
-          </a:p>
-          <a:p xmlns:a="http://schemas.openxmlformats.org/drawingml/2006/main">
-            <a:r>
-              <a:t>[Sources]</a:t>
-            </a:r>
-          </a:p>
-          <a:p xmlns:a="http://schemas.openxmlformats.org/drawingml/2006/main">
-            <a:r>
-              <a:t/>
-            </a:r>
-          </a:p>
-          <a:p xmlns:a="http://schemas.openxmlformats.org/drawingml/2006/main">
-            <a:r>
-              <a:t>- 本课 handout.md 与 slides.md</a:t>
-            </a:r>
-          </a:p>
-          <a:p xmlns:a="http://schemas.openxmlformats.org/drawingml/2006/main">
-            <a:r>
-              <a:t/>
-            </a:r>
-          </a:p>
-          <a:p xmlns:a="http://schemas.openxmlformats.org/drawingml/2006/main">
-            <a:r>
-              <a:t>- ../../course/reading-card-case.md</a:t>
-            </a:r>
-          </a:p>
-          <a:p xmlns:a="http://schemas.openxmlformats.org/drawingml/2006/main">
-            <a:r>
-              <a:t/>
+              <a:t>本课 handout.md、judgment-task.md；../../course/judgment-path.md。</a:t>
             </a:r>
           </a:p>
           <a:p xmlns:a="http://schemas.openxmlformats.org/drawingml/2006/main">
@@ -1504,7 +1104,7 @@
           <a:lstStyle xmlns:a="http://schemas.openxmlformats.org/drawingml/2006/main"/>
           <a:p xmlns:a="http://schemas.openxmlformats.org/drawingml/2006/main">
             <a:r>
-              <a:t>页面：P14 个人实践：完成机制—判断—映射最小闭环</a:t>
+              <a:t>页面：P14 本人项目：决定、核验与回写</a:t>
             </a:r>
           </a:p>
           <a:p xmlns:a="http://schemas.openxmlformats.org/drawingml/2006/main">
@@ -1514,7 +1114,12 @@
           </a:p>
           <a:p xmlns:a="http://schemas.openxmlformats.org/drawingml/2006/main">
             <a:r>
-              <a:t>讲义位置：本课讲义；见逐页母稿映射表</a:t>
+              <a:t>讲述与校准：</a:t>
+            </a:r>
+          </a:p>
+          <a:p xmlns:a="http://schemas.openxmlformats.org/drawingml/2006/main">
+            <a:r>
+              <a:t>第一段作决定并查证据；中点处理共性卡点；第二段实际回写并验证。Y 最直接检查测量解释；格式隐藏不能删掉语义内容。差异保留支持真实内容差异但不唯一证明生成机制；差异消失支持测量解释但也可能有评分噪声。X 主要检查稳定性，Z 同时改多个因素。本人若研究校验器，可用输入不变、仅改变校验规则来区分“真拦截”与“直接丢所有记录”。</a:t>
             </a:r>
           </a:p>
           <a:p xmlns:a="http://schemas.openxmlformats.org/drawingml/2006/main">
@@ -1524,27 +1129,12 @@
           </a:p>
           <a:p xmlns:a="http://schemas.openxmlformats.org/drawingml/2006/main">
             <a:r>
-              <a:t>屏显核对：</a:t>
-            </a:r>
-          </a:p>
-          <a:p xmlns:a="http://schemas.openxmlformats.org/drawingml/2006/main">
-            <a:r>
-              <a:t>1. 用你第 6 课的可证伪命题写出主机制假设（含中间过程）</a:t>
-            </a:r>
-          </a:p>
-          <a:p xmlns:a="http://schemas.openxmlformats.org/drawingml/2006/main">
-            <a:r>
-              <a:t>2. 写出 1 个可区分替代假设</a:t>
-            </a:r>
-          </a:p>
-          <a:p xmlns:a="http://schemas.openxmlformats.org/drawingml/2006/main">
-            <a:r>
-              <a:t>3. 写一条完整研究判断（六字段）</a:t>
-            </a:r>
-          </a:p>
-          <a:p xmlns:a="http://schemas.openxmlformats.org/drawingml/2006/main">
-            <a:r>
-              <a:t>4. 为 H1 与该替代各写支持、反驳与仍不能判断条件</a:t>
+              <a:t>学生动作：</a:t>
+            </a:r>
+          </a:p>
+          <a:p xmlns:a="http://schemas.openxmlformats.org/drawingml/2006/main">
+            <a:r>
+              <a:t>为主假设和一个替代解释写结果预测，选最小验证并说明什么结果会改变决定。默认工程题同时测坏记录拦截和正常记录保留。</a:t>
             </a:r>
           </a:p>
           <a:p xmlns:a="http://schemas.openxmlformats.org/drawingml/2006/main">
@@ -1554,7 +1144,7 @@
           </a:p>
           <a:p xmlns:a="http://schemas.openxmlformats.org/drawingml/2006/main">
             <a:r>
-              <a:t>课堂最低产出：1 主机制 + 1 个可区分替代 + 1 条研究判断 + 1 张映射草图。</a:t>
+              <a:t>课堂安排：按本稿下方 90 分钟教学路由安排；此页不另占独立时段。</a:t>
             </a:r>
           </a:p>
           <a:p xmlns:a="http://schemas.openxmlformats.org/drawingml/2006/main">
@@ -1564,7 +1154,12 @@
           </a:p>
           <a:p xmlns:a="http://schemas.openxmlformats.org/drawingml/2006/main">
             <a:r>
-              <a:t>课后：只补全当堂未完成的表达；完整规格留到第 9 课。</a:t>
+              <a:t>[Sources]</a:t>
+            </a:r>
+          </a:p>
+          <a:p xmlns:a="http://schemas.openxmlformats.org/drawingml/2006/main">
+            <a:r>
+              <a:t>讲义 §八 练习 1-8；[starter-template.md](../../course/starter-template.md)。</a:t>
             </a:r>
           </a:p>
           <a:p xmlns:a="http://schemas.openxmlformats.org/drawingml/2006/main">
@@ -1574,97 +1169,7 @@
           </a:p>
           <a:p xmlns:a="http://schemas.openxmlformats.org/drawingml/2006/main">
             <a:r>
-              <a:t>&gt; 不要求填满，只要求跑通一次可复盘链路。</a:t>
-            </a:r>
-          </a:p>
-          <a:p xmlns:a="http://schemas.openxmlformats.org/drawingml/2006/main">
-            <a:r>
-              <a:t/>
-            </a:r>
-          </a:p>
-          <a:p xmlns:a="http://schemas.openxmlformats.org/drawingml/2006/main">
-            <a:r>
-              <a:t>教师讲述：</a:t>
-            </a:r>
-          </a:p>
-          <a:p xmlns:a="http://schemas.openxmlformats.org/drawingml/2006/main">
-            <a:r>
-              <a:t>个人实践分两段：先写主机制与替代解释，教师中点抽取共同卡点点评，再完成研究判断与映射草图。</a:t>
-            </a:r>
-          </a:p>
-          <a:p xmlns:a="http://schemas.openxmlformats.org/drawingml/2006/main">
-            <a:r>
-              <a:t/>
-            </a:r>
-          </a:p>
-          <a:p xmlns:a="http://schemas.openxmlformats.org/drawingml/2006/main">
-            <a:r>
-              <a:t>学生动作：</a:t>
-            </a:r>
-          </a:p>
-          <a:p xmlns:a="http://schemas.openxmlformats.org/drawingml/2006/main">
-            <a:r>
-              <a:t>个人实践。教师巡视。</a:t>
-            </a:r>
-          </a:p>
-          <a:p xmlns:a="http://schemas.openxmlformats.org/drawingml/2006/main">
-            <a:r>
-              <a:t/>
-            </a:r>
-          </a:p>
-          <a:p xmlns:a="http://schemas.openxmlformats.org/drawingml/2006/main">
-            <a:r>
-              <a:t>来源与边界：</a:t>
-            </a:r>
-          </a:p>
-          <a:p xmlns:a="http://schemas.openxmlformats.org/drawingml/2006/main">
-            <a:r>
-              <a:t>讲义 §八 练习 1-8；[starter-template.md](../../course/starter-template.md)。</a:t>
-            </a:r>
-          </a:p>
-          <a:p xmlns:a="http://schemas.openxmlformats.org/drawingml/2006/main">
-            <a:r>
-              <a:t/>
-            </a:r>
-          </a:p>
-          <a:p xmlns:a="http://schemas.openxmlformats.org/drawingml/2006/main">
-            <a:r>
-              <a:t>---</a:t>
-            </a:r>
-          </a:p>
-          <a:p xmlns:a="http://schemas.openxmlformats.org/drawingml/2006/main">
-            <a:r>
-              <a:t/>
-            </a:r>
-          </a:p>
-          <a:p xmlns:a="http://schemas.openxmlformats.org/drawingml/2006/main">
-            <a:r>
-              <a:t>[Sources]</a:t>
-            </a:r>
-          </a:p>
-          <a:p xmlns:a="http://schemas.openxmlformats.org/drawingml/2006/main">
-            <a:r>
-              <a:t/>
-            </a:r>
-          </a:p>
-          <a:p xmlns:a="http://schemas.openxmlformats.org/drawingml/2006/main">
-            <a:r>
-              <a:t>- 本课 handout.md 与 slides.md</a:t>
-            </a:r>
-          </a:p>
-          <a:p xmlns:a="http://schemas.openxmlformats.org/drawingml/2006/main">
-            <a:r>
-              <a:t/>
-            </a:r>
-          </a:p>
-          <a:p xmlns:a="http://schemas.openxmlformats.org/drawingml/2006/main">
-            <a:r>
-              <a:t>- ../../course/reading-card-case.md</a:t>
-            </a:r>
-          </a:p>
-          <a:p xmlns:a="http://schemas.openxmlformats.org/drawingml/2006/main">
-            <a:r>
-              <a:t/>
+              <a:t>本课 handout.md、judgment-task.md；../../course/judgment-path.md。教学构造仅用于方法判断；本人结果以实际记录为准。</a:t>
             </a:r>
           </a:p>
           <a:p xmlns:a="http://schemas.openxmlformats.org/drawingml/2006/main">
@@ -1749,7 +1254,12 @@
           </a:p>
           <a:p xmlns:a="http://schemas.openxmlformats.org/drawingml/2006/main">
             <a:r>
-              <a:t>讲义位置：本课讲义；见逐页母稿映射表</a:t>
+              <a:t>讲述与校准：</a:t>
+            </a:r>
+          </a:p>
+          <a:p xmlns:a="http://schemas.openxmlformats.org/drawingml/2006/main">
+            <a:r>
+              <a:t>本课同伴互查按第 8 课方案分享的五个权威维度预演。作者根据真实反馈选择采纳、澄清、补证、暂缓或保留异议，并记录理由与回写位置；不要求出现“拒绝”。</a:t>
             </a:r>
           </a:p>
           <a:p xmlns:a="http://schemas.openxmlformats.org/drawingml/2006/main">
@@ -1759,12 +1269,12 @@
           </a:p>
           <a:p xmlns:a="http://schemas.openxmlformats.org/drawingml/2006/main">
             <a:r>
-              <a:t>屏显核对：</a:t>
-            </a:r>
-          </a:p>
-          <a:p xmlns:a="http://schemas.openxmlformats.org/drawingml/2006/main">
-            <a:r>
-              <a:t>2-3 人互查，按第 8 课 rubric 预演：</a:t>
+              <a:t>学生动作：</a:t>
+            </a:r>
+          </a:p>
+          <a:p xmlns:a="http://schemas.openxmlformats.org/drawingml/2006/main">
+            <a:r>
+              <a:t>2-3 人互查。每人 2 分钟说主假设与替代假设，2 分钟反馈。</a:t>
             </a:r>
           </a:p>
           <a:p xmlns:a="http://schemas.openxmlformats.org/drawingml/2006/main">
@@ -1774,27 +1284,7 @@
           </a:p>
           <a:p xmlns:a="http://schemas.openxmlformats.org/drawingml/2006/main">
             <a:r>
-              <a:t>1. 问题重要性：值得投入本课程周期吗？</a:t>
-            </a:r>
-          </a:p>
-          <a:p xmlns:a="http://schemas.openxmlformats.org/drawingml/2006/main">
-            <a:r>
-              <a:t>2. 证据充分性：判断依据是否绑定证据地图或第一性原理？</a:t>
-            </a:r>
-          </a:p>
-          <a:p xmlns:a="http://schemas.openxmlformats.org/drawingml/2006/main">
-            <a:r>
-              <a:t>3. 可检验性：主假设与替代假设能被实验区分吗？</a:t>
-            </a:r>
-          </a:p>
-          <a:p xmlns:a="http://schemas.openxmlformats.org/drawingml/2006/main">
-            <a:r>
-              <a:t>4. 周期可行性：实验能在课程周期内完成吗？</a:t>
-            </a:r>
-          </a:p>
-          <a:p xmlns:a="http://schemas.openxmlformats.org/drawingml/2006/main">
-            <a:r>
-              <a:t>5. 判断改变：下一步实验的什么结果会改变当前研究判断？</a:t>
+              <a:t>课堂安排：按本稿下方 90 分钟教学路由安排；此页不另占独立时段。</a:t>
             </a:r>
           </a:p>
           <a:p xmlns:a="http://schemas.openxmlformats.org/drawingml/2006/main">
@@ -1804,7 +1294,12 @@
           </a:p>
           <a:p xmlns:a="http://schemas.openxmlformats.org/drawingml/2006/main">
             <a:r>
-              <a:t>&gt; 只提问题，不替作者决定，不形成共同提交。</a:t>
+              <a:t>[Sources]</a:t>
+            </a:r>
+          </a:p>
+          <a:p xmlns:a="http://schemas.openxmlformats.org/drawingml/2006/main">
+            <a:r>
+              <a:t>讲义 §三·3；[assignments.md](../../course/assignments.md) 第 8 课方案分享 rubric。</a:t>
             </a:r>
           </a:p>
           <a:p xmlns:a="http://schemas.openxmlformats.org/drawingml/2006/main">
@@ -1814,87 +1309,7 @@
           </a:p>
           <a:p xmlns:a="http://schemas.openxmlformats.org/drawingml/2006/main">
             <a:r>
-              <a:t>教师讲述：</a:t>
-            </a:r>
-          </a:p>
-          <a:p xmlns:a="http://schemas.openxmlformats.org/drawingml/2006/main">
-            <a:r>
-              <a:t>本课同伴互查按第 8 课方案分享的五个权威维度预演。作者根据真实反馈选择采纳、澄清、补证、暂缓或保留异议，并记录理由与回写位置；不要求出现“拒绝”。</a:t>
-            </a:r>
-          </a:p>
-          <a:p xmlns:a="http://schemas.openxmlformats.org/drawingml/2006/main">
-            <a:r>
-              <a:t/>
-            </a:r>
-          </a:p>
-          <a:p xmlns:a="http://schemas.openxmlformats.org/drawingml/2006/main">
-            <a:r>
-              <a:t>学生动作：</a:t>
-            </a:r>
-          </a:p>
-          <a:p xmlns:a="http://schemas.openxmlformats.org/drawingml/2006/main">
-            <a:r>
-              <a:t>2-3 人互查。每人 2 分钟说主假设与替代假设，2 分钟反馈。</a:t>
-            </a:r>
-          </a:p>
-          <a:p xmlns:a="http://schemas.openxmlformats.org/drawingml/2006/main">
-            <a:r>
-              <a:t/>
-            </a:r>
-          </a:p>
-          <a:p xmlns:a="http://schemas.openxmlformats.org/drawingml/2006/main">
-            <a:r>
-              <a:t>来源与边界：</a:t>
-            </a:r>
-          </a:p>
-          <a:p xmlns:a="http://schemas.openxmlformats.org/drawingml/2006/main">
-            <a:r>
-              <a:t>讲义 §三·3；[assignments.md](../../course/assignments.md) 第 8 课方案分享 rubric。</a:t>
-            </a:r>
-          </a:p>
-          <a:p xmlns:a="http://schemas.openxmlformats.org/drawingml/2006/main">
-            <a:r>
-              <a:t/>
-            </a:r>
-          </a:p>
-          <a:p xmlns:a="http://schemas.openxmlformats.org/drawingml/2006/main">
-            <a:r>
-              <a:t>---</a:t>
-            </a:r>
-          </a:p>
-          <a:p xmlns:a="http://schemas.openxmlformats.org/drawingml/2006/main">
-            <a:r>
-              <a:t/>
-            </a:r>
-          </a:p>
-          <a:p xmlns:a="http://schemas.openxmlformats.org/drawingml/2006/main">
-            <a:r>
-              <a:t>[Sources]</a:t>
-            </a:r>
-          </a:p>
-          <a:p xmlns:a="http://schemas.openxmlformats.org/drawingml/2006/main">
-            <a:r>
-              <a:t/>
-            </a:r>
-          </a:p>
-          <a:p xmlns:a="http://schemas.openxmlformats.org/drawingml/2006/main">
-            <a:r>
-              <a:t>- 本课 handout.md 与 slides.md</a:t>
-            </a:r>
-          </a:p>
-          <a:p xmlns:a="http://schemas.openxmlformats.org/drawingml/2006/main">
-            <a:r>
-              <a:t/>
-            </a:r>
-          </a:p>
-          <a:p xmlns:a="http://schemas.openxmlformats.org/drawingml/2006/main">
-            <a:r>
-              <a:t>- ../../course/reading-card-case.md</a:t>
-            </a:r>
-          </a:p>
-          <a:p xmlns:a="http://schemas.openxmlformats.org/drawingml/2006/main">
-            <a:r>
-              <a:t/>
+              <a:t>本课 handout.md、judgment-task.md；../../course/judgment-path.md。</a:t>
             </a:r>
           </a:p>
           <a:p xmlns:a="http://schemas.openxmlformats.org/drawingml/2006/main">
@@ -1979,7 +1394,12 @@
           </a:p>
           <a:p xmlns:a="http://schemas.openxmlformats.org/drawingml/2006/main">
             <a:r>
-              <a:t>讲义位置：本课讲义；见逐页母稿映射表</a:t>
+              <a:t>讲述与校准：</a:t>
+            </a:r>
+          </a:p>
+          <a:p xmlns:a="http://schemas.openxmlformats.org/drawingml/2006/main">
+            <a:r>
+              <a:t>使用自定命题 ID，分别记录结果、主机制、可区分替代与采用判断。不机械凑三个假设；结果不显著可能精度不足，机制需区分性证据。</a:t>
             </a:r>
           </a:p>
           <a:p xmlns:a="http://schemas.openxmlformats.org/drawingml/2006/main">
@@ -1989,12 +1409,7 @@
           </a:p>
           <a:p xmlns:a="http://schemas.openxmlformats.org/drawingml/2006/main">
             <a:r>
-              <a:t>屏显核对：</a:t>
-            </a:r>
-          </a:p>
-          <a:p xmlns:a="http://schemas.openxmlformats.org/drawingml/2006/main">
-            <a:r>
-              <a:t>主机制与替代机制 → 可区分实验 → 研究判断记录</a:t>
+              <a:t>回收机制、实验和判断三者关系，不引入新任务。</a:t>
             </a:r>
           </a:p>
           <a:p xmlns:a="http://schemas.openxmlformats.org/drawingml/2006/main">
@@ -2004,17 +1419,12 @@
           </a:p>
           <a:p xmlns:a="http://schemas.openxmlformats.org/drawingml/2006/main">
             <a:r>
-              <a:t>- 对同一结果提出至少一种可区分替代解释；</a:t>
-            </a:r>
-          </a:p>
-          <a:p xmlns:a="http://schemas.openxmlformats.org/drawingml/2006/main">
-            <a:r>
-              <a:t>- 结果先记为支持、反驳或仍不能判断；</a:t>
-            </a:r>
-          </a:p>
-          <a:p xmlns:a="http://schemas.openxmlformats.org/drawingml/2006/main">
-            <a:r>
-              <a:t>- 判断记录写清依据、取舍、反证点与下一步。</a:t>
+              <a:t>学生动作：</a:t>
+            </a:r>
+          </a:p>
+          <a:p xmlns:a="http://schemas.openxmlformats.org/drawingml/2006/main">
+            <a:r>
+              <a:t>学生指出自己的实验最可能区分哪两种解释。</a:t>
             </a:r>
           </a:p>
           <a:p xmlns:a="http://schemas.openxmlformats.org/drawingml/2006/main">
@@ -2024,7 +1434,7 @@
           </a:p>
           <a:p xmlns:a="http://schemas.openxmlformats.org/drawingml/2006/main">
             <a:r>
-              <a:t>&gt; 如果实验结果不会改变任何研究判断，这个实验就还没有完成可区分性设计。</a:t>
+              <a:t>课堂安排：按本稿下方 90 分钟教学路由安排；此页不另占独立时段。</a:t>
             </a:r>
           </a:p>
           <a:p xmlns:a="http://schemas.openxmlformats.org/drawingml/2006/main">
@@ -2034,12 +1444,12 @@
           </a:p>
           <a:p xmlns:a="http://schemas.openxmlformats.org/drawingml/2006/main">
             <a:r>
-              <a:t>教师讲述：</a:t>
-            </a:r>
-          </a:p>
-          <a:p xmlns:a="http://schemas.openxmlformats.org/drawingml/2006/main">
-            <a:r>
-              <a:t>回收机制、实验和判断三者关系，不引入新任务。</a:t>
+              <a:t>[Sources]</a:t>
+            </a:r>
+          </a:p>
+          <a:p xmlns:a="http://schemas.openxmlformats.org/drawingml/2006/main">
+            <a:r>
+              <a:t>讲义 §二-§六。</a:t>
             </a:r>
           </a:p>
           <a:p xmlns:a="http://schemas.openxmlformats.org/drawingml/2006/main">
@@ -2049,72 +1459,7 @@
           </a:p>
           <a:p xmlns:a="http://schemas.openxmlformats.org/drawingml/2006/main">
             <a:r>
-              <a:t>学生动作：</a:t>
-            </a:r>
-          </a:p>
-          <a:p xmlns:a="http://schemas.openxmlformats.org/drawingml/2006/main">
-            <a:r>
-              <a:t>学生指出自己的实验最可能区分哪两种解释。</a:t>
-            </a:r>
-          </a:p>
-          <a:p xmlns:a="http://schemas.openxmlformats.org/drawingml/2006/main">
-            <a:r>
-              <a:t/>
-            </a:r>
-          </a:p>
-          <a:p xmlns:a="http://schemas.openxmlformats.org/drawingml/2006/main">
-            <a:r>
-              <a:t>来源与边界：</a:t>
-            </a:r>
-          </a:p>
-          <a:p xmlns:a="http://schemas.openxmlformats.org/drawingml/2006/main">
-            <a:r>
-              <a:t>讲义 §二-§六。</a:t>
-            </a:r>
-          </a:p>
-          <a:p xmlns:a="http://schemas.openxmlformats.org/drawingml/2006/main">
-            <a:r>
-              <a:t/>
-            </a:r>
-          </a:p>
-          <a:p xmlns:a="http://schemas.openxmlformats.org/drawingml/2006/main">
-            <a:r>
-              <a:t>---</a:t>
-            </a:r>
-          </a:p>
-          <a:p xmlns:a="http://schemas.openxmlformats.org/drawingml/2006/main">
-            <a:r>
-              <a:t/>
-            </a:r>
-          </a:p>
-          <a:p xmlns:a="http://schemas.openxmlformats.org/drawingml/2006/main">
-            <a:r>
-              <a:t>[Sources]</a:t>
-            </a:r>
-          </a:p>
-          <a:p xmlns:a="http://schemas.openxmlformats.org/drawingml/2006/main">
-            <a:r>
-              <a:t/>
-            </a:r>
-          </a:p>
-          <a:p xmlns:a="http://schemas.openxmlformats.org/drawingml/2006/main">
-            <a:r>
-              <a:t>- 本课 handout.md 与 slides.md</a:t>
-            </a:r>
-          </a:p>
-          <a:p xmlns:a="http://schemas.openxmlformats.org/drawingml/2006/main">
-            <a:r>
-              <a:t/>
-            </a:r>
-          </a:p>
-          <a:p xmlns:a="http://schemas.openxmlformats.org/drawingml/2006/main">
-            <a:r>
-              <a:t>- ../../course/reading-card-case.md</a:t>
-            </a:r>
-          </a:p>
-          <a:p xmlns:a="http://schemas.openxmlformats.org/drawingml/2006/main">
-            <a:r>
-              <a:t/>
+              <a:t>本课 handout.md、judgment-task.md；../../course/judgment-path.md。</a:t>
             </a:r>
           </a:p>
           <a:p xmlns:a="http://schemas.openxmlformats.org/drawingml/2006/main">
@@ -2189,7 +1534,7 @@
           <a:lstStyle xmlns:a="http://schemas.openxmlformats.org/drawingml/2006/main"/>
           <a:p xmlns:a="http://schemas.openxmlformats.org/drawingml/2006/main">
             <a:r>
-              <a:t>页面：P17 退出卡：你的下一步实验真的会改变判断吗</a:t>
+              <a:t>页面：P17 保留本课决定，准备下一课输入</a:t>
             </a:r>
           </a:p>
           <a:p xmlns:a="http://schemas.openxmlformats.org/drawingml/2006/main">
@@ -2199,7 +1544,12 @@
           </a:p>
           <a:p xmlns:a="http://schemas.openxmlformats.org/drawingml/2006/main">
             <a:r>
-              <a:t>讲义位置：本课讲义；见逐页母稿映射表</a:t>
+              <a:t>讲述与校准：</a:t>
+            </a:r>
+          </a:p>
+          <a:p xmlns:a="http://schemas.openxmlformats.org/drawingml/2006/main">
+            <a:r>
+              <a:t>补清一项可区分预测，直接从现有工件整理诊所陈述。 每课课外最多60分钟；详见讲义。</a:t>
             </a:r>
           </a:p>
           <a:p xmlns:a="http://schemas.openxmlformats.org/drawingml/2006/main">
@@ -2209,37 +1559,12 @@
           </a:p>
           <a:p xmlns:a="http://schemas.openxmlformats.org/drawingml/2006/main">
             <a:r>
-              <a:t>屏显核对：</a:t>
-            </a:r>
-          </a:p>
-          <a:p xmlns:a="http://schemas.openxmlformats.org/drawingml/2006/main">
-            <a:r>
-              <a:t>退出卡（请写下）：</a:t>
-            </a:r>
-          </a:p>
-          <a:p xmlns:a="http://schemas.openxmlformats.org/drawingml/2006/main">
-            <a:r>
-              <a:t>- 你的主机制假设是什么？</a:t>
-            </a:r>
-          </a:p>
-          <a:p xmlns:a="http://schemas.openxmlformats.org/drawingml/2006/main">
-            <a:r>
-              <a:t>- 你的实验在什么结果下支持主假设？什么结果下支持替代假设？</a:t>
-            </a:r>
-          </a:p>
-          <a:p xmlns:a="http://schemas.openxmlformats.org/drawingml/2006/main">
-            <a:r>
-              <a:t>- 你的研究判断当场写了吗？最难写的字段是哪个？</a:t>
-            </a:r>
-          </a:p>
-          <a:p xmlns:a="http://schemas.openxmlformats.org/drawingml/2006/main">
-            <a:r>
-              <a:t>- 你的实验能改变研究判断吗？如果不能，缺了什么？</a:t>
-            </a:r>
-          </a:p>
-          <a:p xmlns:a="http://schemas.openxmlformats.org/drawingml/2006/main">
-            <a:r>
-              <a:t>- 你今天最不确定的一点是什么？</a:t>
+              <a:t>学生动作：</a:t>
+            </a:r>
+          </a:p>
+          <a:p xmlns:a="http://schemas.openxmlformats.org/drawingml/2006/main">
+            <a:r>
+              <a:t>定位实际工件与下一项动作；按既定预算收口。</a:t>
             </a:r>
           </a:p>
           <a:p xmlns:a="http://schemas.openxmlformats.org/drawingml/2006/main">
@@ -2249,22 +1574,7 @@
           </a:p>
           <a:p xmlns:a="http://schemas.openxmlformats.org/drawingml/2006/main">
             <a:r>
-              <a:t>第 8 课预告：学生研究方案分享与设计诊所</a:t>
-            </a:r>
-          </a:p>
-          <a:p xmlns:a="http://schemas.openxmlformats.org/drawingml/2006/main">
-            <a:r>
-              <a:t>- 按限时五段陈述问题、证据、机制、最小验证与最大风险</a:t>
-            </a:r>
-          </a:p>
-          <a:p xmlns:a="http://schemas.openxmlformats.org/drawingml/2006/main">
-            <a:r>
-              <a:t>- 同伴按重要性、证据充分性、可检验性、周期可行性和判断改变给反馈</a:t>
-            </a:r>
-          </a:p>
-          <a:p xmlns:a="http://schemas.openxmlformats.org/drawingml/2006/main">
-            <a:r>
-              <a:t>- 不新增正式提交；本课产出是方案分享直接输入</a:t>
+              <a:t>课堂安排：按本稿下方 90 分钟教学路由安排；此页不另占独立时段。</a:t>
             </a:r>
           </a:p>
           <a:p xmlns:a="http://schemas.openxmlformats.org/drawingml/2006/main">
@@ -2274,7 +1584,12 @@
           </a:p>
           <a:p xmlns:a="http://schemas.openxmlformats.org/drawingml/2006/main">
             <a:r>
-              <a:t>&gt; 第 8 课不评价题目是否时髦；反馈聚焦重要性、证据、可检验性、周期可行性和判断改变。</a:t>
+              <a:t>[Sources]</a:t>
+            </a:r>
+          </a:p>
+          <a:p xmlns:a="http://schemas.openxmlformats.org/drawingml/2006/main">
+            <a:r>
+              <a:t>讲义 §学习目标；[assignments.md](../../course/assignments.md) 第 8 课方案分享要求与第 9 课判断门条件。</a:t>
             </a:r>
           </a:p>
           <a:p xmlns:a="http://schemas.openxmlformats.org/drawingml/2006/main">
@@ -2284,77 +1599,7 @@
           </a:p>
           <a:p xmlns:a="http://schemas.openxmlformats.org/drawingml/2006/main">
             <a:r>
-              <a:t>教师讲述：</a:t>
-            </a:r>
-          </a:p>
-          <a:p xmlns:a="http://schemas.openxmlformats.org/drawingml/2006/main">
-            <a:r>
-              <a:t>不新增课后正式作业。本课产出（机制假设列表、研究判断、实验规格草图）是第 8 课 3 分钟陈述的直接输入。第 8 课 rubric 使用 assignments.md 的五个权威反馈维度。</a:t>
-            </a:r>
-          </a:p>
-          <a:p xmlns:a="http://schemas.openxmlformats.org/drawingml/2006/main">
-            <a:r>
-              <a:t/>
-            </a:r>
-          </a:p>
-          <a:p xmlns:a="http://schemas.openxmlformats.org/drawingml/2006/main">
-            <a:r>
-              <a:t>学生动作：</a:t>
-            </a:r>
-          </a:p>
-          <a:p xmlns:a="http://schemas.openxmlformats.org/drawingml/2006/main">
-            <a:r>
-              <a:t>个人填写退出卡。下课。</a:t>
-            </a:r>
-          </a:p>
-          <a:p xmlns:a="http://schemas.openxmlformats.org/drawingml/2006/main">
-            <a:r>
-              <a:t/>
-            </a:r>
-          </a:p>
-          <a:p xmlns:a="http://schemas.openxmlformats.org/drawingml/2006/main">
-            <a:r>
-              <a:t>来源与边界：</a:t>
-            </a:r>
-          </a:p>
-          <a:p xmlns:a="http://schemas.openxmlformats.org/drawingml/2006/main">
-            <a:r>
-              <a:t>讲义 §学习目标；[assignments.md](../../course/assignments.md) 第 8 课方案分享要求与第 9 课判断门条件。</a:t>
-            </a:r>
-          </a:p>
-          <a:p xmlns:a="http://schemas.openxmlformats.org/drawingml/2006/main">
-            <a:r>
-              <a:t/>
-            </a:r>
-          </a:p>
-          <a:p xmlns:a="http://schemas.openxmlformats.org/drawingml/2006/main">
-            <a:r>
-              <a:t>[Sources]</a:t>
-            </a:r>
-          </a:p>
-          <a:p xmlns:a="http://schemas.openxmlformats.org/drawingml/2006/main">
-            <a:r>
-              <a:t/>
-            </a:r>
-          </a:p>
-          <a:p xmlns:a="http://schemas.openxmlformats.org/drawingml/2006/main">
-            <a:r>
-              <a:t>- 本课 handout.md 与 slides.md</a:t>
-            </a:r>
-          </a:p>
-          <a:p xmlns:a="http://schemas.openxmlformats.org/drawingml/2006/main">
-            <a:r>
-              <a:t/>
-            </a:r>
-          </a:p>
-          <a:p xmlns:a="http://schemas.openxmlformats.org/drawingml/2006/main">
-            <a:r>
-              <a:t>- ../../course/reading-card-case.md</a:t>
-            </a:r>
-          </a:p>
-          <a:p xmlns:a="http://schemas.openxmlformats.org/drawingml/2006/main">
-            <a:r>
-              <a:t/>
+              <a:t>本课 handout.md、judgment-task.md；../../course/judgment-path.md。教学构造仅用于方法判断；本人结果以实际记录为准。</a:t>
             </a:r>
           </a:p>
           <a:p xmlns:a="http://schemas.openxmlformats.org/drawingml/2006/main">
@@ -2439,7 +1684,12 @@
           </a:p>
           <a:p xmlns:a="http://schemas.openxmlformats.org/drawingml/2006/main">
             <a:r>
-              <a:t>讲义位置：本课讲义；见逐页母稿映射表</a:t>
+              <a:t>讲述与校准：</a:t>
+            </a:r>
+          </a:p>
+          <a:p xmlns:a="http://schemas.openxmlformats.org/drawingml/2006/main">
+            <a:r>
+              <a:t>回扣第 6 课：问题门确认了问题值得问、问得清、做得完，但没有回答"为什么预期结果会发生"。本课进入阶段三+六，处理"机制、替代解释和设计取舍"。</a:t>
             </a:r>
           </a:p>
           <a:p xmlns:a="http://schemas.openxmlformats.org/drawingml/2006/main">
@@ -2449,27 +1699,12 @@
           </a:p>
           <a:p xmlns:a="http://schemas.openxmlformats.org/drawingml/2006/main">
             <a:r>
-              <a:t>屏显核对：</a:t>
-            </a:r>
-          </a:p>
-          <a:p xmlns:a="http://schemas.openxmlformats.org/drawingml/2006/main">
-            <a:r>
-              <a:t>第 6 课已建立：</a:t>
-            </a:r>
-          </a:p>
-          <a:p xmlns:a="http://schemas.openxmlformats.org/drawingml/2006/main">
-            <a:r>
-              <a:t>- 可证伪命题（含范围、非例）</a:t>
-            </a:r>
-          </a:p>
-          <a:p xmlns:a="http://schemas.openxmlformats.org/drawingml/2006/main">
-            <a:r>
-              <a:t>- 第一性原理必要条件清单</a:t>
-            </a:r>
-          </a:p>
-          <a:p xmlns:a="http://schemas.openxmlformats.org/drawingml/2006/main">
-            <a:r>
-              <a:t>- 证据地图初版与研究空白候选</a:t>
+              <a:t>学生动作：</a:t>
+            </a:r>
+          </a:p>
+          <a:p xmlns:a="http://schemas.openxmlformats.org/drawingml/2006/main">
+            <a:r>
+              <a:t>快问：你第 6 课问题门的可证伪命题是什么？它背后隐含的机制是什么？只听回答，不评价。</a:t>
             </a:r>
           </a:p>
           <a:p xmlns:a="http://schemas.openxmlformats.org/drawingml/2006/main">
@@ -2479,22 +1714,7 @@
           </a:p>
           <a:p xmlns:a="http://schemas.openxmlformats.org/drawingml/2006/main">
             <a:r>
-              <a:t>仍未回答：</a:t>
-            </a:r>
-          </a:p>
-          <a:p xmlns:a="http://schemas.openxmlformats.org/drawingml/2006/main">
-            <a:r>
-              <a:t>- 为什么预期结果会发生？（机制假设）</a:t>
-            </a:r>
-          </a:p>
-          <a:p xmlns:a="http://schemas.openxmlformats.org/drawingml/2006/main">
-            <a:r>
-              <a:t>- 哪些替代解释也能产生同一结果？（替代假设）</a:t>
-            </a:r>
-          </a:p>
-          <a:p xmlns:a="http://schemas.openxmlformats.org/drawingml/2006/main">
-            <a:r>
-              <a:t>- 实验在什么结果下支持主假设、什么结果下支持替代假设？（区分实验）</a:t>
+              <a:t>课堂安排：按本稿下方 90 分钟教学路由安排；此页不另占独立时段。</a:t>
             </a:r>
           </a:p>
           <a:p xmlns:a="http://schemas.openxmlformats.org/drawingml/2006/main">
@@ -2504,7 +1724,12 @@
           </a:p>
           <a:p xmlns:a="http://schemas.openxmlformats.org/drawingml/2006/main">
             <a:r>
-              <a:t>&gt; 问题成立 ≠ 假设成立。</a:t>
+              <a:t>[Sources]</a:t>
+            </a:r>
+          </a:p>
+          <a:p xmlns:a="http://schemas.openxmlformats.org/drawingml/2006/main">
+            <a:r>
+              <a:t>回扣第 6 课讲义与 [assignments.md](../../course/assignments.md) 问题门条件。</a:t>
             </a:r>
           </a:p>
           <a:p xmlns:a="http://schemas.openxmlformats.org/drawingml/2006/main">
@@ -2514,142 +1739,7 @@
           </a:p>
           <a:p xmlns:a="http://schemas.openxmlformats.org/drawingml/2006/main">
             <a:r>
-              <a:t>教师讲述：</a:t>
-            </a:r>
-          </a:p>
-          <a:p xmlns:a="http://schemas.openxmlformats.org/drawingml/2006/main">
-            <a:r>
-              <a:t>回扣第 6 课：问题门确认了问题值得问、问得清、做得完，但没有回答"为什么预期结果会发生"。本课进入阶段三+六，处理"机制、替代解释和设计取舍"。</a:t>
-            </a:r>
-          </a:p>
-          <a:p xmlns:a="http://schemas.openxmlformats.org/drawingml/2006/main">
-            <a:r>
-              <a:t/>
-            </a:r>
-          </a:p>
-          <a:p xmlns:a="http://schemas.openxmlformats.org/drawingml/2006/main">
-            <a:r>
-              <a:t>学生动作：</a:t>
-            </a:r>
-          </a:p>
-          <a:p xmlns:a="http://schemas.openxmlformats.org/drawingml/2006/main">
-            <a:r>
-              <a:t>快问：你第 6 课问题门的可证伪命题是什么？它背后隐含的机制是什么？只听回答，不评价。</a:t>
-            </a:r>
-          </a:p>
-          <a:p xmlns:a="http://schemas.openxmlformats.org/drawingml/2006/main">
-            <a:r>
-              <a:t/>
-            </a:r>
-          </a:p>
-          <a:p xmlns:a="http://schemas.openxmlformats.org/drawingml/2006/main">
-            <a:r>
-              <a:t>本课板书、诊断与串词：</a:t>
-            </a:r>
-          </a:p>
-          <a:p xmlns:a="http://schemas.openxmlformats.org/drawingml/2006/main">
-            <a:r>
-              <a:t>本节替换同类口头提示，不增加既有时段。开场诊断嵌入现有开场/回顾，后续再沿原实践时段操作。</a:t>
-            </a:r>
-          </a:p>
-          <a:p xmlns:a="http://schemas.openxmlformats.org/drawingml/2006/main">
-            <a:r>
-              <a:t/>
-            </a:r>
-          </a:p>
-          <a:p xmlns:a="http://schemas.openxmlformats.org/drawingml/2006/main">
-            <a:r>
-              <a:t>- **板书主线**：Q1结果｜H1机制↔A2测量；A1质量；A3范围。</a:t>
-            </a:r>
-          </a:p>
-          <a:p xmlns:a="http://schemas.openxmlformats.org/drawingml/2006/main">
-            <a:r>
-              <a:t>- **诊断问题**：带字段输出得分高，已经证明生成机制了吗？</a:t>
-            </a:r>
-          </a:p>
-          <a:p xmlns:a="http://schemas.openxmlformats.org/drawingml/2006/main">
-            <a:r>
-              <a:t>- **预期回答**：没有；须区分输出保留与评分提示，并补过程/对照。</a:t>
-            </a:r>
-          </a:p>
-          <a:p xmlns:a="http://schemas.openxmlformats.org/drawingml/2006/main">
-            <a:r>
-              <a:t>- **常见误答后的追问**：若把质量代价当互斥机制，举“两者同时发生”的反例。</a:t>
-            </a:r>
-          </a:p>
-          <a:p xmlns:a="http://schemas.openxmlformats.org/drawingml/2006/main">
-            <a:r>
-              <a:t>- **过渡串词**：“把尚未区分的观察带给同伴，比展示确定答案更有用。”</a:t>
-            </a:r>
-          </a:p>
-          <a:p xmlns:a="http://schemas.openxmlformats.org/drawingml/2006/main">
-            <a:r>
-              <a:t>- **当堂最小产出**：主假设与一个替代的映射、反证点和一条判断。</a:t>
-            </a:r>
-          </a:p>
-          <a:p xmlns:a="http://schemas.openxmlformats.org/drawingml/2006/main">
-            <a:r>
-              <a:t>- **退出记录**：写“已完成的动作、本人项目仍缺的证据/工件、下次补齐位置”。使用教师包时标明课堂方法练习，不能据此宣称本人研究门通过；正式提交课次仍为第 6、9、13、16 课。</a:t>
-            </a:r>
-          </a:p>
-          <a:p xmlns:a="http://schemas.openxmlformats.org/drawingml/2006/main">
-            <a:r>
-              <a:t/>
-            </a:r>
-          </a:p>
-          <a:p xmlns:a="http://schemas.openxmlformats.org/drawingml/2006/main">
-            <a:r>
-              <a:t>来源与边界：</a:t>
-            </a:r>
-          </a:p>
-          <a:p xmlns:a="http://schemas.openxmlformats.org/drawingml/2006/main">
-            <a:r>
-              <a:t>回扣第 6 课讲义与 [assignments.md](../../course/assignments.md) 问题门条件。</a:t>
-            </a:r>
-          </a:p>
-          <a:p xmlns:a="http://schemas.openxmlformats.org/drawingml/2006/main">
-            <a:r>
-              <a:t/>
-            </a:r>
-          </a:p>
-          <a:p xmlns:a="http://schemas.openxmlformats.org/drawingml/2006/main">
-            <a:r>
-              <a:t>---</a:t>
-            </a:r>
-          </a:p>
-          <a:p xmlns:a="http://schemas.openxmlformats.org/drawingml/2006/main">
-            <a:r>
-              <a:t/>
-            </a:r>
-          </a:p>
-          <a:p xmlns:a="http://schemas.openxmlformats.org/drawingml/2006/main">
-            <a:r>
-              <a:t>[Sources]</a:t>
-            </a:r>
-          </a:p>
-          <a:p xmlns:a="http://schemas.openxmlformats.org/drawingml/2006/main">
-            <a:r>
-              <a:t/>
-            </a:r>
-          </a:p>
-          <a:p xmlns:a="http://schemas.openxmlformats.org/drawingml/2006/main">
-            <a:r>
-              <a:t>- 本课 handout.md 与 slides.md</a:t>
-            </a:r>
-          </a:p>
-          <a:p xmlns:a="http://schemas.openxmlformats.org/drawingml/2006/main">
-            <a:r>
-              <a:t/>
-            </a:r>
-          </a:p>
-          <a:p xmlns:a="http://schemas.openxmlformats.org/drawingml/2006/main">
-            <a:r>
-              <a:t>- ../../course/reading-card-case.md</a:t>
-            </a:r>
-          </a:p>
-          <a:p xmlns:a="http://schemas.openxmlformats.org/drawingml/2006/main">
-            <a:r>
-              <a:t/>
+              <a:t>本课 handout.md、judgment-task.md；../../course/judgment-path.md。</a:t>
             </a:r>
           </a:p>
           <a:p xmlns:a="http://schemas.openxmlformats.org/drawingml/2006/main">
@@ -2724,7 +1814,7 @@
           <a:lstStyle xmlns:a="http://schemas.openxmlformats.org/drawingml/2006/main"/>
           <a:p xmlns:a="http://schemas.openxmlformats.org/drawingml/2006/main">
             <a:r>
-              <a:t>页面：P03 本课只完成机制—判断—映射的最小闭环</a:t>
+              <a:t>页面：P03 哪项实验能区分解释</a:t>
             </a:r>
           </a:p>
           <a:p xmlns:a="http://schemas.openxmlformats.org/drawingml/2006/main">
@@ -2734,7 +1824,12 @@
           </a:p>
           <a:p xmlns:a="http://schemas.openxmlformats.org/drawingml/2006/main">
             <a:r>
-              <a:t>讲义位置：本课讲义；见逐页母稿映射表</a:t>
+              <a:t>讲述与校准：</a:t>
+            </a:r>
+          </a:p>
+          <a:p xmlns:a="http://schemas.openxmlformats.org/drawingml/2006/main">
+            <a:r>
+              <a:t>先独立作答，再同伴比较；以下依据只在校准时揭示。</a:t>
             </a:r>
           </a:p>
           <a:p xmlns:a="http://schemas.openxmlformats.org/drawingml/2006/main">
@@ -2744,12 +1839,7 @@
           </a:p>
           <a:p xmlns:a="http://schemas.openxmlformats.org/drawingml/2006/main">
             <a:r>
-              <a:t>屏显核对：</a:t>
-            </a:r>
-          </a:p>
-          <a:p xmlns:a="http://schemas.openxmlformats.org/drawingml/2006/main">
-            <a:r>
-              <a:t>完成本课后，你能：</a:t>
+              <a:t>Y 最直接检查测量解释；格式隐藏不能删掉语义内容。差异保留支持真实内容差异但不唯一证明生成机制；差异消失支持测量解释但也可能有评分噪声。X 主要检查稳定性，Z 同时改多个因素。本人若研究校验器，可用输入不变、仅改变校验规则来区分“真拦截”与“直接丢所有记录”。</a:t>
             </a:r>
           </a:p>
           <a:p xmlns:a="http://schemas.openxmlformats.org/drawingml/2006/main">
@@ -2759,22 +1849,12 @@
           </a:p>
           <a:p xmlns:a="http://schemas.openxmlformats.org/drawingml/2006/main">
             <a:r>
-              <a:t>1. 写出含中间过程的主机制假设；</a:t>
-            </a:r>
-          </a:p>
-          <a:p xmlns:a="http://schemas.openxmlformats.org/drawingml/2006/main">
-            <a:r>
-              <a:t>2. 写出 1 个对同一结果给出不同解释的可区分替代；</a:t>
-            </a:r>
-          </a:p>
-          <a:p xmlns:a="http://schemas.openxmlformats.org/drawingml/2006/main">
-            <a:r>
-              <a:t>3. 写出 1 条带依据和边界的研究判断；</a:t>
-            </a:r>
-          </a:p>
-          <a:p xmlns:a="http://schemas.openxmlformats.org/drawingml/2006/main">
-            <a:r>
-              <a:t>4. 画出“支持／反驳／仍不能判断”映射草图。</a:t>
+              <a:t>学生动作：</a:t>
+            </a:r>
+          </a:p>
+          <a:p xmlns:a="http://schemas.openxmlformats.org/drawingml/2006/main">
+            <a:r>
+              <a:t>先独立写决定和证据，后同伴比较；校准后再回写。</a:t>
             </a:r>
           </a:p>
           <a:p xmlns:a="http://schemas.openxmlformats.org/drawingml/2006/main">
@@ -2784,7 +1864,7 @@
           </a:p>
           <a:p xmlns:a="http://schemas.openxmlformats.org/drawingml/2006/main">
             <a:r>
-              <a:t>课堂最低产出：1 主机制 + 1 个可区分替代 + 1 条研究判断 + 1 张映射草图。</a:t>
+              <a:t>课堂安排：按本稿下方 90 分钟教学路由安排；此页不另占独立时段。</a:t>
             </a:r>
           </a:p>
           <a:p xmlns:a="http://schemas.openxmlformats.org/drawingml/2006/main">
@@ -2794,7 +1874,12 @@
           </a:p>
           <a:p xmlns:a="http://schemas.openxmlformats.org/drawingml/2006/main">
             <a:r>
-              <a:t>&gt; 课后只补全课堂未完成的表达；完整工程规格在第 9 课完成。</a:t>
+              <a:t>[Sources]</a:t>
+            </a:r>
+          </a:p>
+          <a:p xmlns:a="http://schemas.openxmlformats.org/drawingml/2006/main">
+            <a:r>
+              <a:t>[备课规划.md](../备课规划.md) 第 7 课目标段；[assignments.md](../../course/assignments.md) 第 9 课判断门条件与第 8 课方案分享要求。</a:t>
             </a:r>
           </a:p>
           <a:p xmlns:a="http://schemas.openxmlformats.org/drawingml/2006/main">
@@ -2804,87 +1889,7 @@
           </a:p>
           <a:p xmlns:a="http://schemas.openxmlformats.org/drawingml/2006/main">
             <a:r>
-              <a:t>教师讲述：</a:t>
-            </a:r>
-          </a:p>
-          <a:p xmlns:a="http://schemas.openxmlformats.org/drawingml/2006/main">
-            <a:r>
-              <a:t>明确边界：课堂不追求候选数量或完整规格。课后可补全未完成表达，但不把删掉的工程规格变成第 7 课必做作业。</a:t>
-            </a:r>
-          </a:p>
-          <a:p xmlns:a="http://schemas.openxmlformats.org/drawingml/2006/main">
-            <a:r>
-              <a:t/>
-            </a:r>
-          </a:p>
-          <a:p xmlns:a="http://schemas.openxmlformats.org/drawingml/2006/main">
-            <a:r>
-              <a:t>学生动作：</a:t>
-            </a:r>
-          </a:p>
-          <a:p xmlns:a="http://schemas.openxmlformats.org/drawingml/2006/main">
-            <a:r>
-              <a:t>无。</a:t>
-            </a:r>
-          </a:p>
-          <a:p xmlns:a="http://schemas.openxmlformats.org/drawingml/2006/main">
-            <a:r>
-              <a:t/>
-            </a:r>
-          </a:p>
-          <a:p xmlns:a="http://schemas.openxmlformats.org/drawingml/2006/main">
-            <a:r>
-              <a:t>来源与边界：</a:t>
-            </a:r>
-          </a:p>
-          <a:p xmlns:a="http://schemas.openxmlformats.org/drawingml/2006/main">
-            <a:r>
-              <a:t>[备课规划.md](../备课规划.md) 第 7 课目标段；[assignments.md](../../course/assignments.md) 第 9 课判断门条件与第 8 课方案分享要求。</a:t>
-            </a:r>
-          </a:p>
-          <a:p xmlns:a="http://schemas.openxmlformats.org/drawingml/2006/main">
-            <a:r>
-              <a:t/>
-            </a:r>
-          </a:p>
-          <a:p xmlns:a="http://schemas.openxmlformats.org/drawingml/2006/main">
-            <a:r>
-              <a:t>---</a:t>
-            </a:r>
-          </a:p>
-          <a:p xmlns:a="http://schemas.openxmlformats.org/drawingml/2006/main">
-            <a:r>
-              <a:t/>
-            </a:r>
-          </a:p>
-          <a:p xmlns:a="http://schemas.openxmlformats.org/drawingml/2006/main">
-            <a:r>
-              <a:t>[Sources]</a:t>
-            </a:r>
-          </a:p>
-          <a:p xmlns:a="http://schemas.openxmlformats.org/drawingml/2006/main">
-            <a:r>
-              <a:t/>
-            </a:r>
-          </a:p>
-          <a:p xmlns:a="http://schemas.openxmlformats.org/drawingml/2006/main">
-            <a:r>
-              <a:t>- 本课 handout.md 与 slides.md</a:t>
-            </a:r>
-          </a:p>
-          <a:p xmlns:a="http://schemas.openxmlformats.org/drawingml/2006/main">
-            <a:r>
-              <a:t/>
-            </a:r>
-          </a:p>
-          <a:p xmlns:a="http://schemas.openxmlformats.org/drawingml/2006/main">
-            <a:r>
-              <a:t>- ../../course/reading-card-case.md</a:t>
-            </a:r>
-          </a:p>
-          <a:p xmlns:a="http://schemas.openxmlformats.org/drawingml/2006/main">
-            <a:r>
-              <a:t/>
+              <a:t>本课 handout.md、judgment-task.md；../../course/judgment-path.md。教学构造仅用于方法判断；本人结果以实际记录为准。</a:t>
             </a:r>
           </a:p>
           <a:p xmlns:a="http://schemas.openxmlformats.org/drawingml/2006/main">
@@ -2969,7 +1974,12 @@
           </a:p>
           <a:p xmlns:a="http://schemas.openxmlformats.org/drawingml/2006/main">
             <a:r>
-              <a:t>讲义位置：handout.md §二、从问题到机制假设；四、从假设到区分观察的映射草图</a:t>
+              <a:t>讲述与校准：</a:t>
+            </a:r>
+          </a:p>
+          <a:p xmlns:a="http://schemas.openxmlformats.org/drawingml/2006/main">
+            <a:r>
+              <a:t>H1必须有中间过程；“阅读卡更好”只是换词复述结果。请学生指出两句话各自需要什么证据。H1需要过程观察或能区分原因的对照，不能直接由两个总分成立。</a:t>
             </a:r>
           </a:p>
           <a:p xmlns:a="http://schemas.openxmlformats.org/drawingml/2006/main">
@@ -2979,17 +1989,12 @@
           </a:p>
           <a:p xmlns:a="http://schemas.openxmlformats.org/drawingml/2006/main">
             <a:r>
-              <a:t>屏显核对：</a:t>
-            </a:r>
-          </a:p>
-          <a:p xmlns:a="http://schemas.openxmlformats.org/drawingml/2006/main">
-            <a:r>
-              <a:t>Q1：阅读卡组遗漏更少。</a:t>
-            </a:r>
-          </a:p>
-          <a:p xmlns:a="http://schemas.openxmlformats.org/drawingml/2006/main">
-            <a:r>
-              <a:t>H1：生成时显式列出限定条件，促进输出保留这些条件。</a:t>
+              <a:t>学生动作：</a:t>
+            </a:r>
+          </a:p>
+          <a:p xmlns:a="http://schemas.openxmlformats.org/drawingml/2006/main">
+            <a:r>
+              <a:t>把一条“更好”改为结果命题，再单独写机制候选。</a:t>
             </a:r>
           </a:p>
           <a:p xmlns:a="http://schemas.openxmlformats.org/drawingml/2006/main">
@@ -2999,12 +2004,7 @@
           </a:p>
           <a:p xmlns:a="http://schemas.openxmlformats.org/drawingml/2006/main">
             <a:r>
-              <a:t>看到差异，回答了多少？</a:t>
-            </a:r>
-          </a:p>
-          <a:p xmlns:a="http://schemas.openxmlformats.org/drawingml/2006/main">
-            <a:r>
-              <a:t>结果可能与 Q1 一致，原因仍需区分。</a:t>
+              <a:t>课堂安排：按本稿下方 90 分钟教学路由安排；此页不另占独立时段。</a:t>
             </a:r>
           </a:p>
           <a:p xmlns:a="http://schemas.openxmlformats.org/drawingml/2006/main">
@@ -3014,12 +2014,12 @@
           </a:p>
           <a:p xmlns:a="http://schemas.openxmlformats.org/drawingml/2006/main">
             <a:r>
-              <a:t>教师讲述：</a:t>
-            </a:r>
-          </a:p>
-          <a:p xmlns:a="http://schemas.openxmlformats.org/drawingml/2006/main">
-            <a:r>
-              <a:t>H1必须有中间过程；“阅读卡更好”只是换词复述结果。请学生指出两句话各自需要什么证据。H1需要过程观察或能区分原因的对照，不能直接由两个总分成立。</a:t>
+              <a:t>[Sources]</a:t>
+            </a:r>
+          </a:p>
+          <a:p xmlns:a="http://schemas.openxmlformats.org/drawingml/2006/main">
+            <a:r>
+              <a:t>./handout.md；课堂示例与构造数据见 ../../course/reading-card-case.md</a:t>
             </a:r>
           </a:p>
           <a:p xmlns:a="http://schemas.openxmlformats.org/drawingml/2006/main">
@@ -3029,62 +2029,7 @@
           </a:p>
           <a:p xmlns:a="http://schemas.openxmlformats.org/drawingml/2006/main">
             <a:r>
-              <a:t>学生动作：</a:t>
-            </a:r>
-          </a:p>
-          <a:p xmlns:a="http://schemas.openxmlformats.org/drawingml/2006/main">
-            <a:r>
-              <a:t>把一条“更好”改为结果命题，再单独写机制候选。</a:t>
-            </a:r>
-          </a:p>
-          <a:p xmlns:a="http://schemas.openxmlformats.org/drawingml/2006/main">
-            <a:r>
-              <a:t/>
-            </a:r>
-          </a:p>
-          <a:p xmlns:a="http://schemas.openxmlformats.org/drawingml/2006/main">
-            <a:r>
-              <a:t>来源与边界：</a:t>
-            </a:r>
-          </a:p>
-          <a:p xmlns:a="http://schemas.openxmlformats.org/drawingml/2006/main">
-            <a:r>
-              <a:t>./handout.md；课堂示例与构造数据见 ../../course/reading-card-case.md</a:t>
-            </a:r>
-          </a:p>
-          <a:p xmlns:a="http://schemas.openxmlformats.org/drawingml/2006/main">
-            <a:r>
-              <a:t/>
-            </a:r>
-          </a:p>
-          <a:p xmlns:a="http://schemas.openxmlformats.org/drawingml/2006/main">
-            <a:r>
-              <a:t>[Sources]</a:t>
-            </a:r>
-          </a:p>
-          <a:p xmlns:a="http://schemas.openxmlformats.org/drawingml/2006/main">
-            <a:r>
-              <a:t/>
-            </a:r>
-          </a:p>
-          <a:p xmlns:a="http://schemas.openxmlformats.org/drawingml/2006/main">
-            <a:r>
-              <a:t>- 本课 handout.md 与 slides.md</a:t>
-            </a:r>
-          </a:p>
-          <a:p xmlns:a="http://schemas.openxmlformats.org/drawingml/2006/main">
-            <a:r>
-              <a:t/>
-            </a:r>
-          </a:p>
-          <a:p xmlns:a="http://schemas.openxmlformats.org/drawingml/2006/main">
-            <a:r>
-              <a:t>- ../../course/reading-card-case.md</a:t>
-            </a:r>
-          </a:p>
-          <a:p xmlns:a="http://schemas.openxmlformats.org/drawingml/2006/main">
-            <a:r>
-              <a:t/>
+              <a:t>本课 handout.md、judgment-task.md；../../course/judgment-path.md。</a:t>
             </a:r>
           </a:p>
           <a:p xmlns:a="http://schemas.openxmlformats.org/drawingml/2006/main">
@@ -3169,7 +2114,12 @@
           </a:p>
           <a:p xmlns:a="http://schemas.openxmlformats.org/drawingml/2006/main">
             <a:r>
-              <a:t>讲义位置：handout.md §二、从问题到机制假设；四、从假设到区分观察的映射草图</a:t>
+              <a:t>讲述与校准：</a:t>
+            </a:r>
+          </a:p>
+          <a:p xmlns:a="http://schemas.openxmlformats.org/drawingml/2006/main">
+            <a:r>
+              <a:t>本页只练H1/A2。A1可以与Q1同时成立，A3限定外推范围，两者不能冒充与H1互斥的机制。学生自己的项目仍应产生实质替代解释，不能机械照抄这些编号。</a:t>
             </a:r>
           </a:p>
           <a:p xmlns:a="http://schemas.openxmlformats.org/drawingml/2006/main">
@@ -3179,17 +2129,12 @@
           </a:p>
           <a:p xmlns:a="http://schemas.openxmlformats.org/drawingml/2006/main">
             <a:r>
-              <a:t>屏显核对：</a:t>
-            </a:r>
-          </a:p>
-          <a:p xmlns:a="http://schemas.openxmlformats.org/drawingml/2006/main">
-            <a:r>
-              <a:t>H1｜生成时显式列条件，输出确实保留更多。</a:t>
-            </a:r>
-          </a:p>
-          <a:p xmlns:a="http://schemas.openxmlformats.org/drawingml/2006/main">
-            <a:r>
-              <a:t>A2｜评分者看见字段后，更容易给出保留分。</a:t>
+              <a:t>学生动作：</a:t>
+            </a:r>
+          </a:p>
+          <a:p xmlns:a="http://schemas.openxmlformats.org/drawingml/2006/main">
+            <a:r>
+              <a:t>提出一种让评分者看不到输出来源、又不丢失待评内容的评价安排。</a:t>
             </a:r>
           </a:p>
           <a:p xmlns:a="http://schemas.openxmlformats.org/drawingml/2006/main">
@@ -3199,17 +2144,7 @@
           </a:p>
           <a:p xmlns:a="http://schemas.openxmlformats.org/drawingml/2006/main">
             <a:r>
-              <a:t>另列检查：</a:t>
-            </a:r>
-          </a:p>
-          <a:p xmlns:a="http://schemas.openxmlformats.org/drawingml/2006/main">
-            <a:r>
-              <a:t>A1｜其他质量错误是否增加？</a:t>
-            </a:r>
-          </a:p>
-          <a:p xmlns:a="http://schemas.openxmlformats.org/drawingml/2006/main">
-            <a:r>
-              <a:t>A3｜效果是否依赖材料结构？</a:t>
+              <a:t>课堂安排：按本稿下方 90 分钟教学路由安排；此页不另占独立时段。</a:t>
             </a:r>
           </a:p>
           <a:p xmlns:a="http://schemas.openxmlformats.org/drawingml/2006/main">
@@ -3219,12 +2154,12 @@
           </a:p>
           <a:p xmlns:a="http://schemas.openxmlformats.org/drawingml/2006/main">
             <a:r>
-              <a:t>教师讲述：</a:t>
-            </a:r>
-          </a:p>
-          <a:p xmlns:a="http://schemas.openxmlformats.org/drawingml/2006/main">
-            <a:r>
-              <a:t>本页只练H1/A2。A1可以与Q1同时成立，A3限定外推范围，两者不能冒充与H1互斥的机制。学生自己的项目仍应产生实质替代解释，不能机械照抄这些编号。</a:t>
+              <a:t>[Sources]</a:t>
+            </a:r>
+          </a:p>
+          <a:p xmlns:a="http://schemas.openxmlformats.org/drawingml/2006/main">
+            <a:r>
+              <a:t>./handout.md；课堂示例与构造数据见 ../../course/reading-card-case.md</a:t>
             </a:r>
           </a:p>
           <a:p xmlns:a="http://schemas.openxmlformats.org/drawingml/2006/main">
@@ -3234,62 +2169,7 @@
           </a:p>
           <a:p xmlns:a="http://schemas.openxmlformats.org/drawingml/2006/main">
             <a:r>
-              <a:t>学生动作：</a:t>
-            </a:r>
-          </a:p>
-          <a:p xmlns:a="http://schemas.openxmlformats.org/drawingml/2006/main">
-            <a:r>
-              <a:t>提出一种让评分者看不到输出来源、又不丢失待评内容的评价安排。</a:t>
-            </a:r>
-          </a:p>
-          <a:p xmlns:a="http://schemas.openxmlformats.org/drawingml/2006/main">
-            <a:r>
-              <a:t/>
-            </a:r>
-          </a:p>
-          <a:p xmlns:a="http://schemas.openxmlformats.org/drawingml/2006/main">
-            <a:r>
-              <a:t>来源与边界：</a:t>
-            </a:r>
-          </a:p>
-          <a:p xmlns:a="http://schemas.openxmlformats.org/drawingml/2006/main">
-            <a:r>
-              <a:t>./handout.md；课堂示例与构造数据见 ../../course/reading-card-case.md</a:t>
-            </a:r>
-          </a:p>
-          <a:p xmlns:a="http://schemas.openxmlformats.org/drawingml/2006/main">
-            <a:r>
-              <a:t/>
-            </a:r>
-          </a:p>
-          <a:p xmlns:a="http://schemas.openxmlformats.org/drawingml/2006/main">
-            <a:r>
-              <a:t>[Sources]</a:t>
-            </a:r>
-          </a:p>
-          <a:p xmlns:a="http://schemas.openxmlformats.org/drawingml/2006/main">
-            <a:r>
-              <a:t/>
-            </a:r>
-          </a:p>
-          <a:p xmlns:a="http://schemas.openxmlformats.org/drawingml/2006/main">
-            <a:r>
-              <a:t>- 本课 handout.md 与 slides.md</a:t>
-            </a:r>
-          </a:p>
-          <a:p xmlns:a="http://schemas.openxmlformats.org/drawingml/2006/main">
-            <a:r>
-              <a:t/>
-            </a:r>
-          </a:p>
-          <a:p xmlns:a="http://schemas.openxmlformats.org/drawingml/2006/main">
-            <a:r>
-              <a:t>- ../../course/reading-card-case.md</a:t>
-            </a:r>
-          </a:p>
-          <a:p xmlns:a="http://schemas.openxmlformats.org/drawingml/2006/main">
-            <a:r>
-              <a:t/>
+              <a:t>本课 handout.md、judgment-task.md；../../course/judgment-path.md。</a:t>
             </a:r>
           </a:p>
           <a:p xmlns:a="http://schemas.openxmlformats.org/drawingml/2006/main">
@@ -3374,7 +2254,12 @@
           </a:p>
           <a:p xmlns:a="http://schemas.openxmlformats.org/drawingml/2006/main">
             <a:r>
-              <a:t>讲义位置：handout.md §二、从问题到机制假设；四、从假设到区分观察的映射草图</a:t>
+              <a:t>讲述与校准：</a:t>
+            </a:r>
+          </a:p>
+          <a:p xmlns:a="http://schemas.openxmlformats.org/drawingml/2006/main">
+            <a:r>
+              <a:t>逐行问“这份论文有DOI，所以H1成立”错在哪一步。身份核验只能解决来源真实性；结论强度还要看设计、结果与边界。成熟度描述工件，不是引用许可证。</a:t>
             </a:r>
           </a:p>
           <a:p xmlns:a="http://schemas.openxmlformats.org/drawingml/2006/main">
@@ -3384,27 +2269,12 @@
           </a:p>
           <a:p xmlns:a="http://schemas.openxmlformats.org/drawingml/2006/main">
             <a:r>
-              <a:t>屏显核对：</a:t>
-            </a:r>
-          </a:p>
-          <a:p xmlns:a="http://schemas.openxmlformats.org/drawingml/2006/main">
-            <a:r>
-              <a:t>来源核验：这份材料是否确实存在？</a:t>
-            </a:r>
-          </a:p>
-          <a:p xmlns:a="http://schemas.openxmlformats.org/drawingml/2006/main">
-            <a:r>
-              <a:t>证据角色：它直接测量什么？</a:t>
-            </a:r>
-          </a:p>
-          <a:p xmlns:a="http://schemas.openxmlformats.org/drawingml/2006/main">
-            <a:r>
-              <a:t>主张方向：支持、反驳，还是仍不能判断？</a:t>
-            </a:r>
-          </a:p>
-          <a:p xmlns:a="http://schemas.openxmlformats.org/drawingml/2006/main">
-            <a:r>
-              <a:t>工件成熟度：draft / review / approved / stable</a:t>
+              <a:t>学生动作：</a:t>
+            </a:r>
+          </a:p>
+          <a:p xmlns:a="http://schemas.openxmlformats.org/drawingml/2006/main">
+            <a:r>
+              <a:t>给当前假设记录补一条来源位置和一项尚未回答的问题。</a:t>
             </a:r>
           </a:p>
           <a:p xmlns:a="http://schemas.openxmlformats.org/drawingml/2006/main">
@@ -3414,7 +2284,7 @@
           </a:p>
           <a:p xmlns:a="http://schemas.openxmlformats.org/drawingml/2006/main">
             <a:r>
-              <a:t>来源真实 ≠ 某个机制已成立。</a:t>
+              <a:t>课堂安排：按本稿下方 90 分钟教学路由安排；此页不另占独立时段。</a:t>
             </a:r>
           </a:p>
           <a:p xmlns:a="http://schemas.openxmlformats.org/drawingml/2006/main">
@@ -3424,12 +2294,12 @@
           </a:p>
           <a:p xmlns:a="http://schemas.openxmlformats.org/drawingml/2006/main">
             <a:r>
-              <a:t>教师讲述：</a:t>
-            </a:r>
-          </a:p>
-          <a:p xmlns:a="http://schemas.openxmlformats.org/drawingml/2006/main">
-            <a:r>
-              <a:t>逐行问“这份论文有DOI，所以H1成立”错在哪一步。身份核验只能解决来源真实性；结论强度还要看设计、结果与边界。成熟度描述工件，不是引用许可证。</a:t>
+              <a:t>[Sources]</a:t>
+            </a:r>
+          </a:p>
+          <a:p xmlns:a="http://schemas.openxmlformats.org/drawingml/2006/main">
+            <a:r>
+              <a:t>./handout.md；课堂示例与构造数据见 ../../course/reading-card-case.md</a:t>
             </a:r>
           </a:p>
           <a:p xmlns:a="http://schemas.openxmlformats.org/drawingml/2006/main">
@@ -3439,62 +2309,7 @@
           </a:p>
           <a:p xmlns:a="http://schemas.openxmlformats.org/drawingml/2006/main">
             <a:r>
-              <a:t>学生动作：</a:t>
-            </a:r>
-          </a:p>
-          <a:p xmlns:a="http://schemas.openxmlformats.org/drawingml/2006/main">
-            <a:r>
-              <a:t>给当前假设记录补一条来源位置和一项尚未回答的问题。</a:t>
-            </a:r>
-          </a:p>
-          <a:p xmlns:a="http://schemas.openxmlformats.org/drawingml/2006/main">
-            <a:r>
-              <a:t/>
-            </a:r>
-          </a:p>
-          <a:p xmlns:a="http://schemas.openxmlformats.org/drawingml/2006/main">
-            <a:r>
-              <a:t>来源与边界：</a:t>
-            </a:r>
-          </a:p>
-          <a:p xmlns:a="http://schemas.openxmlformats.org/drawingml/2006/main">
-            <a:r>
-              <a:t>./handout.md；课堂示例与构造数据见 ../../course/reading-card-case.md</a:t>
-            </a:r>
-          </a:p>
-          <a:p xmlns:a="http://schemas.openxmlformats.org/drawingml/2006/main">
-            <a:r>
-              <a:t/>
-            </a:r>
-          </a:p>
-          <a:p xmlns:a="http://schemas.openxmlformats.org/drawingml/2006/main">
-            <a:r>
-              <a:t>[Sources]</a:t>
-            </a:r>
-          </a:p>
-          <a:p xmlns:a="http://schemas.openxmlformats.org/drawingml/2006/main">
-            <a:r>
-              <a:t/>
-            </a:r>
-          </a:p>
-          <a:p xmlns:a="http://schemas.openxmlformats.org/drawingml/2006/main">
-            <a:r>
-              <a:t>- 本课 handout.md 与 slides.md</a:t>
-            </a:r>
-          </a:p>
-          <a:p xmlns:a="http://schemas.openxmlformats.org/drawingml/2006/main">
-            <a:r>
-              <a:t/>
-            </a:r>
-          </a:p>
-          <a:p xmlns:a="http://schemas.openxmlformats.org/drawingml/2006/main">
-            <a:r>
-              <a:t>- ../../course/reading-card-case.md</a:t>
-            </a:r>
-          </a:p>
-          <a:p xmlns:a="http://schemas.openxmlformats.org/drawingml/2006/main">
-            <a:r>
-              <a:t/>
+              <a:t>本课 handout.md、judgment-task.md；../../course/judgment-path.md。</a:t>
             </a:r>
           </a:p>
           <a:p xmlns:a="http://schemas.openxmlformats.org/drawingml/2006/main">
@@ -3579,7 +2394,12 @@
           </a:p>
           <a:p xmlns:a="http://schemas.openxmlformats.org/drawingml/2006/main">
             <a:r>
-              <a:t>讲义位置：本课讲义；见逐页母稿映射表</a:t>
+              <a:t>讲述与校准：</a:t>
+            </a:r>
+          </a:p>
+          <a:p xmlns:a="http://schemas.openxmlformats.org/drawingml/2006/main">
+            <a:r>
+              <a:t>本课核心活动之一：比较两种实验方案并说明取舍。比较维度不是看哪个"更好"，而是看哪个更能区分假设、baseline 更公平、更可执行、失败后留得下东西。</a:t>
             </a:r>
           </a:p>
           <a:p xmlns:a="http://schemas.openxmlformats.org/drawingml/2006/main">
@@ -3589,32 +2409,12 @@
           </a:p>
           <a:p xmlns:a="http://schemas.openxmlformats.org/drawingml/2006/main">
             <a:r>
-              <a:t>屏显核对：</a:t>
-            </a:r>
-          </a:p>
-          <a:p xmlns:a="http://schemas.openxmlformats.org/drawingml/2006/main">
-            <a:r>
-              <a:t>| 比较 | 方案甲：同批材料 | 方案乙：两批材料 |</a:t>
-            </a:r>
-          </a:p>
-          <a:p xmlns:a="http://schemas.openxmlformats.org/drawingml/2006/main">
-            <a:r>
-              <a:t>| --- | --- | --- |</a:t>
-            </a:r>
-          </a:p>
-          <a:p xmlns:a="http://schemas.openxmlformats.org/drawingml/2006/main">
-            <a:r>
-              <a:t>| 可比性 | 控制材料差异 | 混入材料难度差异 |</a:t>
-            </a:r>
-          </a:p>
-          <a:p xmlns:a="http://schemas.openxmlformats.org/drawingml/2006/main">
-            <a:r>
-              <a:t>| 执行条件 | 两种方法使用独立上下文 | 仍需统一模型与协议 |</a:t>
-            </a:r>
-          </a:p>
-          <a:p xmlns:a="http://schemas.openxmlformats.org/drawingml/2006/main">
-            <a:r>
-              <a:t>| 当前决定 | 保留配对比较 | 有范围研究目的再设计 |</a:t>
+              <a:t>学生动作：</a:t>
+            </a:r>
+          </a:p>
+          <a:p xmlns:a="http://schemas.openxmlformats.org/drawingml/2006/main">
+            <a:r>
+              <a:t>让学生说出：你的方案甲和乙差在哪？哪个 baseline 更公平？</a:t>
             </a:r>
           </a:p>
           <a:p xmlns:a="http://schemas.openxmlformats.org/drawingml/2006/main">
@@ -3624,12 +2424,7 @@
           </a:p>
           <a:p xmlns:a="http://schemas.openxmlformats.org/drawingml/2006/main">
             <a:r>
-              <a:t>同批材料本身不会造成记忆污染；共享上下文才需检查。</a:t>
-            </a:r>
-          </a:p>
-          <a:p xmlns:a="http://schemas.openxmlformats.org/drawingml/2006/main">
-            <a:r>
-              <a:t>结果比较仍不能单独区分 H1 与 A2。</a:t>
+              <a:t>课堂安排：按本稿下方 90 分钟教学路由安排；此页不另占独立时段。</a:t>
             </a:r>
           </a:p>
           <a:p xmlns:a="http://schemas.openxmlformats.org/drawingml/2006/main">
@@ -3639,12 +2434,12 @@
           </a:p>
           <a:p xmlns:a="http://schemas.openxmlformats.org/drawingml/2006/main">
             <a:r>
-              <a:t>教师讲述：</a:t>
-            </a:r>
-          </a:p>
-          <a:p xmlns:a="http://schemas.openxmlformats.org/drawingml/2006/main">
-            <a:r>
-              <a:t>本课核心活动之一：比较两种实验方案并说明取舍。比较维度不是看哪个"更好"，而是看哪个更能区分假设、baseline 更公平、更可执行、失败后留得下东西。</a:t>
+              <a:t>[Sources]</a:t>
+            </a:r>
+          </a:p>
+          <a:p xmlns:a="http://schemas.openxmlformats.org/drawingml/2006/main">
+            <a:r>
+              <a:t>讲义 §三·3；[assignments.md](../../course/assignments.md) 第 9 课判断门条件。</a:t>
             </a:r>
           </a:p>
           <a:p xmlns:a="http://schemas.openxmlformats.org/drawingml/2006/main">
@@ -3654,72 +2449,7 @@
           </a:p>
           <a:p xmlns:a="http://schemas.openxmlformats.org/drawingml/2006/main">
             <a:r>
-              <a:t>学生动作：</a:t>
-            </a:r>
-          </a:p>
-          <a:p xmlns:a="http://schemas.openxmlformats.org/drawingml/2006/main">
-            <a:r>
-              <a:t>让学生说出：你的方案甲和乙差在哪？哪个 baseline 更公平？</a:t>
-            </a:r>
-          </a:p>
-          <a:p xmlns:a="http://schemas.openxmlformats.org/drawingml/2006/main">
-            <a:r>
-              <a:t/>
-            </a:r>
-          </a:p>
-          <a:p xmlns:a="http://schemas.openxmlformats.org/drawingml/2006/main">
-            <a:r>
-              <a:t>来源与边界：</a:t>
-            </a:r>
-          </a:p>
-          <a:p xmlns:a="http://schemas.openxmlformats.org/drawingml/2006/main">
-            <a:r>
-              <a:t>讲义 §三·3；[assignments.md](../../course/assignments.md) 第 9 课判断门条件。</a:t>
-            </a:r>
-          </a:p>
-          <a:p xmlns:a="http://schemas.openxmlformats.org/drawingml/2006/main">
-            <a:r>
-              <a:t/>
-            </a:r>
-          </a:p>
-          <a:p xmlns:a="http://schemas.openxmlformats.org/drawingml/2006/main">
-            <a:r>
-              <a:t>---</a:t>
-            </a:r>
-          </a:p>
-          <a:p xmlns:a="http://schemas.openxmlformats.org/drawingml/2006/main">
-            <a:r>
-              <a:t/>
-            </a:r>
-          </a:p>
-          <a:p xmlns:a="http://schemas.openxmlformats.org/drawingml/2006/main">
-            <a:r>
-              <a:t>[Sources]</a:t>
-            </a:r>
-          </a:p>
-          <a:p xmlns:a="http://schemas.openxmlformats.org/drawingml/2006/main">
-            <a:r>
-              <a:t/>
-            </a:r>
-          </a:p>
-          <a:p xmlns:a="http://schemas.openxmlformats.org/drawingml/2006/main">
-            <a:r>
-              <a:t>- 本课 handout.md 与 slides.md</a:t>
-            </a:r>
-          </a:p>
-          <a:p xmlns:a="http://schemas.openxmlformats.org/drawingml/2006/main">
-            <a:r>
-              <a:t/>
-            </a:r>
-          </a:p>
-          <a:p xmlns:a="http://schemas.openxmlformats.org/drawingml/2006/main">
-            <a:r>
-              <a:t>- ../../course/reading-card-case.md</a:t>
-            </a:r>
-          </a:p>
-          <a:p xmlns:a="http://schemas.openxmlformats.org/drawingml/2006/main">
-            <a:r>
-              <a:t/>
+              <a:t>本课 handout.md、judgment-task.md；../../course/judgment-path.md。</a:t>
             </a:r>
           </a:p>
           <a:p xmlns:a="http://schemas.openxmlformats.org/drawingml/2006/main">
@@ -3804,7 +2534,12 @@
           </a:p>
           <a:p xmlns:a="http://schemas.openxmlformats.org/drawingml/2006/main">
             <a:r>
-              <a:t>讲义位置：handout.md §二、从问题到机制假设；四、从假设到区分观察的映射草图</a:t>
+              <a:t>讲述与校准：</a:t>
+            </a:r>
+          </a:p>
+          <a:p xmlns:a="http://schemas.openxmlformats.org/drawingml/2006/main">
+            <a:r>
+              <a:t>先让学生独立选择“已经证明H1”或“尚不能区分”，再解释理由。盲化评分能检查A2的一部分，但不能独自证明H1的完整因果链；还要检查输出中的条件与生成过程。</a:t>
             </a:r>
           </a:p>
           <a:p xmlns:a="http://schemas.openxmlformats.org/drawingml/2006/main">
@@ -3814,12 +2549,12 @@
           </a:p>
           <a:p xmlns:a="http://schemas.openxmlformats.org/drawingml/2006/main">
             <a:r>
-              <a:t>屏显核对：</a:t>
-            </a:r>
-          </a:p>
-          <a:p xmlns:a="http://schemas.openxmlformats.org/drawingml/2006/main">
-            <a:r>
-              <a:t>观察：带字段的阅读卡输出得分高于自由摘要。</a:t>
+              <a:t>学生动作：</a:t>
+            </a:r>
+          </a:p>
+          <a:p xmlns:a="http://schemas.openxmlformats.org/drawingml/2006/main">
+            <a:r>
+              <a:t>写出已有观察和追加观察各排除了什么、没排除什么。</a:t>
             </a:r>
           </a:p>
           <a:p xmlns:a="http://schemas.openxmlformats.org/drawingml/2006/main">
@@ -3829,12 +2564,7 @@
           </a:p>
           <a:p xmlns:a="http://schemas.openxmlformats.org/drawingml/2006/main">
             <a:r>
-              <a:t>H1：输出保留得更多？</a:t>
-            </a:r>
-          </a:p>
-          <a:p xmlns:a="http://schemas.openxmlformats.org/drawingml/2006/main">
-            <a:r>
-              <a:t>A2：评分者更容易给分？</a:t>
+              <a:t>课堂安排：按本稿下方 90 分钟教学路由安排；此页不另占独立时段。</a:t>
             </a:r>
           </a:p>
           <a:p xmlns:a="http://schemas.openxmlformats.org/drawingml/2006/main">
@@ -3844,7 +2574,12 @@
           </a:p>
           <a:p xmlns:a="http://schemas.openxmlformats.org/drawingml/2006/main">
             <a:r>
-              <a:t>追加观察：隐去条件标签、使用同一标注规则后，差异是否仍在？</a:t>
+              <a:t>[Sources]</a:t>
+            </a:r>
+          </a:p>
+          <a:p xmlns:a="http://schemas.openxmlformats.org/drawingml/2006/main">
+            <a:r>
+              <a:t>./handout.md；课堂示例与构造数据见 ../../course/reading-card-case.md</a:t>
             </a:r>
           </a:p>
           <a:p xmlns:a="http://schemas.openxmlformats.org/drawingml/2006/main">
@@ -3854,77 +2589,7 @@
           </a:p>
           <a:p xmlns:a="http://schemas.openxmlformats.org/drawingml/2006/main">
             <a:r>
-              <a:t>教师讲述：</a:t>
-            </a:r>
-          </a:p>
-          <a:p xmlns:a="http://schemas.openxmlformats.org/drawingml/2006/main">
-            <a:r>
-              <a:t>先让学生独立选择“已经证明H1”或“尚不能区分”，再解释理由。盲化评分能检查A2的一部分，但不能独自证明H1的完整因果链；还要检查输出中的条件与生成过程。</a:t>
-            </a:r>
-          </a:p>
-          <a:p xmlns:a="http://schemas.openxmlformats.org/drawingml/2006/main">
-            <a:r>
-              <a:t/>
-            </a:r>
-          </a:p>
-          <a:p xmlns:a="http://schemas.openxmlformats.org/drawingml/2006/main">
-            <a:r>
-              <a:t>学生动作：</a:t>
-            </a:r>
-          </a:p>
-          <a:p xmlns:a="http://schemas.openxmlformats.org/drawingml/2006/main">
-            <a:r>
-              <a:t>写出已有观察和追加观察各排除了什么、没排除什么。</a:t>
-            </a:r>
-          </a:p>
-          <a:p xmlns:a="http://schemas.openxmlformats.org/drawingml/2006/main">
-            <a:r>
-              <a:t/>
-            </a:r>
-          </a:p>
-          <a:p xmlns:a="http://schemas.openxmlformats.org/drawingml/2006/main">
-            <a:r>
-              <a:t>来源与边界：</a:t>
-            </a:r>
-          </a:p>
-          <a:p xmlns:a="http://schemas.openxmlformats.org/drawingml/2006/main">
-            <a:r>
-              <a:t>./handout.md；课堂示例与构造数据见 ../../course/reading-card-case.md</a:t>
-            </a:r>
-          </a:p>
-          <a:p xmlns:a="http://schemas.openxmlformats.org/drawingml/2006/main">
-            <a:r>
-              <a:t/>
-            </a:r>
-          </a:p>
-          <a:p xmlns:a="http://schemas.openxmlformats.org/drawingml/2006/main">
-            <a:r>
-              <a:t>[Sources]</a:t>
-            </a:r>
-          </a:p>
-          <a:p xmlns:a="http://schemas.openxmlformats.org/drawingml/2006/main">
-            <a:r>
-              <a:t/>
-            </a:r>
-          </a:p>
-          <a:p xmlns:a="http://schemas.openxmlformats.org/drawingml/2006/main">
-            <a:r>
-              <a:t>- 本课 handout.md 与 slides.md</a:t>
-            </a:r>
-          </a:p>
-          <a:p xmlns:a="http://schemas.openxmlformats.org/drawingml/2006/main">
-            <a:r>
-              <a:t/>
-            </a:r>
-          </a:p>
-          <a:p xmlns:a="http://schemas.openxmlformats.org/drawingml/2006/main">
-            <a:r>
-              <a:t>- ../../course/reading-card-case.md</a:t>
-            </a:r>
-          </a:p>
-          <a:p xmlns:a="http://schemas.openxmlformats.org/drawingml/2006/main">
-            <a:r>
-              <a:t/>
+              <a:t>本课 handout.md、judgment-task.md；../../course/judgment-path.md。</a:t>
             </a:r>
           </a:p>
           <a:p xmlns:a="http://schemas.openxmlformats.org/drawingml/2006/main">
@@ -4009,7 +2674,12 @@
           </a:p>
           <a:p xmlns:a="http://schemas.openxmlformats.org/drawingml/2006/main">
             <a:r>
-              <a:t>讲义位置：本课讲义；见逐页母稿映射表</a:t>
+              <a:t>讲述与校准：</a:t>
+            </a:r>
+          </a:p>
+          <a:p xmlns:a="http://schemas.openxmlformats.org/drawingml/2006/main">
+            <a:r>
+              <a:t>这页只说明三课边界，不提前讲八要素。第 7 课的映射草图会作为第 8 课质询对象，再作为第 9 课工程规格的输入。</a:t>
             </a:r>
           </a:p>
           <a:p xmlns:a="http://schemas.openxmlformats.org/drawingml/2006/main">
@@ -4019,12 +2689,12 @@
           </a:p>
           <a:p xmlns:a="http://schemas.openxmlformats.org/drawingml/2006/main">
             <a:r>
-              <a:t>屏显核对：</a:t>
-            </a:r>
-          </a:p>
-          <a:p xmlns:a="http://schemas.openxmlformats.org/drawingml/2006/main">
-            <a:r>
-              <a:t>本课只留一张边界卡：</a:t>
+              <a:t>学生动作：</a:t>
+            </a:r>
+          </a:p>
+          <a:p xmlns:a="http://schemas.openxmlformats.org/drawingml/2006/main">
+            <a:r>
+              <a:t>让学生指出：自己当前映射草图中哪一项要到第 9 课才能工程化。</a:t>
             </a:r>
           </a:p>
           <a:p xmlns:a="http://schemas.openxmlformats.org/drawingml/2006/main">
@@ -4034,17 +2704,7 @@
           </a:p>
           <a:p xmlns:a="http://schemas.openxmlformats.org/drawingml/2006/main">
             <a:r>
-              <a:t>- 现在：主机制、一个替代解释、研究判断、结果映射草图；</a:t>
-            </a:r>
-          </a:p>
-          <a:p xmlns:a="http://schemas.openxmlformats.org/drawingml/2006/main">
-            <a:r>
-              <a:t>- 第 8 课：用同伴质询检查边界、证据与可区分性；</a:t>
-            </a:r>
-          </a:p>
-          <a:p xmlns:a="http://schemas.openxmlformats.org/drawingml/2006/main">
-            <a:r>
-              <a:t>- 第 9 课：公平 baseline、同一批论文配对、运行记录、人工基准标注、停止条件与失败预案。</a:t>
+              <a:t>课堂安排：按本稿下方 90 分钟教学路由安排；此页不另占独立时段。</a:t>
             </a:r>
           </a:p>
           <a:p xmlns:a="http://schemas.openxmlformats.org/drawingml/2006/main">
@@ -4054,7 +2714,12 @@
           </a:p>
           <a:p xmlns:a="http://schemas.openxmlformats.org/drawingml/2006/main">
             <a:r>
-              <a:t>&gt; 本课不要求填八要素，也不把删减内容转为课后必做。</a:t>
+              <a:t>[Sources]</a:t>
+            </a:r>
+          </a:p>
+          <a:p xmlns:a="http://schemas.openxmlformats.org/drawingml/2006/main">
+            <a:r>
+              <a:t>讲义 §四·2-4；Box et al. *Statistics for Experimenters* §3.4；NIST/SEMATECH e-Handbook Experimental Design（[reading-list.md](../../course/reading-list.md) 第 7 课）；第 1 课 §2.7 原型验证实验规格要素。</a:t>
             </a:r>
           </a:p>
           <a:p xmlns:a="http://schemas.openxmlformats.org/drawingml/2006/main">
@@ -4064,87 +2729,7 @@
           </a:p>
           <a:p xmlns:a="http://schemas.openxmlformats.org/drawingml/2006/main">
             <a:r>
-              <a:t>教师讲述：</a:t>
-            </a:r>
-          </a:p>
-          <a:p xmlns:a="http://schemas.openxmlformats.org/drawingml/2006/main">
-            <a:r>
-              <a:t>这页只说明三课边界，不提前讲八要素。第 7 课的映射草图会作为第 8 课质询对象，再作为第 9 课工程规格的输入。</a:t>
-            </a:r>
-          </a:p>
-          <a:p xmlns:a="http://schemas.openxmlformats.org/drawingml/2006/main">
-            <a:r>
-              <a:t/>
-            </a:r>
-          </a:p>
-          <a:p xmlns:a="http://schemas.openxmlformats.org/drawingml/2006/main">
-            <a:r>
-              <a:t>学生动作：</a:t>
-            </a:r>
-          </a:p>
-          <a:p xmlns:a="http://schemas.openxmlformats.org/drawingml/2006/main">
-            <a:r>
-              <a:t>让学生指出：自己当前映射草图中哪一项要到第 9 课才能工程化。</a:t>
-            </a:r>
-          </a:p>
-          <a:p xmlns:a="http://schemas.openxmlformats.org/drawingml/2006/main">
-            <a:r>
-              <a:t/>
-            </a:r>
-          </a:p>
-          <a:p xmlns:a="http://schemas.openxmlformats.org/drawingml/2006/main">
-            <a:r>
-              <a:t>来源与边界：</a:t>
-            </a:r>
-          </a:p>
-          <a:p xmlns:a="http://schemas.openxmlformats.org/drawingml/2006/main">
-            <a:r>
-              <a:t>讲义 §四·2-4；Box et al. *Statistics for Experimenters* §3.4；NIST/SEMATECH e-Handbook Experimental Design（[reading-list.md](../../course/reading-list.md) 第 7 课）；第 1 课 §2.7 原型验证实验规格要素。</a:t>
-            </a:r>
-          </a:p>
-          <a:p xmlns:a="http://schemas.openxmlformats.org/drawingml/2006/main">
-            <a:r>
-              <a:t/>
-            </a:r>
-          </a:p>
-          <a:p xmlns:a="http://schemas.openxmlformats.org/drawingml/2006/main">
-            <a:r>
-              <a:t>---</a:t>
-            </a:r>
-          </a:p>
-          <a:p xmlns:a="http://schemas.openxmlformats.org/drawingml/2006/main">
-            <a:r>
-              <a:t/>
-            </a:r>
-          </a:p>
-          <a:p xmlns:a="http://schemas.openxmlformats.org/drawingml/2006/main">
-            <a:r>
-              <a:t>[Sources]</a:t>
-            </a:r>
-          </a:p>
-          <a:p xmlns:a="http://schemas.openxmlformats.org/drawingml/2006/main">
-            <a:r>
-              <a:t/>
-            </a:r>
-          </a:p>
-          <a:p xmlns:a="http://schemas.openxmlformats.org/drawingml/2006/main">
-            <a:r>
-              <a:t>- 本课 handout.md 与 slides.md</a:t>
-            </a:r>
-          </a:p>
-          <a:p xmlns:a="http://schemas.openxmlformats.org/drawingml/2006/main">
-            <a:r>
-              <a:t/>
-            </a:r>
-          </a:p>
-          <a:p xmlns:a="http://schemas.openxmlformats.org/drawingml/2006/main">
-            <a:r>
-              <a:t>- ../../course/reading-card-case.md</a:t>
-            </a:r>
-          </a:p>
-          <a:p xmlns:a="http://schemas.openxmlformats.org/drawingml/2006/main">
-            <a:r>
-              <a:t/>
+              <a:t>本课 handout.md、judgment-task.md；../../course/judgment-path.md。</a:t>
             </a:r>
           </a:p>
           <a:p xmlns:a="http://schemas.openxmlformats.org/drawingml/2006/main">
@@ -8487,127 +7072,22 @@
       </p:grpSpPr>
       <p:sp>
         <p:nvSpPr>
-          <p:cNvPr id="4" name="Text Placeholder 3">
-            <a:extLst xmlns:a="http://schemas.openxmlformats.org/drawingml/2006/main">
-              <a:ext uri="{FF2B5EF4-FFF2-40B4-BE49-F238E27FC236}">
-                <a16:creationId xmlns:a16="http://schemas.microsoft.com/office/drawing/2014/main" id="{4D941B40-7A0A-534E-3563-CA11753C8E3F}"/>
-              </a:ext>
-            </a:extLst>
-          </p:cNvPr>
-          <p:cNvSpPr>
-            <a:spLocks xmlns:a="http://schemas.openxmlformats.org/drawingml/2006/main" noGrp="1"/>
-          </p:cNvSpPr>
-          <p:nvPr>
-            <p:ph type="body" idx="14"/>
-          </p:nvPr>
-        </p:nvSpPr>
-        <p:spPr>
-          <a:xfrm xmlns:a="http://schemas.openxmlformats.org/drawingml/2006/main">
-            <a:off x="1028700" y="57150"/>
-            <a:ext cx="10668000" cy="571500"/>
-          </a:xfrm>
-        </p:spPr>
-        <p:txBody>
-          <a:bodyPr xmlns:a="http://schemas.openxmlformats.org/drawingml/2006/main" lIns="0" tIns="0" rIns="0" bIns="0" anchor="ctr"/>
-          <a:lstStyle xmlns:a="http://schemas.openxmlformats.org/drawingml/2006/main"/>
-          <a:p xmlns:a="http://schemas.openxmlformats.org/drawingml/2006/main">
-            <a:pPr algn="l">
-              <a:lnSpc>
-                <a:spcPct val="118000"/>
-              </a:lnSpc>
-              <a:buNone/>
-            </a:pPr>
-            <a:r>
-              <a:rPr sz="3000" b="1">
-                <a:solidFill>
-                  <a:srgbClr val="FFFFFF"/>
-                </a:solidFill>
-                <a:latin typeface="微软雅黑"/>
-                <a:ea typeface="微软雅黑"/>
-                <a:cs typeface="微软雅黑"/>
-              </a:rPr>
-              <a:t>个人实践：完成机制—判断—映射最小闭环</a:t>
-            </a:r>
-            <a:endParaRPr/>
-          </a:p>
-        </p:txBody>
-      </p:sp>
-      <p:sp>
-        <p:nvSpPr>
-          <p:cNvPr id="5" name="Slide Number Placeholder 4">
-            <a:extLst xmlns:a="http://schemas.openxmlformats.org/drawingml/2006/main">
-              <a:ext uri="{FF2B5EF4-FFF2-40B4-BE49-F238E27FC236}">
-                <a16:creationId xmlns:a16="http://schemas.microsoft.com/office/drawing/2014/main" id="{EBA5909F-738E-F60C-BE8C-B3F1D94548E5}"/>
-              </a:ext>
-            </a:extLst>
-          </p:cNvPr>
-          <p:cNvSpPr>
-            <a:spLocks xmlns:a="http://schemas.openxmlformats.org/drawingml/2006/main" noGrp="1"/>
-          </p:cNvSpPr>
-          <p:nvPr>
-            <p:ph type="sldNum" idx="10"/>
-          </p:nvPr>
-        </p:nvSpPr>
-        <p:spPr/>
-        <p:txBody>
-          <a:bodyPr xmlns:a="http://schemas.openxmlformats.org/drawingml/2006/main"/>
-          <a:lstStyle xmlns:a="http://schemas.openxmlformats.org/drawingml/2006/main"/>
-          <a:p xmlns:a="http://schemas.openxmlformats.org/drawingml/2006/main">
-            <a:fld id="{327921A4-25C4-3DB4-06B1-32693CEE2241}" type="slidenum">
-              <a:t>14</a:t>
-            </a:fld>
-            <a:endParaRPr/>
-          </a:p>
-        </p:txBody>
-      </p:sp>
-      <p:sp>
-        <p:nvSpPr>
-          <p:cNvPr id="6" name="practice-0-bg">
-            <a:extLst xmlns:a="http://schemas.openxmlformats.org/drawingml/2006/main">
-              <a:ext uri="{FF2B5EF4-FFF2-40B4-BE49-F238E27FC236}">
-                <a16:creationId xmlns:a16="http://schemas.microsoft.com/office/drawing/2014/main" id="{7ADF74E8-166D-4A42-895F-21D14D0F71A3}"/>
-              </a:ext>
-            </a:extLst>
-          </p:cNvPr>
-          <p:cNvSpPr>
-            <a:spLocks xmlns:a="http://schemas.openxmlformats.org/drawingml/2006/main" noGrp="1"/>
-          </p:cNvSpPr>
-          <p:nvPr/>
-        </p:nvSpPr>
-        <p:spPr>
-          <a:xfrm xmlns:a="http://schemas.openxmlformats.org/drawingml/2006/main">
-            <a:off x="609600" y="1666875"/>
-            <a:ext cx="2486025" cy="952500"/>
-          </a:xfrm>
-          <a:prstGeom xmlns:a="http://schemas.openxmlformats.org/drawingml/2006/main" prst="rect">
-            <a:avLst/>
-          </a:prstGeom>
-          <a:solidFill xmlns:a="http://schemas.openxmlformats.org/drawingml/2006/main">
-            <a:srgbClr val="EDF5F0"/>
-          </a:solidFill>
-          <a:ln xmlns:a="http://schemas.openxmlformats.org/drawingml/2006/main" w="0">
-            <a:noFill/>
-          </a:ln>
-        </p:spPr>
-      </p:sp>
-      <p:sp>
-        <p:nvSpPr>
-          <p:cNvPr id="7" name="practice-0">
-            <a:extLst xmlns:a="http://schemas.openxmlformats.org/drawingml/2006/main">
-              <a:ext uri="{FF2B5EF4-FFF2-40B4-BE49-F238E27FC236}">
-                <a16:creationId xmlns:a16="http://schemas.microsoft.com/office/drawing/2014/main" id="{54412B5E-64FE-47B9-91FA-2399065EFC91}"/>
-              </a:ext>
-            </a:extLst>
-          </p:cNvPr>
-          <p:cNvSpPr>
-            <a:spLocks xmlns:a="http://schemas.openxmlformats.org/drawingml/2006/main" noGrp="1"/>
-          </p:cNvSpPr>
-          <p:nvPr/>
-        </p:nvSpPr>
-        <p:spPr>
-          <a:xfrm xmlns:a="http://schemas.openxmlformats.org/drawingml/2006/main">
-            <a:off x="762000" y="1762125"/>
-            <a:ext cx="2181225" cy="762000"/>
+          <p:cNvPr id="7" name="judgment-title">
+            <a:extLst xmlns:a="http://schemas.openxmlformats.org/drawingml/2006/main">
+              <a:ext uri="{FF2B5EF4-FFF2-40B4-BE49-F238E27FC236}">
+                <a16:creationId xmlns:a16="http://schemas.microsoft.com/office/drawing/2014/main" id="{DE4CABC3-C795-4BAE-BA64-5B112CC174CD}"/>
+              </a:ext>
+            </a:extLst>
+          </p:cNvPr>
+          <p:cNvSpPr>
+            <a:spLocks xmlns:a="http://schemas.openxmlformats.org/drawingml/2006/main" noGrp="1"/>
+          </p:cNvSpPr>
+          <p:nvPr/>
+        </p:nvSpPr>
+        <p:spPr>
+          <a:xfrm xmlns:a="http://schemas.openxmlformats.org/drawingml/2006/main">
+            <a:off x="1028700" y="76200"/>
+            <a:ext cx="10687050" cy="514350"/>
           </a:xfrm>
           <a:prstGeom xmlns:a="http://schemas.openxmlformats.org/drawingml/2006/main" prst="rect">
             <a:avLst/>
@@ -8618,17 +7098,24 @@
           </a:ln>
         </p:spPr>
         <p:txBody>
-          <a:bodyPr xmlns:a="http://schemas.openxmlformats.org/drawingml/2006/main" lIns="0" tIns="0" rIns="0" bIns="0" anchor="ctr"/>
-          <a:lstStyle xmlns:a="http://schemas.openxmlformats.org/drawingml/2006/main"/>
-          <a:p xmlns:a="http://schemas.openxmlformats.org/drawingml/2006/main">
-            <a:pPr algn="ctr">
-              <a:lnSpc>
-                <a:spcPct val="118000"/>
-              </a:lnSpc>
-              <a:buNone/>
-              <a:defRPr sz="2200" b="1">
-                <a:solidFill>
-                  <a:srgbClr val="1F4D78"/>
+          <a:bodyPr xmlns:a="http://schemas.openxmlformats.org/drawingml/2006/main" lIns="0" tIns="0" rIns="0" bIns="0" anchor="t"/>
+          <a:lstStyle xmlns:a="http://schemas.openxmlformats.org/drawingml/2006/main">
+            <a:defPPr algn="l">
+              <a:defRPr sz="3000" b="1">
+                <a:solidFill>
+                  <a:srgbClr val="FFFFFF"/>
+                </a:solidFill>
+                <a:latin typeface="微软雅黑"/>
+                <a:ea typeface="微软雅黑"/>
+                <a:cs typeface="微软雅黑"/>
+              </a:defRPr>
+            </a:defPPr>
+          </a:lstStyle>
+          <a:p xmlns:a="http://schemas.openxmlformats.org/drawingml/2006/main">
+            <a:pPr algn="l">
+              <a:defRPr sz="3000" b="1">
+                <a:solidFill>
+                  <a:srgbClr val="FFFFFF"/>
                 </a:solidFill>
                 <a:latin typeface="微软雅黑"/>
                 <a:ea typeface="微软雅黑"/>
@@ -8636,37 +7123,37 @@
               </a:defRPr>
             </a:pPr>
             <a:r>
-              <a:rPr sz="2200" b="1">
-                <a:solidFill>
-                  <a:srgbClr val="1F4D78"/>
+              <a:rPr sz="3000" b="1">
+                <a:solidFill>
+                  <a:srgbClr val="FFFFFF"/>
                 </a:solidFill>
                 <a:latin typeface="微软雅黑"/>
                 <a:ea typeface="微软雅黑"/>
                 <a:cs typeface="微软雅黑"/>
               </a:rPr>
-              <a:t>写主机制</a:t>
-            </a:r>
-          </a:p>
-        </p:txBody>
-      </p:sp>
-      <p:sp>
-        <p:nvSpPr>
-          <p:cNvPr id="8" name="practice-a0">
-            <a:extLst xmlns:a="http://schemas.openxmlformats.org/drawingml/2006/main">
-              <a:ext uri="{FF2B5EF4-FFF2-40B4-BE49-F238E27FC236}">
-                <a16:creationId xmlns:a16="http://schemas.microsoft.com/office/drawing/2014/main" id="{D27E6FD1-C6AB-427A-A27A-CA87FC99C07F}"/>
-              </a:ext>
-            </a:extLst>
-          </p:cNvPr>
-          <p:cNvSpPr>
-            <a:spLocks xmlns:a="http://schemas.openxmlformats.org/drawingml/2006/main" noGrp="1"/>
-          </p:cNvSpPr>
-          <p:nvPr/>
-        </p:nvSpPr>
-        <p:spPr>
-          <a:xfrm xmlns:a="http://schemas.openxmlformats.org/drawingml/2006/main">
-            <a:off x="3095625" y="1962150"/>
-            <a:ext cx="304800" cy="438150"/>
+              <a:t>本人项目：决定、核验与回写</a:t>
+            </a:r>
+          </a:p>
+        </p:txBody>
+      </p:sp>
+      <p:sp>
+        <p:nvSpPr>
+          <p:cNvPr id="2" name="judgment-body-0">
+            <a:extLst xmlns:a="http://schemas.openxmlformats.org/drawingml/2006/main">
+              <a:ext uri="{FF2B5EF4-FFF2-40B4-BE49-F238E27FC236}">
+                <a16:creationId xmlns:a16="http://schemas.microsoft.com/office/drawing/2014/main" id="{D2A137A7-EA28-4FBC-9351-5C7BE61686D5}"/>
+              </a:ext>
+            </a:extLst>
+          </p:cNvPr>
+          <p:cNvSpPr>
+            <a:spLocks xmlns:a="http://schemas.openxmlformats.org/drawingml/2006/main" noGrp="1"/>
+          </p:cNvSpPr>
+          <p:nvPr/>
+        </p:nvSpPr>
+        <p:spPr>
+          <a:xfrm xmlns:a="http://schemas.openxmlformats.org/drawingml/2006/main">
+            <a:off x="666750" y="1066800"/>
+            <a:ext cx="10858500" cy="1476375"/>
           </a:xfrm>
           <a:prstGeom xmlns:a="http://schemas.openxmlformats.org/drawingml/2006/main" prst="rect">
             <a:avLst/>
@@ -8677,17 +7164,24 @@
           </a:ln>
         </p:spPr>
         <p:txBody>
-          <a:bodyPr xmlns:a="http://schemas.openxmlformats.org/drawingml/2006/main" lIns="0" tIns="0" rIns="0" bIns="0" anchor="ctr"/>
-          <a:lstStyle xmlns:a="http://schemas.openxmlformats.org/drawingml/2006/main"/>
-          <a:p xmlns:a="http://schemas.openxmlformats.org/drawingml/2006/main">
-            <a:pPr algn="ctr">
-              <a:lnSpc>
-                <a:spcPct val="118000"/>
-              </a:lnSpc>
-              <a:buNone/>
-              <a:defRPr sz="2800" b="0">
-                <a:solidFill>
-                  <a:srgbClr val="1F4D78"/>
+          <a:bodyPr xmlns:a="http://schemas.openxmlformats.org/drawingml/2006/main" lIns="0" tIns="0" rIns="0" bIns="0" anchor="t"/>
+          <a:lstStyle xmlns:a="http://schemas.openxmlformats.org/drawingml/2006/main">
+            <a:defPPr algn="l">
+              <a:defRPr sz="2400" b="0">
+                <a:solidFill>
+                  <a:srgbClr val="263746"/>
+                </a:solidFill>
+                <a:latin typeface="微软雅黑"/>
+                <a:ea typeface="微软雅黑"/>
+                <a:cs typeface="微软雅黑"/>
+              </a:defRPr>
+            </a:defPPr>
+          </a:lstStyle>
+          <a:p xmlns:a="http://schemas.openxmlformats.org/drawingml/2006/main">
+            <a:pPr algn="l">
+              <a:defRPr sz="2400" b="0">
+                <a:solidFill>
+                  <a:srgbClr val="263746"/>
                 </a:solidFill>
                 <a:latin typeface="微软雅黑"/>
                 <a:ea typeface="微软雅黑"/>
@@ -8695,67 +7189,37 @@
               </a:defRPr>
             </a:pPr>
             <a:r>
-              <a:rPr sz="2800" b="0">
-                <a:solidFill>
-                  <a:srgbClr val="1F4D78"/>
+              <a:rPr sz="2400" b="0">
+                <a:solidFill>
+                  <a:srgbClr val="263746"/>
                 </a:solidFill>
                 <a:latin typeface="微软雅黑"/>
                 <a:ea typeface="微软雅黑"/>
                 <a:cs typeface="微软雅黑"/>
               </a:rPr>
-              <a:t>→</a:t>
-            </a:r>
-          </a:p>
-        </p:txBody>
-      </p:sp>
-      <p:sp>
-        <p:nvSpPr>
-          <p:cNvPr id="9" name="practice-1-bg">
-            <a:extLst xmlns:a="http://schemas.openxmlformats.org/drawingml/2006/main">
-              <a:ext uri="{FF2B5EF4-FFF2-40B4-BE49-F238E27FC236}">
-                <a16:creationId xmlns:a16="http://schemas.microsoft.com/office/drawing/2014/main" id="{A1F1578B-E6E6-4481-B72E-98D77E31DA1A}"/>
-              </a:ext>
-            </a:extLst>
-          </p:cNvPr>
-          <p:cNvSpPr>
-            <a:spLocks xmlns:a="http://schemas.openxmlformats.org/drawingml/2006/main" noGrp="1"/>
-          </p:cNvSpPr>
-          <p:nvPr/>
-        </p:nvSpPr>
-        <p:spPr>
-          <a:xfrm xmlns:a="http://schemas.openxmlformats.org/drawingml/2006/main">
-            <a:off x="3400425" y="1666875"/>
-            <a:ext cx="2486025" cy="952500"/>
-          </a:xfrm>
-          <a:prstGeom xmlns:a="http://schemas.openxmlformats.org/drawingml/2006/main" prst="rect">
-            <a:avLst/>
-          </a:prstGeom>
-          <a:solidFill xmlns:a="http://schemas.openxmlformats.org/drawingml/2006/main">
-            <a:srgbClr val="F4F6F8"/>
-          </a:solidFill>
-          <a:ln xmlns:a="http://schemas.openxmlformats.org/drawingml/2006/main" w="0">
-            <a:noFill/>
-          </a:ln>
-        </p:spPr>
-      </p:sp>
-      <p:sp>
-        <p:nvSpPr>
-          <p:cNvPr id="10" name="practice-1">
-            <a:extLst xmlns:a="http://schemas.openxmlformats.org/drawingml/2006/main">
-              <a:ext uri="{FF2B5EF4-FFF2-40B4-BE49-F238E27FC236}">
-                <a16:creationId xmlns:a16="http://schemas.microsoft.com/office/drawing/2014/main" id="{D1AA49A6-AE08-4A0A-B546-4E840678E95B}"/>
-              </a:ext>
-            </a:extLst>
-          </p:cNvPr>
-          <p:cNvSpPr>
-            <a:spLocks xmlns:a="http://schemas.openxmlformats.org/drawingml/2006/main" noGrp="1"/>
-          </p:cNvSpPr>
-          <p:nvPr/>
-        </p:nvSpPr>
-        <p:spPr>
-          <a:xfrm xmlns:a="http://schemas.openxmlformats.org/drawingml/2006/main">
-            <a:off x="3552825" y="1762125"/>
-            <a:ext cx="2181225" cy="762000"/>
+              <a:t>为主假设和一个替代解释写结果预测，选最小验证并说明什么结果会改变决定。默认工程题同时测坏记录拦截和正常记录保留。</a:t>
+            </a:r>
+          </a:p>
+        </p:txBody>
+      </p:sp>
+      <p:sp>
+        <p:nvSpPr>
+          <p:cNvPr id="3" name="judgment-body-1">
+            <a:extLst xmlns:a="http://schemas.openxmlformats.org/drawingml/2006/main">
+              <a:ext uri="{FF2B5EF4-FFF2-40B4-BE49-F238E27FC236}">
+                <a16:creationId xmlns:a16="http://schemas.microsoft.com/office/drawing/2014/main" id="{C513B792-651A-4804-95A1-1C08F68423B0}"/>
+              </a:ext>
+            </a:extLst>
+          </p:cNvPr>
+          <p:cNvSpPr>
+            <a:spLocks xmlns:a="http://schemas.openxmlformats.org/drawingml/2006/main" noGrp="1"/>
+          </p:cNvSpPr>
+          <p:nvPr/>
+        </p:nvSpPr>
+        <p:spPr>
+          <a:xfrm xmlns:a="http://schemas.openxmlformats.org/drawingml/2006/main">
+            <a:off x="666750" y="2724150"/>
+            <a:ext cx="10858500" cy="1524000"/>
           </a:xfrm>
           <a:prstGeom xmlns:a="http://schemas.openxmlformats.org/drawingml/2006/main" prst="rect">
             <a:avLst/>
@@ -8766,17 +7230,24 @@
           </a:ln>
         </p:spPr>
         <p:txBody>
-          <a:bodyPr xmlns:a="http://schemas.openxmlformats.org/drawingml/2006/main" lIns="0" tIns="0" rIns="0" bIns="0" anchor="ctr"/>
-          <a:lstStyle xmlns:a="http://schemas.openxmlformats.org/drawingml/2006/main"/>
-          <a:p xmlns:a="http://schemas.openxmlformats.org/drawingml/2006/main">
-            <a:pPr algn="ctr">
-              <a:lnSpc>
-                <a:spcPct val="118000"/>
-              </a:lnSpc>
-              <a:buNone/>
-              <a:defRPr sz="2200" b="0">
-                <a:solidFill>
-                  <a:srgbClr val="1F4D78"/>
+          <a:bodyPr xmlns:a="http://schemas.openxmlformats.org/drawingml/2006/main" lIns="0" tIns="0" rIns="0" bIns="0" anchor="t"/>
+          <a:lstStyle xmlns:a="http://schemas.openxmlformats.org/drawingml/2006/main">
+            <a:defPPr algn="l">
+              <a:defRPr sz="2400" b="0">
+                <a:solidFill>
+                  <a:srgbClr val="263746"/>
+                </a:solidFill>
+                <a:latin typeface="微软雅黑"/>
+                <a:ea typeface="微软雅黑"/>
+                <a:cs typeface="微软雅黑"/>
+              </a:defRPr>
+            </a:defPPr>
+          </a:lstStyle>
+          <a:p xmlns:a="http://schemas.openxmlformats.org/drawingml/2006/main">
+            <a:pPr algn="l">
+              <a:defRPr sz="2400" b="0">
+                <a:solidFill>
+                  <a:srgbClr val="263746"/>
                 </a:solidFill>
                 <a:latin typeface="微软雅黑"/>
                 <a:ea typeface="微软雅黑"/>
@@ -8784,37 +7255,37 @@
               </a:defRPr>
             </a:pPr>
             <a:r>
-              <a:rPr sz="2200" b="0">
-                <a:solidFill>
-                  <a:srgbClr val="1F4D78"/>
+              <a:rPr sz="2400" b="0">
+                <a:solidFill>
+                  <a:srgbClr val="263746"/>
                 </a:solidFill>
                 <a:latin typeface="微软雅黑"/>
                 <a:ea typeface="微软雅黑"/>
                 <a:cs typeface="微软雅黑"/>
               </a:rPr>
-              <a:t>写一个替代</a:t>
-            </a:r>
-          </a:p>
-        </p:txBody>
-      </p:sp>
-      <p:sp>
-        <p:nvSpPr>
-          <p:cNvPr id="11" name="practice-a1">
-            <a:extLst xmlns:a="http://schemas.openxmlformats.org/drawingml/2006/main">
-              <a:ext uri="{FF2B5EF4-FFF2-40B4-BE49-F238E27FC236}">
-                <a16:creationId xmlns:a16="http://schemas.microsoft.com/office/drawing/2014/main" id="{BF2036D1-8843-4D34-847F-EFA117DE6D67}"/>
-              </a:ext>
-            </a:extLst>
-          </p:cNvPr>
-          <p:cNvSpPr>
-            <a:spLocks xmlns:a="http://schemas.openxmlformats.org/drawingml/2006/main" noGrp="1"/>
-          </p:cNvSpPr>
-          <p:nvPr/>
-        </p:nvSpPr>
-        <p:spPr>
-          <a:xfrm xmlns:a="http://schemas.openxmlformats.org/drawingml/2006/main">
-            <a:off x="5886450" y="1962150"/>
-            <a:ext cx="304800" cy="438150"/>
+              <a:t>同伴寻找两假设给出同样预测的结果；如所有预测相同，重写假设或验证，不补形容词。</a:t>
+            </a:r>
+          </a:p>
+        </p:txBody>
+      </p:sp>
+      <p:sp>
+        <p:nvSpPr>
+          <p:cNvPr id="4" name="judgment-body-2">
+            <a:extLst xmlns:a="http://schemas.openxmlformats.org/drawingml/2006/main">
+              <a:ext uri="{FF2B5EF4-FFF2-40B4-BE49-F238E27FC236}">
+                <a16:creationId xmlns:a16="http://schemas.microsoft.com/office/drawing/2014/main" id="{0BA37645-6D28-4E45-BF55-A4615B09F41F}"/>
+              </a:ext>
+            </a:extLst>
+          </p:cNvPr>
+          <p:cNvSpPr>
+            <a:spLocks xmlns:a="http://schemas.openxmlformats.org/drawingml/2006/main" noGrp="1"/>
+          </p:cNvSpPr>
+          <p:nvPr/>
+        </p:nvSpPr>
+        <p:spPr>
+          <a:xfrm xmlns:a="http://schemas.openxmlformats.org/drawingml/2006/main">
+            <a:off x="666750" y="4457700"/>
+            <a:ext cx="10858500" cy="1466850"/>
           </a:xfrm>
           <a:prstGeom xmlns:a="http://schemas.openxmlformats.org/drawingml/2006/main" prst="rect">
             <a:avLst/>
@@ -8825,15 +7296,10 @@
           </a:ln>
         </p:spPr>
         <p:txBody>
-          <a:bodyPr xmlns:a="http://schemas.openxmlformats.org/drawingml/2006/main" lIns="0" tIns="0" rIns="0" bIns="0" anchor="ctr"/>
-          <a:lstStyle xmlns:a="http://schemas.openxmlformats.org/drawingml/2006/main"/>
-          <a:p xmlns:a="http://schemas.openxmlformats.org/drawingml/2006/main">
-            <a:pPr algn="ctr">
-              <a:lnSpc>
-                <a:spcPct val="118000"/>
-              </a:lnSpc>
-              <a:buNone/>
-              <a:defRPr sz="2800" b="0">
+          <a:bodyPr xmlns:a="http://schemas.openxmlformats.org/drawingml/2006/main" lIns="0" tIns="0" rIns="0" bIns="0" anchor="t"/>
+          <a:lstStyle xmlns:a="http://schemas.openxmlformats.org/drawingml/2006/main">
+            <a:defPPr algn="l">
+              <a:defRPr sz="2200" b="0">
                 <a:solidFill>
                   <a:srgbClr val="1F4D78"/>
                 </a:solidFill>
@@ -8841,9 +7307,21 @@
                 <a:ea typeface="微软雅黑"/>
                 <a:cs typeface="微软雅黑"/>
               </a:defRPr>
+            </a:defPPr>
+          </a:lstStyle>
+          <a:p xmlns:a="http://schemas.openxmlformats.org/drawingml/2006/main">
+            <a:pPr algn="l">
+              <a:defRPr sz="2200" b="0">
+                <a:solidFill>
+                  <a:srgbClr val="1F4D78"/>
+                </a:solidFill>
+                <a:latin typeface="微软雅黑"/>
+                <a:ea typeface="微软雅黑"/>
+                <a:cs typeface="微软雅黑"/>
+              </a:defRPr>
             </a:pPr>
             <a:r>
-              <a:rPr sz="2800" b="0">
+              <a:rPr sz="2200" b="0">
                 <a:solidFill>
                   <a:srgbClr val="1F4D78"/>
                 </a:solidFill>
@@ -8851,59 +7329,29 @@
                 <a:ea typeface="微软雅黑"/>
                 <a:cs typeface="微软雅黑"/>
               </a:rPr>
-              <a:t>→</a:t>
-            </a:r>
-          </a:p>
-        </p:txBody>
-      </p:sp>
-      <p:sp>
-        <p:nvSpPr>
-          <p:cNvPr id="12" name="practice-2-bg">
-            <a:extLst xmlns:a="http://schemas.openxmlformats.org/drawingml/2006/main">
-              <a:ext uri="{FF2B5EF4-FFF2-40B4-BE49-F238E27FC236}">
-                <a16:creationId xmlns:a16="http://schemas.microsoft.com/office/drawing/2014/main" id="{3C1B6DE4-3615-446E-AF11-6970468276E4}"/>
-              </a:ext>
-            </a:extLst>
-          </p:cNvPr>
-          <p:cNvSpPr>
-            <a:spLocks xmlns:a="http://schemas.openxmlformats.org/drawingml/2006/main" noGrp="1"/>
-          </p:cNvSpPr>
-          <p:nvPr/>
-        </p:nvSpPr>
-        <p:spPr>
-          <a:xfrm xmlns:a="http://schemas.openxmlformats.org/drawingml/2006/main">
-            <a:off x="6191250" y="1666875"/>
-            <a:ext cx="2486025" cy="952500"/>
-          </a:xfrm>
-          <a:prstGeom xmlns:a="http://schemas.openxmlformats.org/drawingml/2006/main" prst="rect">
-            <a:avLst/>
-          </a:prstGeom>
-          <a:solidFill xmlns:a="http://schemas.openxmlformats.org/drawingml/2006/main">
-            <a:srgbClr val="F4F6F8"/>
-          </a:solidFill>
-          <a:ln xmlns:a="http://schemas.openxmlformats.org/drawingml/2006/main" w="0">
-            <a:noFill/>
-          </a:ln>
-        </p:spPr>
-      </p:sp>
-      <p:sp>
-        <p:nvSpPr>
-          <p:cNvPr id="13" name="practice-2">
-            <a:extLst xmlns:a="http://schemas.openxmlformats.org/drawingml/2006/main">
-              <a:ext uri="{FF2B5EF4-FFF2-40B4-BE49-F238E27FC236}">
-                <a16:creationId xmlns:a16="http://schemas.microsoft.com/office/drawing/2014/main" id="{C42F7289-7C5D-4919-BDC9-C435B03C61C8}"/>
-              </a:ext>
-            </a:extLst>
-          </p:cNvPr>
-          <p:cNvSpPr>
-            <a:spLocks xmlns:a="http://schemas.openxmlformats.org/drawingml/2006/main" noGrp="1"/>
-          </p:cNvSpPr>
-          <p:nvPr/>
-        </p:nvSpPr>
-        <p:spPr>
-          <a:xfrm xmlns:a="http://schemas.openxmlformats.org/drawingml/2006/main">
-            <a:off x="6343650" y="1762125"/>
-            <a:ext cx="2181225" cy="762000"/>
+              <a:t>保存：hypothesis-and-design.md 的预测表和实验选择理由</a:t>
+            </a:r>
+          </a:p>
+        </p:txBody>
+      </p:sp>
+      <p:sp>
+        <p:nvSpPr>
+          <p:cNvPr id="5" name="judgment-source">
+            <a:extLst xmlns:a="http://schemas.openxmlformats.org/drawingml/2006/main">
+              <a:ext uri="{FF2B5EF4-FFF2-40B4-BE49-F238E27FC236}">
+                <a16:creationId xmlns:a16="http://schemas.microsoft.com/office/drawing/2014/main" id="{8844CCB4-85AA-4D26-9F57-26E75CCD82C9}"/>
+              </a:ext>
+            </a:extLst>
+          </p:cNvPr>
+          <p:cNvSpPr>
+            <a:spLocks xmlns:a="http://schemas.openxmlformats.org/drawingml/2006/main" noGrp="1"/>
+          </p:cNvSpPr>
+          <p:nvPr/>
+        </p:nvSpPr>
+        <p:spPr>
+          <a:xfrm xmlns:a="http://schemas.openxmlformats.org/drawingml/2006/main">
+            <a:off x="666750" y="6276975"/>
+            <a:ext cx="10572750" cy="209550"/>
           </a:xfrm>
           <a:prstGeom xmlns:a="http://schemas.openxmlformats.org/drawingml/2006/main" prst="rect">
             <a:avLst/>
@@ -8914,17 +7362,24 @@
           </a:ln>
         </p:spPr>
         <p:txBody>
-          <a:bodyPr xmlns:a="http://schemas.openxmlformats.org/drawingml/2006/main" lIns="0" tIns="0" rIns="0" bIns="0" anchor="ctr"/>
-          <a:lstStyle xmlns:a="http://schemas.openxmlformats.org/drawingml/2006/main"/>
-          <a:p xmlns:a="http://schemas.openxmlformats.org/drawingml/2006/main">
-            <a:pPr algn="ctr">
-              <a:lnSpc>
-                <a:spcPct val="118000"/>
-              </a:lnSpc>
-              <a:buNone/>
-              <a:defRPr sz="2200" b="0">
-                <a:solidFill>
-                  <a:srgbClr val="1F4D78"/>
+          <a:bodyPr xmlns:a="http://schemas.openxmlformats.org/drawingml/2006/main" lIns="0" tIns="0" rIns="0" bIns="0" anchor="t"/>
+          <a:lstStyle xmlns:a="http://schemas.openxmlformats.org/drawingml/2006/main">
+            <a:defPPr algn="l">
+              <a:defRPr sz="1100" b="0">
+                <a:solidFill>
+                  <a:srgbClr val="667684"/>
+                </a:solidFill>
+                <a:latin typeface="微软雅黑"/>
+                <a:ea typeface="微软雅黑"/>
+                <a:cs typeface="微软雅黑"/>
+              </a:defRPr>
+            </a:defPPr>
+          </a:lstStyle>
+          <a:p xmlns:a="http://schemas.openxmlformats.org/drawingml/2006/main">
+            <a:pPr algn="l">
+              <a:defRPr sz="1100" b="0">
+                <a:solidFill>
+                  <a:srgbClr val="667684"/>
                 </a:solidFill>
                 <a:latin typeface="微软雅黑"/>
                 <a:ea typeface="微软雅黑"/>
@@ -8932,37 +7387,37 @@
               </a:defRPr>
             </a:pPr>
             <a:r>
-              <a:rPr sz="2200" b="0">
-                <a:solidFill>
-                  <a:srgbClr val="1F4D78"/>
+              <a:rPr sz="1100" b="0">
+                <a:solidFill>
+                  <a:srgbClr val="667684"/>
                 </a:solidFill>
                 <a:latin typeface="微软雅黑"/>
                 <a:ea typeface="微软雅黑"/>
                 <a:cs typeface="微软雅黑"/>
               </a:rPr>
-              <a:t>写六字段判断</a:t>
-            </a:r>
-          </a:p>
-        </p:txBody>
-      </p:sp>
-      <p:sp>
-        <p:nvSpPr>
-          <p:cNvPr id="14" name="practice-a2">
-            <a:extLst xmlns:a="http://schemas.openxmlformats.org/drawingml/2006/main">
-              <a:ext uri="{FF2B5EF4-FFF2-40B4-BE49-F238E27FC236}">
-                <a16:creationId xmlns:a16="http://schemas.microsoft.com/office/drawing/2014/main" id="{7665297A-091F-427D-9F0C-AEF698815AFE}"/>
-              </a:ext>
-            </a:extLst>
-          </p:cNvPr>
-          <p:cNvSpPr>
-            <a:spLocks xmlns:a="http://schemas.openxmlformats.org/drawingml/2006/main" noGrp="1"/>
-          </p:cNvSpPr>
-          <p:nvPr/>
-        </p:nvSpPr>
-        <p:spPr>
-          <a:xfrm xmlns:a="http://schemas.openxmlformats.org/drawingml/2006/main">
-            <a:off x="8677275" y="1962150"/>
-            <a:ext cx="304800" cy="438150"/>
+              <a:t>来源：本课判断任务与讲义；构造材料及真实来源按材料包标识</a:t>
+            </a:r>
+          </a:p>
+        </p:txBody>
+      </p:sp>
+      <p:sp>
+        <p:nvSpPr>
+          <p:cNvPr id="6" name="judgment-page">
+            <a:extLst xmlns:a="http://schemas.openxmlformats.org/drawingml/2006/main">
+              <a:ext uri="{FF2B5EF4-FFF2-40B4-BE49-F238E27FC236}">
+                <a16:creationId xmlns:a16="http://schemas.microsoft.com/office/drawing/2014/main" id="{16106844-0501-48B0-87E9-AF55AB8502F4}"/>
+              </a:ext>
+            </a:extLst>
+          </p:cNvPr>
+          <p:cNvSpPr>
+            <a:spLocks xmlns:a="http://schemas.openxmlformats.org/drawingml/2006/main" noGrp="1"/>
+          </p:cNvSpPr>
+          <p:nvPr/>
+        </p:nvSpPr>
+        <p:spPr>
+          <a:xfrm xmlns:a="http://schemas.openxmlformats.org/drawingml/2006/main">
+            <a:off x="11715750" y="6562725"/>
+            <a:ext cx="238125" cy="171450"/>
           </a:xfrm>
           <a:prstGeom xmlns:a="http://schemas.openxmlformats.org/drawingml/2006/main" prst="rect">
             <a:avLst/>
@@ -8973,17 +7428,24 @@
           </a:ln>
         </p:spPr>
         <p:txBody>
-          <a:bodyPr xmlns:a="http://schemas.openxmlformats.org/drawingml/2006/main" lIns="0" tIns="0" rIns="0" bIns="0" anchor="ctr"/>
-          <a:lstStyle xmlns:a="http://schemas.openxmlformats.org/drawingml/2006/main"/>
-          <a:p xmlns:a="http://schemas.openxmlformats.org/drawingml/2006/main">
-            <a:pPr algn="ctr">
-              <a:lnSpc>
-                <a:spcPct val="118000"/>
-              </a:lnSpc>
-              <a:buNone/>
-              <a:defRPr sz="2800" b="0">
-                <a:solidFill>
-                  <a:srgbClr val="1F4D78"/>
+          <a:bodyPr xmlns:a="http://schemas.openxmlformats.org/drawingml/2006/main" lIns="0" tIns="0" rIns="0" bIns="0" anchor="t"/>
+          <a:lstStyle xmlns:a="http://schemas.openxmlformats.org/drawingml/2006/main">
+            <a:defPPr algn="l">
+              <a:defRPr sz="900" b="0">
+                <a:solidFill>
+                  <a:srgbClr val="A5A5A5"/>
+                </a:solidFill>
+                <a:latin typeface="微软雅黑"/>
+                <a:ea typeface="微软雅黑"/>
+                <a:cs typeface="微软雅黑"/>
+              </a:defRPr>
+            </a:defPPr>
+          </a:lstStyle>
+          <a:p xmlns:a="http://schemas.openxmlformats.org/drawingml/2006/main">
+            <a:pPr algn="l">
+              <a:defRPr sz="900" b="0">
+                <a:solidFill>
+                  <a:srgbClr val="A5A5A5"/>
                 </a:solidFill>
                 <a:latin typeface="微软雅黑"/>
                 <a:ea typeface="微软雅黑"/>
@@ -8991,279 +7453,15 @@
               </a:defRPr>
             </a:pPr>
             <a:r>
-              <a:rPr sz="2800" b="0">
-                <a:solidFill>
-                  <a:srgbClr val="1F4D78"/>
+              <a:rPr sz="900" b="0">
+                <a:solidFill>
+                  <a:srgbClr val="A5A5A5"/>
                 </a:solidFill>
                 <a:latin typeface="微软雅黑"/>
                 <a:ea typeface="微软雅黑"/>
                 <a:cs typeface="微软雅黑"/>
               </a:rPr>
-              <a:t>→</a:t>
-            </a:r>
-          </a:p>
-        </p:txBody>
-      </p:sp>
-      <p:sp>
-        <p:nvSpPr>
-          <p:cNvPr id="15" name="practice-3-bg">
-            <a:extLst xmlns:a="http://schemas.openxmlformats.org/drawingml/2006/main">
-              <a:ext uri="{FF2B5EF4-FFF2-40B4-BE49-F238E27FC236}">
-                <a16:creationId xmlns:a16="http://schemas.microsoft.com/office/drawing/2014/main" id="{556D16C1-BC34-411A-BF4A-5BB59B2B0341}"/>
-              </a:ext>
-            </a:extLst>
-          </p:cNvPr>
-          <p:cNvSpPr>
-            <a:spLocks xmlns:a="http://schemas.openxmlformats.org/drawingml/2006/main" noGrp="1"/>
-          </p:cNvSpPr>
-          <p:nvPr/>
-        </p:nvSpPr>
-        <p:spPr>
-          <a:xfrm xmlns:a="http://schemas.openxmlformats.org/drawingml/2006/main">
-            <a:off x="8982075" y="1666875"/>
-            <a:ext cx="2486025" cy="952500"/>
-          </a:xfrm>
-          <a:prstGeom xmlns:a="http://schemas.openxmlformats.org/drawingml/2006/main" prst="rect">
-            <a:avLst/>
-          </a:prstGeom>
-          <a:solidFill xmlns:a="http://schemas.openxmlformats.org/drawingml/2006/main">
-            <a:srgbClr val="F4F6F8"/>
-          </a:solidFill>
-          <a:ln xmlns:a="http://schemas.openxmlformats.org/drawingml/2006/main" w="0">
-            <a:noFill/>
-          </a:ln>
-        </p:spPr>
-      </p:sp>
-      <p:sp>
-        <p:nvSpPr>
-          <p:cNvPr id="16" name="practice-3">
-            <a:extLst xmlns:a="http://schemas.openxmlformats.org/drawingml/2006/main">
-              <a:ext uri="{FF2B5EF4-FFF2-40B4-BE49-F238E27FC236}">
-                <a16:creationId xmlns:a16="http://schemas.microsoft.com/office/drawing/2014/main" id="{C6D5EB0D-E5B5-4878-BA44-F1375CE66493}"/>
-              </a:ext>
-            </a:extLst>
-          </p:cNvPr>
-          <p:cNvSpPr>
-            <a:spLocks xmlns:a="http://schemas.openxmlformats.org/drawingml/2006/main" noGrp="1"/>
-          </p:cNvSpPr>
-          <p:nvPr/>
-        </p:nvSpPr>
-        <p:spPr>
-          <a:xfrm xmlns:a="http://schemas.openxmlformats.org/drawingml/2006/main">
-            <a:off x="9134475" y="1762125"/>
-            <a:ext cx="2181225" cy="762000"/>
-          </a:xfrm>
-          <a:prstGeom xmlns:a="http://schemas.openxmlformats.org/drawingml/2006/main" prst="rect">
-            <a:avLst/>
-          </a:prstGeom>
-          <a:noFill xmlns:a="http://schemas.openxmlformats.org/drawingml/2006/main"/>
-          <a:ln xmlns:a="http://schemas.openxmlformats.org/drawingml/2006/main" w="0">
-            <a:noFill/>
-          </a:ln>
-        </p:spPr>
-        <p:txBody>
-          <a:bodyPr xmlns:a="http://schemas.openxmlformats.org/drawingml/2006/main" lIns="0" tIns="0" rIns="0" bIns="0" anchor="ctr"/>
-          <a:lstStyle xmlns:a="http://schemas.openxmlformats.org/drawingml/2006/main"/>
-          <a:p xmlns:a="http://schemas.openxmlformats.org/drawingml/2006/main">
-            <a:pPr algn="ctr">
-              <a:lnSpc>
-                <a:spcPct val="118000"/>
-              </a:lnSpc>
-              <a:buNone/>
-              <a:defRPr sz="2200" b="0">
-                <a:solidFill>
-                  <a:srgbClr val="1F4D78"/>
-                </a:solidFill>
-                <a:latin typeface="微软雅黑"/>
-                <a:ea typeface="微软雅黑"/>
-                <a:cs typeface="微软雅黑"/>
-              </a:defRPr>
-            </a:pPr>
-            <a:r>
-              <a:rPr sz="2200" b="0">
-                <a:solidFill>
-                  <a:srgbClr val="1F4D78"/>
-                </a:solidFill>
-                <a:latin typeface="微软雅黑"/>
-                <a:ea typeface="微软雅黑"/>
-                <a:cs typeface="微软雅黑"/>
-              </a:rPr>
-              <a:t>画三态映射</a:t>
-            </a:r>
-          </a:p>
-        </p:txBody>
-      </p:sp>
-      <p:sp>
-        <p:nvSpPr>
-          <p:cNvPr id="17" name="done-bg">
-            <a:extLst xmlns:a="http://schemas.openxmlformats.org/drawingml/2006/main">
-              <a:ext uri="{FF2B5EF4-FFF2-40B4-BE49-F238E27FC236}">
-                <a16:creationId xmlns:a16="http://schemas.microsoft.com/office/drawing/2014/main" id="{033202E3-1856-4524-A280-C0861FC64129}"/>
-              </a:ext>
-            </a:extLst>
-          </p:cNvPr>
-          <p:cNvSpPr>
-            <a:spLocks xmlns:a="http://schemas.openxmlformats.org/drawingml/2006/main" noGrp="1"/>
-          </p:cNvSpPr>
-          <p:nvPr/>
-        </p:nvSpPr>
-        <p:spPr>
-          <a:xfrm xmlns:a="http://schemas.openxmlformats.org/drawingml/2006/main">
-            <a:off x="1524000" y="3429000"/>
-            <a:ext cx="9144000" cy="1066800"/>
-          </a:xfrm>
-          <a:prstGeom xmlns:a="http://schemas.openxmlformats.org/drawingml/2006/main" prst="rect">
-            <a:avLst/>
-          </a:prstGeom>
-          <a:solidFill xmlns:a="http://schemas.openxmlformats.org/drawingml/2006/main">
-            <a:srgbClr val="EDF5F0"/>
-          </a:solidFill>
-          <a:ln xmlns:a="http://schemas.openxmlformats.org/drawingml/2006/main" w="0">
-            <a:noFill/>
-          </a:ln>
-        </p:spPr>
-      </p:sp>
-      <p:sp>
-        <p:nvSpPr>
-          <p:cNvPr id="18" name="done">
-            <a:extLst xmlns:a="http://schemas.openxmlformats.org/drawingml/2006/main">
-              <a:ext uri="{FF2B5EF4-FFF2-40B4-BE49-F238E27FC236}">
-                <a16:creationId xmlns:a16="http://schemas.microsoft.com/office/drawing/2014/main" id="{2D80ADB3-1767-465A-9995-90340A6ABA8B}"/>
-              </a:ext>
-            </a:extLst>
-          </p:cNvPr>
-          <p:cNvSpPr>
-            <a:spLocks xmlns:a="http://schemas.openxmlformats.org/drawingml/2006/main" noGrp="1"/>
-          </p:cNvSpPr>
-          <p:nvPr/>
-        </p:nvSpPr>
-        <p:spPr>
-          <a:xfrm xmlns:a="http://schemas.openxmlformats.org/drawingml/2006/main">
-            <a:off x="1676400" y="3524250"/>
-            <a:ext cx="8839200" cy="876300"/>
-          </a:xfrm>
-          <a:prstGeom xmlns:a="http://schemas.openxmlformats.org/drawingml/2006/main" prst="rect">
-            <a:avLst/>
-          </a:prstGeom>
-          <a:noFill xmlns:a="http://schemas.openxmlformats.org/drawingml/2006/main"/>
-          <a:ln xmlns:a="http://schemas.openxmlformats.org/drawingml/2006/main" w="0">
-            <a:noFill/>
-          </a:ln>
-        </p:spPr>
-        <p:txBody>
-          <a:bodyPr xmlns:a="http://schemas.openxmlformats.org/drawingml/2006/main" lIns="0" tIns="0" rIns="0" bIns="0" anchor="ctr"/>
-          <a:lstStyle xmlns:a="http://schemas.openxmlformats.org/drawingml/2006/main"/>
-          <a:p xmlns:a="http://schemas.openxmlformats.org/drawingml/2006/main">
-            <a:pPr algn="ctr">
-              <a:lnSpc>
-                <a:spcPct val="118000"/>
-              </a:lnSpc>
-              <a:buNone/>
-              <a:defRPr sz="2300" b="0">
-                <a:solidFill>
-                  <a:srgbClr val="1F4D78"/>
-                </a:solidFill>
-                <a:latin typeface="微软雅黑"/>
-                <a:ea typeface="微软雅黑"/>
-                <a:cs typeface="微软雅黑"/>
-              </a:defRPr>
-            </a:pPr>
-            <a:r>
-              <a:rPr sz="2300" b="0">
-                <a:solidFill>
-                  <a:srgbClr val="1F4D78"/>
-                </a:solidFill>
-                <a:latin typeface="微软雅黑"/>
-                <a:ea typeface="微软雅黑"/>
-                <a:cs typeface="微软雅黑"/>
-              </a:rPr>
-              <a:t>完成标志</a:t>
-            </a:r>
-          </a:p>
-          <a:p xmlns:a="http://schemas.openxmlformats.org/drawingml/2006/main">
-            <a:pPr algn="ctr">
-              <a:lnSpc>
-                <a:spcPct val="118000"/>
-              </a:lnSpc>
-              <a:buNone/>
-              <a:defRPr sz="2300" b="0">
-                <a:solidFill>
-                  <a:srgbClr val="1F4D78"/>
-                </a:solidFill>
-                <a:latin typeface="微软雅黑"/>
-                <a:ea typeface="微软雅黑"/>
-                <a:cs typeface="微软雅黑"/>
-              </a:defRPr>
-            </a:pPr>
-            <a:r>
-              <a:rPr sz="2300" b="0">
-                <a:solidFill>
-                  <a:srgbClr val="1F4D78"/>
-                </a:solidFill>
-                <a:latin typeface="微软雅黑"/>
-                <a:ea typeface="微软雅黑"/>
-                <a:cs typeface="微软雅黑"/>
-              </a:rPr>
-              <a:t>四个对象落在个人项目中，可以被同伴逐项检查</a:t>
-            </a:r>
-          </a:p>
-        </p:txBody>
-      </p:sp>
-      <p:sp>
-        <p:nvSpPr>
-          <p:cNvPr id="19" name="after">
-            <a:extLst xmlns:a="http://schemas.openxmlformats.org/drawingml/2006/main">
-              <a:ext uri="{FF2B5EF4-FFF2-40B4-BE49-F238E27FC236}">
-                <a16:creationId xmlns:a16="http://schemas.microsoft.com/office/drawing/2014/main" id="{FD65FFFA-F10B-4765-91F0-F9C3B0279472}"/>
-              </a:ext>
-            </a:extLst>
-          </p:cNvPr>
-          <p:cNvSpPr>
-            <a:spLocks xmlns:a="http://schemas.openxmlformats.org/drawingml/2006/main" noGrp="1"/>
-          </p:cNvSpPr>
-          <p:nvPr/>
-        </p:nvSpPr>
-        <p:spPr>
-          <a:xfrm xmlns:a="http://schemas.openxmlformats.org/drawingml/2006/main">
-            <a:off x="2381250" y="4953000"/>
-            <a:ext cx="7429500" cy="400050"/>
-          </a:xfrm>
-          <a:prstGeom xmlns:a="http://schemas.openxmlformats.org/drawingml/2006/main" prst="rect">
-            <a:avLst/>
-          </a:prstGeom>
-          <a:noFill xmlns:a="http://schemas.openxmlformats.org/drawingml/2006/main"/>
-          <a:ln xmlns:a="http://schemas.openxmlformats.org/drawingml/2006/main" w="0">
-            <a:noFill/>
-          </a:ln>
-        </p:spPr>
-        <p:txBody>
-          <a:bodyPr xmlns:a="http://schemas.openxmlformats.org/drawingml/2006/main" lIns="0" tIns="0" rIns="0" bIns="0" anchor="t"/>
-          <a:lstStyle xmlns:a="http://schemas.openxmlformats.org/drawingml/2006/main"/>
-          <a:p xmlns:a="http://schemas.openxmlformats.org/drawingml/2006/main">
-            <a:pPr algn="ctr">
-              <a:lnSpc>
-                <a:spcPct val="118000"/>
-              </a:lnSpc>
-              <a:buNone/>
-              <a:defRPr sz="2200" b="0">
-                <a:solidFill>
-                  <a:srgbClr val="66727D"/>
-                </a:solidFill>
-                <a:latin typeface="微软雅黑"/>
-                <a:ea typeface="微软雅黑"/>
-                <a:cs typeface="微软雅黑"/>
-              </a:defRPr>
-            </a:pPr>
-            <a:r>
-              <a:rPr sz="2200" b="0">
-                <a:solidFill>
-                  <a:srgbClr val="66727D"/>
-                </a:solidFill>
-                <a:latin typeface="微软雅黑"/>
-                <a:ea typeface="微软雅黑"/>
-                <a:cs typeface="微软雅黑"/>
-              </a:rPr>
-              <a:t>课后只补当堂未完成的表达；完整规格留到第 9 课</a:t>
+              <a:t>14</a:t>
             </a:r>
           </a:p>
         </p:txBody>
@@ -10548,97 +8746,22 @@
       </p:grpSpPr>
       <p:sp>
         <p:nvSpPr>
-          <p:cNvPr id="4" name="Text Placeholder 3">
-            <a:extLst xmlns:a="http://schemas.openxmlformats.org/drawingml/2006/main">
-              <a:ext uri="{FF2B5EF4-FFF2-40B4-BE49-F238E27FC236}">
-                <a16:creationId xmlns:a16="http://schemas.microsoft.com/office/drawing/2014/main" id="{4D941B40-7A0A-534E-3563-CA11753C8E3F}"/>
-              </a:ext>
-            </a:extLst>
-          </p:cNvPr>
-          <p:cNvSpPr>
-            <a:spLocks xmlns:a="http://schemas.openxmlformats.org/drawingml/2006/main" noGrp="1"/>
-          </p:cNvSpPr>
-          <p:nvPr>
-            <p:ph type="body" idx="14"/>
-          </p:nvPr>
-        </p:nvSpPr>
-        <p:spPr>
-          <a:xfrm xmlns:a="http://schemas.openxmlformats.org/drawingml/2006/main">
-            <a:off x="1028700" y="57150"/>
-            <a:ext cx="10668000" cy="571500"/>
-          </a:xfrm>
-        </p:spPr>
-        <p:txBody>
-          <a:bodyPr xmlns:a="http://schemas.openxmlformats.org/drawingml/2006/main" lIns="0" tIns="0" rIns="0" bIns="0" anchor="ctr"/>
-          <a:lstStyle xmlns:a="http://schemas.openxmlformats.org/drawingml/2006/main"/>
-          <a:p xmlns:a="http://schemas.openxmlformats.org/drawingml/2006/main">
-            <a:pPr algn="l">
-              <a:lnSpc>
-                <a:spcPct val="118000"/>
-              </a:lnSpc>
-              <a:buNone/>
-            </a:pPr>
-            <a:r>
-              <a:rPr sz="3000" b="1">
-                <a:solidFill>
-                  <a:srgbClr val="FFFFFF"/>
-                </a:solidFill>
-                <a:latin typeface="微软雅黑"/>
-                <a:ea typeface="微软雅黑"/>
-                <a:cs typeface="微软雅黑"/>
-              </a:rPr>
-              <a:t>退出卡：你的下一步实验真的会改变判断吗</a:t>
-            </a:r>
-            <a:endParaRPr/>
-          </a:p>
-        </p:txBody>
-      </p:sp>
-      <p:sp>
-        <p:nvSpPr>
-          <p:cNvPr id="5" name="Slide Number Placeholder 4">
-            <a:extLst xmlns:a="http://schemas.openxmlformats.org/drawingml/2006/main">
-              <a:ext uri="{FF2B5EF4-FFF2-40B4-BE49-F238E27FC236}">
-                <a16:creationId xmlns:a16="http://schemas.microsoft.com/office/drawing/2014/main" id="{EBA5909F-738E-F60C-BE8C-B3F1D94548E5}"/>
-              </a:ext>
-            </a:extLst>
-          </p:cNvPr>
-          <p:cNvSpPr>
-            <a:spLocks xmlns:a="http://schemas.openxmlformats.org/drawingml/2006/main" noGrp="1"/>
-          </p:cNvSpPr>
-          <p:nvPr>
-            <p:ph type="sldNum" idx="10"/>
-          </p:nvPr>
-        </p:nvSpPr>
-        <p:spPr/>
-        <p:txBody>
-          <a:bodyPr xmlns:a="http://schemas.openxmlformats.org/drawingml/2006/main"/>
-          <a:lstStyle xmlns:a="http://schemas.openxmlformats.org/drawingml/2006/main"/>
-          <a:p xmlns:a="http://schemas.openxmlformats.org/drawingml/2006/main">
-            <a:fld id="{90F7333B-44AC-F7E9-D49D-FE92F45E0477}" type="slidenum">
-              <a:t>17</a:t>
-            </a:fld>
-            <a:endParaRPr/>
-          </a:p>
-        </p:txBody>
-      </p:sp>
-      <p:sp>
-        <p:nvSpPr>
-          <p:cNvPr id="6" name="question">
-            <a:extLst xmlns:a="http://schemas.openxmlformats.org/drawingml/2006/main">
-              <a:ext uri="{FF2B5EF4-FFF2-40B4-BE49-F238E27FC236}">
-                <a16:creationId xmlns:a16="http://schemas.microsoft.com/office/drawing/2014/main" id="{1FEA0366-4312-43FA-9A08-FD2EBDBAB7D3}"/>
-              </a:ext>
-            </a:extLst>
-          </p:cNvPr>
-          <p:cNvSpPr>
-            <a:spLocks xmlns:a="http://schemas.openxmlformats.org/drawingml/2006/main" noGrp="1"/>
-          </p:cNvSpPr>
-          <p:nvPr/>
-        </p:nvSpPr>
-        <p:spPr>
-          <a:xfrm xmlns:a="http://schemas.openxmlformats.org/drawingml/2006/main">
-            <a:off x="857250" y="1285875"/>
-            <a:ext cx="10477500" cy="685800"/>
+          <p:cNvPr id="7" name="judgment-title">
+            <a:extLst xmlns:a="http://schemas.openxmlformats.org/drawingml/2006/main">
+              <a:ext uri="{FF2B5EF4-FFF2-40B4-BE49-F238E27FC236}">
+                <a16:creationId xmlns:a16="http://schemas.microsoft.com/office/drawing/2014/main" id="{E64ABCF4-A8EF-432B-8CAC-6D0E36A5F621}"/>
+              </a:ext>
+            </a:extLst>
+          </p:cNvPr>
+          <p:cNvSpPr>
+            <a:spLocks xmlns:a="http://schemas.openxmlformats.org/drawingml/2006/main" noGrp="1"/>
+          </p:cNvSpPr>
+          <p:nvPr/>
+        </p:nvSpPr>
+        <p:spPr>
+          <a:xfrm xmlns:a="http://schemas.openxmlformats.org/drawingml/2006/main">
+            <a:off x="1028700" y="76200"/>
+            <a:ext cx="10687050" cy="514350"/>
           </a:xfrm>
           <a:prstGeom xmlns:a="http://schemas.openxmlformats.org/drawingml/2006/main" prst="rect">
             <a:avLst/>
@@ -10650,16 +8773,23 @@
         </p:spPr>
         <p:txBody>
           <a:bodyPr xmlns:a="http://schemas.openxmlformats.org/drawingml/2006/main" lIns="0" tIns="0" rIns="0" bIns="0" anchor="t"/>
-          <a:lstStyle xmlns:a="http://schemas.openxmlformats.org/drawingml/2006/main"/>
-          <a:p xmlns:a="http://schemas.openxmlformats.org/drawingml/2006/main">
-            <a:pPr algn="ctr">
-              <a:lnSpc>
-                <a:spcPct val="118000"/>
-              </a:lnSpc>
-              <a:buNone/>
+          <a:lstStyle xmlns:a="http://schemas.openxmlformats.org/drawingml/2006/main">
+            <a:defPPr algn="l">
               <a:defRPr sz="3000" b="1">
                 <a:solidFill>
-                  <a:srgbClr val="1F4D78"/>
+                  <a:srgbClr val="FFFFFF"/>
+                </a:solidFill>
+                <a:latin typeface="微软雅黑"/>
+                <a:ea typeface="微软雅黑"/>
+                <a:cs typeface="微软雅黑"/>
+              </a:defRPr>
+            </a:defPPr>
+          </a:lstStyle>
+          <a:p xmlns:a="http://schemas.openxmlformats.org/drawingml/2006/main">
+            <a:pPr algn="l">
+              <a:defRPr sz="3000" b="1">
+                <a:solidFill>
+                  <a:srgbClr val="FFFFFF"/>
                 </a:solidFill>
                 <a:latin typeface="微软雅黑"/>
                 <a:ea typeface="微软雅黑"/>
@@ -10669,35 +8799,35 @@
             <a:r>
               <a:rPr sz="3000" b="1">
                 <a:solidFill>
-                  <a:srgbClr val="1F4D78"/>
+                  <a:srgbClr val="FFFFFF"/>
                 </a:solidFill>
                 <a:latin typeface="微软雅黑"/>
                 <a:ea typeface="微软雅黑"/>
                 <a:cs typeface="微软雅黑"/>
               </a:rPr>
-              <a:t>你的下一步实验，真的会改变研究判断吗？</a:t>
-            </a:r>
-          </a:p>
-        </p:txBody>
-      </p:sp>
-      <p:sp>
-        <p:nvSpPr>
-          <p:cNvPr id="7" name="exit-n0">
-            <a:extLst xmlns:a="http://schemas.openxmlformats.org/drawingml/2006/main">
-              <a:ext uri="{FF2B5EF4-FFF2-40B4-BE49-F238E27FC236}">
-                <a16:creationId xmlns:a16="http://schemas.microsoft.com/office/drawing/2014/main" id="{66B4D37E-D151-437F-BFD0-E69A689D749B}"/>
-              </a:ext>
-            </a:extLst>
-          </p:cNvPr>
-          <p:cNvSpPr>
-            <a:spLocks xmlns:a="http://schemas.openxmlformats.org/drawingml/2006/main" noGrp="1"/>
-          </p:cNvSpPr>
-          <p:nvPr/>
-        </p:nvSpPr>
-        <p:spPr>
-          <a:xfrm xmlns:a="http://schemas.openxmlformats.org/drawingml/2006/main">
-            <a:off x="1143000" y="2476500"/>
-            <a:ext cx="476250" cy="381000"/>
+              <a:t>保留本课决定，准备下一课输入</a:t>
+            </a:r>
+          </a:p>
+        </p:txBody>
+      </p:sp>
+      <p:sp>
+        <p:nvSpPr>
+          <p:cNvPr id="2" name="judgment-body-0">
+            <a:extLst xmlns:a="http://schemas.openxmlformats.org/drawingml/2006/main">
+              <a:ext uri="{FF2B5EF4-FFF2-40B4-BE49-F238E27FC236}">
+                <a16:creationId xmlns:a16="http://schemas.microsoft.com/office/drawing/2014/main" id="{32F00D94-DC2B-49AE-B044-953EFB945F0C}"/>
+              </a:ext>
+            </a:extLst>
+          </p:cNvPr>
+          <p:cNvSpPr>
+            <a:spLocks xmlns:a="http://schemas.openxmlformats.org/drawingml/2006/main" noGrp="1"/>
+          </p:cNvSpPr>
+          <p:nvPr/>
+        </p:nvSpPr>
+        <p:spPr>
+          <a:xfrm xmlns:a="http://schemas.openxmlformats.org/drawingml/2006/main">
+            <a:off x="666750" y="1066800"/>
+            <a:ext cx="10858500" cy="1009650"/>
           </a:xfrm>
           <a:prstGeom xmlns:a="http://schemas.openxmlformats.org/drawingml/2006/main" prst="rect">
             <a:avLst/>
@@ -10708,17 +8838,24 @@
           </a:ln>
         </p:spPr>
         <p:txBody>
-          <a:bodyPr xmlns:a="http://schemas.openxmlformats.org/drawingml/2006/main" lIns="0" tIns="0" rIns="0" bIns="0" anchor="ctr"/>
-          <a:lstStyle xmlns:a="http://schemas.openxmlformats.org/drawingml/2006/main"/>
+          <a:bodyPr xmlns:a="http://schemas.openxmlformats.org/drawingml/2006/main" lIns="0" tIns="0" rIns="0" bIns="0" anchor="t"/>
+          <a:lstStyle xmlns:a="http://schemas.openxmlformats.org/drawingml/2006/main">
+            <a:defPPr algn="l">
+              <a:defRPr sz="2400" b="0">
+                <a:solidFill>
+                  <a:srgbClr val="263746"/>
+                </a:solidFill>
+                <a:latin typeface="微软雅黑"/>
+                <a:ea typeface="微软雅黑"/>
+                <a:cs typeface="微软雅黑"/>
+              </a:defRPr>
+            </a:defPPr>
+          </a:lstStyle>
           <a:p xmlns:a="http://schemas.openxmlformats.org/drawingml/2006/main">
             <a:pPr algn="l">
-              <a:lnSpc>
-                <a:spcPct val="118000"/>
-              </a:lnSpc>
-              <a:buNone/>
-              <a:defRPr sz="1800" b="1">
-                <a:solidFill>
-                  <a:srgbClr val="2E7D5B"/>
+              <a:defRPr sz="2400" b="0">
+                <a:solidFill>
+                  <a:srgbClr val="263746"/>
                 </a:solidFill>
                 <a:latin typeface="微软雅黑"/>
                 <a:ea typeface="微软雅黑"/>
@@ -10726,37 +8863,37 @@
               </a:defRPr>
             </a:pPr>
             <a:r>
-              <a:rPr sz="1800" b="1">
-                <a:solidFill>
-                  <a:srgbClr val="2E7D5B"/>
+              <a:rPr sz="2400" b="0">
+                <a:solidFill>
+                  <a:srgbClr val="263746"/>
                 </a:solidFill>
                 <a:latin typeface="微软雅黑"/>
                 <a:ea typeface="微软雅黑"/>
                 <a:cs typeface="微软雅黑"/>
               </a:rPr>
-              <a:t>01</a:t>
-            </a:r>
-          </a:p>
-        </p:txBody>
-      </p:sp>
-      <p:sp>
-        <p:nvSpPr>
-          <p:cNvPr id="8" name="exit-t0">
-            <a:extLst xmlns:a="http://schemas.openxmlformats.org/drawingml/2006/main">
-              <a:ext uri="{FF2B5EF4-FFF2-40B4-BE49-F238E27FC236}">
-                <a16:creationId xmlns:a16="http://schemas.microsoft.com/office/drawing/2014/main" id="{AEB3F3E9-CB16-4C28-A41D-4B572C251C06}"/>
-              </a:ext>
-            </a:extLst>
-          </p:cNvPr>
-          <p:cNvSpPr>
-            <a:spLocks xmlns:a="http://schemas.openxmlformats.org/drawingml/2006/main" noGrp="1"/>
-          </p:cNvSpPr>
-          <p:nvPr/>
-        </p:nvSpPr>
-        <p:spPr>
-          <a:xfrm xmlns:a="http://schemas.openxmlformats.org/drawingml/2006/main">
-            <a:off x="1695450" y="2476500"/>
-            <a:ext cx="6305550" cy="495300"/>
+              <a:t>L8 以最薄弱的区分证据接受同伴质询。</a:t>
+            </a:r>
+          </a:p>
+        </p:txBody>
+      </p:sp>
+      <p:sp>
+        <p:nvSpPr>
+          <p:cNvPr id="3" name="judgment-body-1">
+            <a:extLst xmlns:a="http://schemas.openxmlformats.org/drawingml/2006/main">
+              <a:ext uri="{FF2B5EF4-FFF2-40B4-BE49-F238E27FC236}">
+                <a16:creationId xmlns:a16="http://schemas.microsoft.com/office/drawing/2014/main" id="{8D51576D-3E5C-4C5C-B7FE-4E7DB2232320}"/>
+              </a:ext>
+            </a:extLst>
+          </p:cNvPr>
+          <p:cNvSpPr>
+            <a:spLocks xmlns:a="http://schemas.openxmlformats.org/drawingml/2006/main" noGrp="1"/>
+          </p:cNvSpPr>
+          <p:nvPr/>
+        </p:nvSpPr>
+        <p:spPr>
+          <a:xfrm xmlns:a="http://schemas.openxmlformats.org/drawingml/2006/main">
+            <a:off x="666750" y="2238375"/>
+            <a:ext cx="10858500" cy="2076450"/>
           </a:xfrm>
           <a:prstGeom xmlns:a="http://schemas.openxmlformats.org/drawingml/2006/main" prst="rect">
             <a:avLst/>
@@ -10767,17 +8904,24 @@
           </a:ln>
         </p:spPr>
         <p:txBody>
-          <a:bodyPr xmlns:a="http://schemas.openxmlformats.org/drawingml/2006/main" lIns="0" tIns="0" rIns="0" bIns="0" anchor="ctr"/>
-          <a:lstStyle xmlns:a="http://schemas.openxmlformats.org/drawingml/2006/main"/>
+          <a:bodyPr xmlns:a="http://schemas.openxmlformats.org/drawingml/2006/main" lIns="0" tIns="0" rIns="0" bIns="0" anchor="t"/>
+          <a:lstStyle xmlns:a="http://schemas.openxmlformats.org/drawingml/2006/main">
+            <a:defPPr algn="l">
+              <a:defRPr sz="2400" b="0">
+                <a:solidFill>
+                  <a:srgbClr val="263746"/>
+                </a:solidFill>
+                <a:latin typeface="微软雅黑"/>
+                <a:ea typeface="微软雅黑"/>
+                <a:cs typeface="微软雅黑"/>
+              </a:defRPr>
+            </a:defPPr>
+          </a:lstStyle>
           <a:p xmlns:a="http://schemas.openxmlformats.org/drawingml/2006/main">
             <a:pPr algn="l">
-              <a:lnSpc>
-                <a:spcPct val="118000"/>
-              </a:lnSpc>
-              <a:buNone/>
-              <a:defRPr sz="2200" b="0">
-                <a:solidFill>
-                  <a:srgbClr val="2E7D5B"/>
+              <a:defRPr sz="2400" b="0">
+                <a:solidFill>
+                  <a:srgbClr val="263746"/>
                 </a:solidFill>
                 <a:latin typeface="微软雅黑"/>
                 <a:ea typeface="微软雅黑"/>
@@ -10785,67 +8929,37 @@
               </a:defRPr>
             </a:pPr>
             <a:r>
-              <a:rPr sz="2200" b="0">
-                <a:solidFill>
-                  <a:srgbClr val="2E7D5B"/>
+              <a:rPr sz="2400" b="0">
+                <a:solidFill>
+                  <a:srgbClr val="263746"/>
                 </a:solidFill>
                 <a:latin typeface="微软雅黑"/>
                 <a:ea typeface="微软雅黑"/>
                 <a:cs typeface="微软雅黑"/>
               </a:rPr>
-              <a:t>主机制写清中间过程</a:t>
-            </a:r>
-          </a:p>
-        </p:txBody>
-      </p:sp>
-      <p:sp>
-        <p:nvSpPr>
-          <p:cNvPr id="9" name="exit-r0">
-            <a:extLst xmlns:a="http://schemas.openxmlformats.org/drawingml/2006/main">
-              <a:ext uri="{FF2B5EF4-FFF2-40B4-BE49-F238E27FC236}">
-                <a16:creationId xmlns:a16="http://schemas.microsoft.com/office/drawing/2014/main" id="{D6595022-D91A-4BC8-AEA3-6B08AA87110A}"/>
-              </a:ext>
-            </a:extLst>
-          </p:cNvPr>
-          <p:cNvSpPr>
-            <a:spLocks xmlns:a="http://schemas.openxmlformats.org/drawingml/2006/main" noGrp="1"/>
-          </p:cNvSpPr>
-          <p:nvPr/>
-        </p:nvSpPr>
-        <p:spPr>
-          <a:xfrm xmlns:a="http://schemas.openxmlformats.org/drawingml/2006/main">
-            <a:off x="1143000" y="3009900"/>
-            <a:ext cx="6858000" cy="14288"/>
-          </a:xfrm>
-          <a:prstGeom xmlns:a="http://schemas.openxmlformats.org/drawingml/2006/main" prst="rect">
-            <a:avLst/>
-          </a:prstGeom>
-          <a:solidFill xmlns:a="http://schemas.openxmlformats.org/drawingml/2006/main">
-            <a:srgbClr val="CDD5DB"/>
-          </a:solidFill>
-          <a:ln xmlns:a="http://schemas.openxmlformats.org/drawingml/2006/main" w="0">
-            <a:noFill/>
-          </a:ln>
-        </p:spPr>
-      </p:sp>
-      <p:sp>
-        <p:nvSpPr>
-          <p:cNvPr id="10" name="exit-n1">
-            <a:extLst xmlns:a="http://schemas.openxmlformats.org/drawingml/2006/main">
-              <a:ext uri="{FF2B5EF4-FFF2-40B4-BE49-F238E27FC236}">
-                <a16:creationId xmlns:a16="http://schemas.microsoft.com/office/drawing/2014/main" id="{E5C57353-FFD9-48C9-B5E1-6F4FEBF07693}"/>
-              </a:ext>
-            </a:extLst>
-          </p:cNvPr>
-          <p:cNvSpPr>
-            <a:spLocks xmlns:a="http://schemas.openxmlformats.org/drawingml/2006/main" noGrp="1"/>
-          </p:cNvSpPr>
-          <p:nvPr/>
-        </p:nvSpPr>
-        <p:spPr>
-          <a:xfrm xmlns:a="http://schemas.openxmlformats.org/drawingml/2006/main">
-            <a:off x="1143000" y="3067050"/>
-            <a:ext cx="476250" cy="381000"/>
+              <a:t>回写已有项目：hypothesis-and-design.md 的预测表和实验选择理由</a:t>
+            </a:r>
+          </a:p>
+        </p:txBody>
+      </p:sp>
+      <p:sp>
+        <p:nvSpPr>
+          <p:cNvPr id="4" name="judgment-body-2">
+            <a:extLst xmlns:a="http://schemas.openxmlformats.org/drawingml/2006/main">
+              <a:ext uri="{FF2B5EF4-FFF2-40B4-BE49-F238E27FC236}">
+                <a16:creationId xmlns:a16="http://schemas.microsoft.com/office/drawing/2014/main" id="{984D61D0-2668-4AE3-9F04-7E8D927CDEC6}"/>
+              </a:ext>
+            </a:extLst>
+          </p:cNvPr>
+          <p:cNvSpPr>
+            <a:spLocks xmlns:a="http://schemas.openxmlformats.org/drawingml/2006/main" noGrp="1"/>
+          </p:cNvSpPr>
+          <p:nvPr/>
+        </p:nvSpPr>
+        <p:spPr>
+          <a:xfrm xmlns:a="http://schemas.openxmlformats.org/drawingml/2006/main">
+            <a:off x="666750" y="4495800"/>
+            <a:ext cx="10858500" cy="1409700"/>
           </a:xfrm>
           <a:prstGeom xmlns:a="http://schemas.openxmlformats.org/drawingml/2006/main" prst="rect">
             <a:avLst/>
@@ -10856,17 +8970,24 @@
           </a:ln>
         </p:spPr>
         <p:txBody>
-          <a:bodyPr xmlns:a="http://schemas.openxmlformats.org/drawingml/2006/main" lIns="0" tIns="0" rIns="0" bIns="0" anchor="ctr"/>
-          <a:lstStyle xmlns:a="http://schemas.openxmlformats.org/drawingml/2006/main"/>
+          <a:bodyPr xmlns:a="http://schemas.openxmlformats.org/drawingml/2006/main" lIns="0" tIns="0" rIns="0" bIns="0" anchor="t"/>
+          <a:lstStyle xmlns:a="http://schemas.openxmlformats.org/drawingml/2006/main">
+            <a:defPPr algn="l">
+              <a:defRPr sz="2200" b="0">
+                <a:solidFill>
+                  <a:srgbClr val="1F4D78"/>
+                </a:solidFill>
+                <a:latin typeface="微软雅黑"/>
+                <a:ea typeface="微软雅黑"/>
+                <a:cs typeface="微软雅黑"/>
+              </a:defRPr>
+            </a:defPPr>
+          </a:lstStyle>
           <a:p xmlns:a="http://schemas.openxmlformats.org/drawingml/2006/main">
             <a:pPr algn="l">
-              <a:lnSpc>
-                <a:spcPct val="118000"/>
-              </a:lnSpc>
-              <a:buNone/>
-              <a:defRPr sz="1800" b="1">
-                <a:solidFill>
-                  <a:srgbClr val="2E7D5B"/>
+              <a:defRPr sz="2200" b="0">
+                <a:solidFill>
+                  <a:srgbClr val="1F4D78"/>
                 </a:solidFill>
                 <a:latin typeface="微软雅黑"/>
                 <a:ea typeface="微软雅黑"/>
@@ -10874,37 +8995,37 @@
               </a:defRPr>
             </a:pPr>
             <a:r>
-              <a:rPr sz="1800" b="1">
-                <a:solidFill>
-                  <a:srgbClr val="2E7D5B"/>
+              <a:rPr sz="2200" b="0">
+                <a:solidFill>
+                  <a:srgbClr val="1F4D78"/>
                 </a:solidFill>
                 <a:latin typeface="微软雅黑"/>
                 <a:ea typeface="微软雅黑"/>
                 <a:cs typeface="微软雅黑"/>
               </a:rPr>
-              <a:t>02</a:t>
-            </a:r>
-          </a:p>
-        </p:txBody>
-      </p:sp>
-      <p:sp>
-        <p:nvSpPr>
-          <p:cNvPr id="11" name="exit-t1">
-            <a:extLst xmlns:a="http://schemas.openxmlformats.org/drawingml/2006/main">
-              <a:ext uri="{FF2B5EF4-FFF2-40B4-BE49-F238E27FC236}">
-                <a16:creationId xmlns:a16="http://schemas.microsoft.com/office/drawing/2014/main" id="{96BB99BC-4BF9-45DD-819E-DEFBAE69DB01}"/>
-              </a:ext>
-            </a:extLst>
-          </p:cNvPr>
-          <p:cNvSpPr>
-            <a:spLocks xmlns:a="http://schemas.openxmlformats.org/drawingml/2006/main" noGrp="1"/>
-          </p:cNvSpPr>
-          <p:nvPr/>
-        </p:nvSpPr>
-        <p:spPr>
-          <a:xfrm xmlns:a="http://schemas.openxmlformats.org/drawingml/2006/main">
-            <a:off x="1695450" y="3067050"/>
-            <a:ext cx="6305550" cy="495300"/>
+              <a:t>只读指定段落，补课堂留下的真实缺口。安装与排障计入课外总预算。</a:t>
+            </a:r>
+          </a:p>
+        </p:txBody>
+      </p:sp>
+      <p:sp>
+        <p:nvSpPr>
+          <p:cNvPr id="5" name="judgment-source">
+            <a:extLst xmlns:a="http://schemas.openxmlformats.org/drawingml/2006/main">
+              <a:ext uri="{FF2B5EF4-FFF2-40B4-BE49-F238E27FC236}">
+                <a16:creationId xmlns:a16="http://schemas.microsoft.com/office/drawing/2014/main" id="{9EE8363F-4B5B-41C8-8D61-839CDAC962E4}"/>
+              </a:ext>
+            </a:extLst>
+          </p:cNvPr>
+          <p:cNvSpPr>
+            <a:spLocks xmlns:a="http://schemas.openxmlformats.org/drawingml/2006/main" noGrp="1"/>
+          </p:cNvSpPr>
+          <p:nvPr/>
+        </p:nvSpPr>
+        <p:spPr>
+          <a:xfrm xmlns:a="http://schemas.openxmlformats.org/drawingml/2006/main">
+            <a:off x="666750" y="6276975"/>
+            <a:ext cx="10572750" cy="209550"/>
           </a:xfrm>
           <a:prstGeom xmlns:a="http://schemas.openxmlformats.org/drawingml/2006/main" prst="rect">
             <a:avLst/>
@@ -10915,17 +9036,24 @@
           </a:ln>
         </p:spPr>
         <p:txBody>
-          <a:bodyPr xmlns:a="http://schemas.openxmlformats.org/drawingml/2006/main" lIns="0" tIns="0" rIns="0" bIns="0" anchor="ctr"/>
-          <a:lstStyle xmlns:a="http://schemas.openxmlformats.org/drawingml/2006/main"/>
+          <a:bodyPr xmlns:a="http://schemas.openxmlformats.org/drawingml/2006/main" lIns="0" tIns="0" rIns="0" bIns="0" anchor="t"/>
+          <a:lstStyle xmlns:a="http://schemas.openxmlformats.org/drawingml/2006/main">
+            <a:defPPr algn="l">
+              <a:defRPr sz="1100" b="0">
+                <a:solidFill>
+                  <a:srgbClr val="667684"/>
+                </a:solidFill>
+                <a:latin typeface="微软雅黑"/>
+                <a:ea typeface="微软雅黑"/>
+                <a:cs typeface="微软雅黑"/>
+              </a:defRPr>
+            </a:defPPr>
+          </a:lstStyle>
           <a:p xmlns:a="http://schemas.openxmlformats.org/drawingml/2006/main">
             <a:pPr algn="l">
-              <a:lnSpc>
-                <a:spcPct val="118000"/>
-              </a:lnSpc>
-              <a:buNone/>
-              <a:defRPr sz="2200" b="0">
-                <a:solidFill>
-                  <a:srgbClr val="2E7D5B"/>
+              <a:defRPr sz="1100" b="0">
+                <a:solidFill>
+                  <a:srgbClr val="667684"/>
                 </a:solidFill>
                 <a:latin typeface="微软雅黑"/>
                 <a:ea typeface="微软雅黑"/>
@@ -10933,67 +9061,37 @@
               </a:defRPr>
             </a:pPr>
             <a:r>
-              <a:rPr sz="2200" b="0">
-                <a:solidFill>
-                  <a:srgbClr val="2E7D5B"/>
+              <a:rPr sz="1100" b="0">
+                <a:solidFill>
+                  <a:srgbClr val="667684"/>
                 </a:solidFill>
                 <a:latin typeface="微软雅黑"/>
                 <a:ea typeface="微软雅黑"/>
                 <a:cs typeface="微软雅黑"/>
               </a:rPr>
-              <a:t>H1 与替代有不同结果</a:t>
-            </a:r>
-          </a:p>
-        </p:txBody>
-      </p:sp>
-      <p:sp>
-        <p:nvSpPr>
-          <p:cNvPr id="12" name="exit-r1">
-            <a:extLst xmlns:a="http://schemas.openxmlformats.org/drawingml/2006/main">
-              <a:ext uri="{FF2B5EF4-FFF2-40B4-BE49-F238E27FC236}">
-                <a16:creationId xmlns:a16="http://schemas.microsoft.com/office/drawing/2014/main" id="{EFE59E98-760F-4BF4-AA1C-68CD546C06C5}"/>
-              </a:ext>
-            </a:extLst>
-          </p:cNvPr>
-          <p:cNvSpPr>
-            <a:spLocks xmlns:a="http://schemas.openxmlformats.org/drawingml/2006/main" noGrp="1"/>
-          </p:cNvSpPr>
-          <p:nvPr/>
-        </p:nvSpPr>
-        <p:spPr>
-          <a:xfrm xmlns:a="http://schemas.openxmlformats.org/drawingml/2006/main">
-            <a:off x="1143000" y="3600450"/>
-            <a:ext cx="6858000" cy="14288"/>
-          </a:xfrm>
-          <a:prstGeom xmlns:a="http://schemas.openxmlformats.org/drawingml/2006/main" prst="rect">
-            <a:avLst/>
-          </a:prstGeom>
-          <a:solidFill xmlns:a="http://schemas.openxmlformats.org/drawingml/2006/main">
-            <a:srgbClr val="CDD5DB"/>
-          </a:solidFill>
-          <a:ln xmlns:a="http://schemas.openxmlformats.org/drawingml/2006/main" w="0">
-            <a:noFill/>
-          </a:ln>
-        </p:spPr>
-      </p:sp>
-      <p:sp>
-        <p:nvSpPr>
-          <p:cNvPr id="13" name="exit-n2">
-            <a:extLst xmlns:a="http://schemas.openxmlformats.org/drawingml/2006/main">
-              <a:ext uri="{FF2B5EF4-FFF2-40B4-BE49-F238E27FC236}">
-                <a16:creationId xmlns:a16="http://schemas.microsoft.com/office/drawing/2014/main" id="{ECBFDE2F-A845-41AF-A7AB-069DB5526959}"/>
-              </a:ext>
-            </a:extLst>
-          </p:cNvPr>
-          <p:cNvSpPr>
-            <a:spLocks xmlns:a="http://schemas.openxmlformats.org/drawingml/2006/main" noGrp="1"/>
-          </p:cNvSpPr>
-          <p:nvPr/>
-        </p:nvSpPr>
-        <p:spPr>
-          <a:xfrm xmlns:a="http://schemas.openxmlformats.org/drawingml/2006/main">
-            <a:off x="1143000" y="3657600"/>
-            <a:ext cx="476250" cy="381000"/>
+              <a:t>来源：本课判断任务与讲义；构造材料及真实来源按材料包标识</a:t>
+            </a:r>
+          </a:p>
+        </p:txBody>
+      </p:sp>
+      <p:sp>
+        <p:nvSpPr>
+          <p:cNvPr id="6" name="judgment-page">
+            <a:extLst xmlns:a="http://schemas.openxmlformats.org/drawingml/2006/main">
+              <a:ext uri="{FF2B5EF4-FFF2-40B4-BE49-F238E27FC236}">
+                <a16:creationId xmlns:a16="http://schemas.microsoft.com/office/drawing/2014/main" id="{FDB21575-D25C-4F3D-9636-9F90CEBF8C46}"/>
+              </a:ext>
+            </a:extLst>
+          </p:cNvPr>
+          <p:cNvSpPr>
+            <a:spLocks xmlns:a="http://schemas.openxmlformats.org/drawingml/2006/main" noGrp="1"/>
+          </p:cNvSpPr>
+          <p:nvPr/>
+        </p:nvSpPr>
+        <p:spPr>
+          <a:xfrm xmlns:a="http://schemas.openxmlformats.org/drawingml/2006/main">
+            <a:off x="11715750" y="6562725"/>
+            <a:ext cx="238125" cy="171450"/>
           </a:xfrm>
           <a:prstGeom xmlns:a="http://schemas.openxmlformats.org/drawingml/2006/main" prst="rect">
             <a:avLst/>
@@ -11004,17 +9102,24 @@
           </a:ln>
         </p:spPr>
         <p:txBody>
-          <a:bodyPr xmlns:a="http://schemas.openxmlformats.org/drawingml/2006/main" lIns="0" tIns="0" rIns="0" bIns="0" anchor="ctr"/>
-          <a:lstStyle xmlns:a="http://schemas.openxmlformats.org/drawingml/2006/main"/>
+          <a:bodyPr xmlns:a="http://schemas.openxmlformats.org/drawingml/2006/main" lIns="0" tIns="0" rIns="0" bIns="0" anchor="t"/>
+          <a:lstStyle xmlns:a="http://schemas.openxmlformats.org/drawingml/2006/main">
+            <a:defPPr algn="l">
+              <a:defRPr sz="900" b="0">
+                <a:solidFill>
+                  <a:srgbClr val="A5A5A5"/>
+                </a:solidFill>
+                <a:latin typeface="微软雅黑"/>
+                <a:ea typeface="微软雅黑"/>
+                <a:cs typeface="微软雅黑"/>
+              </a:defRPr>
+            </a:defPPr>
+          </a:lstStyle>
           <a:p xmlns:a="http://schemas.openxmlformats.org/drawingml/2006/main">
             <a:pPr algn="l">
-              <a:lnSpc>
-                <a:spcPct val="118000"/>
-              </a:lnSpc>
-              <a:buNone/>
-              <a:defRPr sz="1800" b="1">
-                <a:solidFill>
-                  <a:srgbClr val="2E7D5B"/>
+              <a:defRPr sz="900" b="0">
+                <a:solidFill>
+                  <a:srgbClr val="A5A5A5"/>
                 </a:solidFill>
                 <a:latin typeface="微软雅黑"/>
                 <a:ea typeface="微软雅黑"/>
@@ -11022,422 +9127,15 @@
               </a:defRPr>
             </a:pPr>
             <a:r>
-              <a:rPr sz="1800" b="1">
-                <a:solidFill>
-                  <a:srgbClr val="2E7D5B"/>
+              <a:rPr sz="900" b="0">
+                <a:solidFill>
+                  <a:srgbClr val="A5A5A5"/>
                 </a:solidFill>
                 <a:latin typeface="微软雅黑"/>
                 <a:ea typeface="微软雅黑"/>
                 <a:cs typeface="微软雅黑"/>
               </a:rPr>
-              <a:t>03</a:t>
-            </a:r>
-          </a:p>
-        </p:txBody>
-      </p:sp>
-      <p:sp>
-        <p:nvSpPr>
-          <p:cNvPr id="14" name="exit-t2">
-            <a:extLst xmlns:a="http://schemas.openxmlformats.org/drawingml/2006/main">
-              <a:ext uri="{FF2B5EF4-FFF2-40B4-BE49-F238E27FC236}">
-                <a16:creationId xmlns:a16="http://schemas.microsoft.com/office/drawing/2014/main" id="{A68B4F33-36FA-46BD-B957-054F1CA23A07}"/>
-              </a:ext>
-            </a:extLst>
-          </p:cNvPr>
-          <p:cNvSpPr>
-            <a:spLocks xmlns:a="http://schemas.openxmlformats.org/drawingml/2006/main" noGrp="1"/>
-          </p:cNvSpPr>
-          <p:nvPr/>
-        </p:nvSpPr>
-        <p:spPr>
-          <a:xfrm xmlns:a="http://schemas.openxmlformats.org/drawingml/2006/main">
-            <a:off x="1695450" y="3657600"/>
-            <a:ext cx="6305550" cy="495300"/>
-          </a:xfrm>
-          <a:prstGeom xmlns:a="http://schemas.openxmlformats.org/drawingml/2006/main" prst="rect">
-            <a:avLst/>
-          </a:prstGeom>
-          <a:noFill xmlns:a="http://schemas.openxmlformats.org/drawingml/2006/main"/>
-          <a:ln xmlns:a="http://schemas.openxmlformats.org/drawingml/2006/main" w="0">
-            <a:noFill/>
-          </a:ln>
-        </p:spPr>
-        <p:txBody>
-          <a:bodyPr xmlns:a="http://schemas.openxmlformats.org/drawingml/2006/main" lIns="0" tIns="0" rIns="0" bIns="0" anchor="ctr"/>
-          <a:lstStyle xmlns:a="http://schemas.openxmlformats.org/drawingml/2006/main"/>
-          <a:p xmlns:a="http://schemas.openxmlformats.org/drawingml/2006/main">
-            <a:pPr algn="l">
-              <a:lnSpc>
-                <a:spcPct val="118000"/>
-              </a:lnSpc>
-              <a:buNone/>
-              <a:defRPr sz="2200" b="0">
-                <a:solidFill>
-                  <a:srgbClr val="2E7D5B"/>
-                </a:solidFill>
-                <a:latin typeface="微软雅黑"/>
-                <a:ea typeface="微软雅黑"/>
-                <a:cs typeface="微软雅黑"/>
-              </a:defRPr>
-            </a:pPr>
-            <a:r>
-              <a:rPr sz="2200" b="0">
-                <a:solidFill>
-                  <a:srgbClr val="2E7D5B"/>
-                </a:solidFill>
-                <a:latin typeface="微软雅黑"/>
-                <a:ea typeface="微软雅黑"/>
-                <a:cs typeface="微软雅黑"/>
-              </a:rPr>
-              <a:t>判断已当场落盘</a:t>
-            </a:r>
-          </a:p>
-        </p:txBody>
-      </p:sp>
-      <p:sp>
-        <p:nvSpPr>
-          <p:cNvPr id="15" name="exit-r2">
-            <a:extLst xmlns:a="http://schemas.openxmlformats.org/drawingml/2006/main">
-              <a:ext uri="{FF2B5EF4-FFF2-40B4-BE49-F238E27FC236}">
-                <a16:creationId xmlns:a16="http://schemas.microsoft.com/office/drawing/2014/main" id="{E569BEF2-6B14-457C-86AE-CA0D0CC91409}"/>
-              </a:ext>
-            </a:extLst>
-          </p:cNvPr>
-          <p:cNvSpPr>
-            <a:spLocks xmlns:a="http://schemas.openxmlformats.org/drawingml/2006/main" noGrp="1"/>
-          </p:cNvSpPr>
-          <p:nvPr/>
-        </p:nvSpPr>
-        <p:spPr>
-          <a:xfrm xmlns:a="http://schemas.openxmlformats.org/drawingml/2006/main">
-            <a:off x="1143000" y="4191000"/>
-            <a:ext cx="6858000" cy="14288"/>
-          </a:xfrm>
-          <a:prstGeom xmlns:a="http://schemas.openxmlformats.org/drawingml/2006/main" prst="rect">
-            <a:avLst/>
-          </a:prstGeom>
-          <a:solidFill xmlns:a="http://schemas.openxmlformats.org/drawingml/2006/main">
-            <a:srgbClr val="CDD5DB"/>
-          </a:solidFill>
-          <a:ln xmlns:a="http://schemas.openxmlformats.org/drawingml/2006/main" w="0">
-            <a:noFill/>
-          </a:ln>
-        </p:spPr>
-      </p:sp>
-      <p:sp>
-        <p:nvSpPr>
-          <p:cNvPr id="16" name="exit-n3">
-            <a:extLst xmlns:a="http://schemas.openxmlformats.org/drawingml/2006/main">
-              <a:ext uri="{FF2B5EF4-FFF2-40B4-BE49-F238E27FC236}">
-                <a16:creationId xmlns:a16="http://schemas.microsoft.com/office/drawing/2014/main" id="{D93A9375-D17F-4856-B7E1-6015A2EB6568}"/>
-              </a:ext>
-            </a:extLst>
-          </p:cNvPr>
-          <p:cNvSpPr>
-            <a:spLocks xmlns:a="http://schemas.openxmlformats.org/drawingml/2006/main" noGrp="1"/>
-          </p:cNvSpPr>
-          <p:nvPr/>
-        </p:nvSpPr>
-        <p:spPr>
-          <a:xfrm xmlns:a="http://schemas.openxmlformats.org/drawingml/2006/main">
-            <a:off x="1143000" y="4248150"/>
-            <a:ext cx="476250" cy="381000"/>
-          </a:xfrm>
-          <a:prstGeom xmlns:a="http://schemas.openxmlformats.org/drawingml/2006/main" prst="rect">
-            <a:avLst/>
-          </a:prstGeom>
-          <a:noFill xmlns:a="http://schemas.openxmlformats.org/drawingml/2006/main"/>
-          <a:ln xmlns:a="http://schemas.openxmlformats.org/drawingml/2006/main" w="0">
-            <a:noFill/>
-          </a:ln>
-        </p:spPr>
-        <p:txBody>
-          <a:bodyPr xmlns:a="http://schemas.openxmlformats.org/drawingml/2006/main" lIns="0" tIns="0" rIns="0" bIns="0" anchor="ctr"/>
-          <a:lstStyle xmlns:a="http://schemas.openxmlformats.org/drawingml/2006/main"/>
-          <a:p xmlns:a="http://schemas.openxmlformats.org/drawingml/2006/main">
-            <a:pPr algn="l">
-              <a:lnSpc>
-                <a:spcPct val="118000"/>
-              </a:lnSpc>
-              <a:buNone/>
-              <a:defRPr sz="1800" b="1">
-                <a:solidFill>
-                  <a:srgbClr val="66727D"/>
-                </a:solidFill>
-                <a:latin typeface="微软雅黑"/>
-                <a:ea typeface="微软雅黑"/>
-                <a:cs typeface="微软雅黑"/>
-              </a:defRPr>
-            </a:pPr>
-            <a:r>
-              <a:rPr sz="1800" b="1">
-                <a:solidFill>
-                  <a:srgbClr val="66727D"/>
-                </a:solidFill>
-                <a:latin typeface="微软雅黑"/>
-                <a:ea typeface="微软雅黑"/>
-                <a:cs typeface="微软雅黑"/>
-              </a:rPr>
-              <a:t>04</a:t>
-            </a:r>
-          </a:p>
-        </p:txBody>
-      </p:sp>
-      <p:sp>
-        <p:nvSpPr>
-          <p:cNvPr id="17" name="exit-t3">
-            <a:extLst xmlns:a="http://schemas.openxmlformats.org/drawingml/2006/main">
-              <a:ext uri="{FF2B5EF4-FFF2-40B4-BE49-F238E27FC236}">
-                <a16:creationId xmlns:a16="http://schemas.microsoft.com/office/drawing/2014/main" id="{C714F7CC-13F2-4932-ACC4-2C6D2586CDB5}"/>
-              </a:ext>
-            </a:extLst>
-          </p:cNvPr>
-          <p:cNvSpPr>
-            <a:spLocks xmlns:a="http://schemas.openxmlformats.org/drawingml/2006/main" noGrp="1"/>
-          </p:cNvSpPr>
-          <p:nvPr/>
-        </p:nvSpPr>
-        <p:spPr>
-          <a:xfrm xmlns:a="http://schemas.openxmlformats.org/drawingml/2006/main">
-            <a:off x="1695450" y="4248150"/>
-            <a:ext cx="6305550" cy="495300"/>
-          </a:xfrm>
-          <a:prstGeom xmlns:a="http://schemas.openxmlformats.org/drawingml/2006/main" prst="rect">
-            <a:avLst/>
-          </a:prstGeom>
-          <a:noFill xmlns:a="http://schemas.openxmlformats.org/drawingml/2006/main"/>
-          <a:ln xmlns:a="http://schemas.openxmlformats.org/drawingml/2006/main" w="0">
-            <a:noFill/>
-          </a:ln>
-        </p:spPr>
-        <p:txBody>
-          <a:bodyPr xmlns:a="http://schemas.openxmlformats.org/drawingml/2006/main" lIns="0" tIns="0" rIns="0" bIns="0" anchor="ctr"/>
-          <a:lstStyle xmlns:a="http://schemas.openxmlformats.org/drawingml/2006/main"/>
-          <a:p xmlns:a="http://schemas.openxmlformats.org/drawingml/2006/main">
-            <a:pPr algn="l">
-              <a:lnSpc>
-                <a:spcPct val="118000"/>
-              </a:lnSpc>
-              <a:buNone/>
-              <a:defRPr sz="2200" b="0">
-                <a:solidFill>
-                  <a:srgbClr val="27333D"/>
-                </a:solidFill>
-                <a:latin typeface="微软雅黑"/>
-                <a:ea typeface="微软雅黑"/>
-                <a:cs typeface="微软雅黑"/>
-              </a:defRPr>
-            </a:pPr>
-            <a:r>
-              <a:rPr sz="2200" b="0">
-                <a:solidFill>
-                  <a:srgbClr val="27333D"/>
-                </a:solidFill>
-                <a:latin typeface="微软雅黑"/>
-                <a:ea typeface="微软雅黑"/>
-                <a:cs typeface="微软雅黑"/>
-              </a:rPr>
-              <a:t>当前最大未决项</a:t>
-            </a:r>
-          </a:p>
-        </p:txBody>
-      </p:sp>
-      <p:sp>
-        <p:nvSpPr>
-          <p:cNvPr id="18" name="exit-r3">
-            <a:extLst xmlns:a="http://schemas.openxmlformats.org/drawingml/2006/main">
-              <a:ext uri="{FF2B5EF4-FFF2-40B4-BE49-F238E27FC236}">
-                <a16:creationId xmlns:a16="http://schemas.microsoft.com/office/drawing/2014/main" id="{C6E67A47-1557-40E6-9E3F-97B9B000F051}"/>
-              </a:ext>
-            </a:extLst>
-          </p:cNvPr>
-          <p:cNvSpPr>
-            <a:spLocks xmlns:a="http://schemas.openxmlformats.org/drawingml/2006/main" noGrp="1"/>
-          </p:cNvSpPr>
-          <p:nvPr/>
-        </p:nvSpPr>
-        <p:spPr>
-          <a:xfrm xmlns:a="http://schemas.openxmlformats.org/drawingml/2006/main">
-            <a:off x="1143000" y="4781550"/>
-            <a:ext cx="6858000" cy="14288"/>
-          </a:xfrm>
-          <a:prstGeom xmlns:a="http://schemas.openxmlformats.org/drawingml/2006/main" prst="rect">
-            <a:avLst/>
-          </a:prstGeom>
-          <a:solidFill xmlns:a="http://schemas.openxmlformats.org/drawingml/2006/main">
-            <a:srgbClr val="CDD5DB"/>
-          </a:solidFill>
-          <a:ln xmlns:a="http://schemas.openxmlformats.org/drawingml/2006/main" w="0">
-            <a:noFill/>
-          </a:ln>
-        </p:spPr>
-      </p:sp>
-      <p:sp>
-        <p:nvSpPr>
-          <p:cNvPr id="19" name="next-bg">
-            <a:extLst xmlns:a="http://schemas.openxmlformats.org/drawingml/2006/main">
-              <a:ext uri="{FF2B5EF4-FFF2-40B4-BE49-F238E27FC236}">
-                <a16:creationId xmlns:a16="http://schemas.microsoft.com/office/drawing/2014/main" id="{3CAB562A-B422-441D-9943-452FB3F0B34A}"/>
-              </a:ext>
-            </a:extLst>
-          </p:cNvPr>
-          <p:cNvSpPr>
-            <a:spLocks xmlns:a="http://schemas.openxmlformats.org/drawingml/2006/main" noGrp="1"/>
-          </p:cNvSpPr>
-          <p:nvPr/>
-        </p:nvSpPr>
-        <p:spPr>
-          <a:xfrm xmlns:a="http://schemas.openxmlformats.org/drawingml/2006/main">
-            <a:off x="8286750" y="2667000"/>
-            <a:ext cx="3143250" cy="1809750"/>
-          </a:xfrm>
-          <a:prstGeom xmlns:a="http://schemas.openxmlformats.org/drawingml/2006/main" prst="rect">
-            <a:avLst/>
-          </a:prstGeom>
-          <a:solidFill xmlns:a="http://schemas.openxmlformats.org/drawingml/2006/main">
-            <a:srgbClr val="F4F6F8"/>
-          </a:solidFill>
-          <a:ln xmlns:a="http://schemas.openxmlformats.org/drawingml/2006/main" w="0">
-            <a:noFill/>
-          </a:ln>
-        </p:spPr>
-      </p:sp>
-      <p:sp>
-        <p:nvSpPr>
-          <p:cNvPr id="20" name="next">
-            <a:extLst xmlns:a="http://schemas.openxmlformats.org/drawingml/2006/main">
-              <a:ext uri="{FF2B5EF4-FFF2-40B4-BE49-F238E27FC236}">
-                <a16:creationId xmlns:a16="http://schemas.microsoft.com/office/drawing/2014/main" id="{8A1F1CEF-9CC2-4A8A-8533-BFA107A56320}"/>
-              </a:ext>
-            </a:extLst>
-          </p:cNvPr>
-          <p:cNvSpPr>
-            <a:spLocks xmlns:a="http://schemas.openxmlformats.org/drawingml/2006/main" noGrp="1"/>
-          </p:cNvSpPr>
-          <p:nvPr/>
-        </p:nvSpPr>
-        <p:spPr>
-          <a:xfrm xmlns:a="http://schemas.openxmlformats.org/drawingml/2006/main">
-            <a:off x="8439150" y="2762250"/>
-            <a:ext cx="2838450" cy="1619250"/>
-          </a:xfrm>
-          <a:prstGeom xmlns:a="http://schemas.openxmlformats.org/drawingml/2006/main" prst="rect">
-            <a:avLst/>
-          </a:prstGeom>
-          <a:noFill xmlns:a="http://schemas.openxmlformats.org/drawingml/2006/main"/>
-          <a:ln xmlns:a="http://schemas.openxmlformats.org/drawingml/2006/main" w="0">
-            <a:noFill/>
-          </a:ln>
-        </p:spPr>
-        <p:txBody>
-          <a:bodyPr xmlns:a="http://schemas.openxmlformats.org/drawingml/2006/main" lIns="0" tIns="0" rIns="0" bIns="0" anchor="ctr"/>
-          <a:lstStyle xmlns:a="http://schemas.openxmlformats.org/drawingml/2006/main"/>
-          <a:p xmlns:a="http://schemas.openxmlformats.org/drawingml/2006/main">
-            <a:pPr algn="ctr">
-              <a:lnSpc>
-                <a:spcPct val="118000"/>
-              </a:lnSpc>
-              <a:buNone/>
-              <a:defRPr sz="2000" b="0">
-                <a:solidFill>
-                  <a:srgbClr val="1F4D78"/>
-                </a:solidFill>
-                <a:latin typeface="微软雅黑"/>
-                <a:ea typeface="微软雅黑"/>
-                <a:cs typeface="微软雅黑"/>
-              </a:defRPr>
-            </a:pPr>
-            <a:r>
-              <a:rPr sz="2000" b="0">
-                <a:solidFill>
-                  <a:srgbClr val="1F4D78"/>
-                </a:solidFill>
-                <a:latin typeface="微软雅黑"/>
-                <a:ea typeface="微软雅黑"/>
-                <a:cs typeface="微软雅黑"/>
-              </a:rPr>
-              <a:t>第 8 课输入</a:t>
-            </a:r>
-          </a:p>
-          <a:p xmlns:a="http://schemas.openxmlformats.org/drawingml/2006/main">
-            <a:pPr algn="ctr">
-              <a:lnSpc>
-                <a:spcPct val="118000"/>
-              </a:lnSpc>
-              <a:buNone/>
-              <a:defRPr sz="2000" b="0">
-                <a:solidFill>
-                  <a:srgbClr val="1F4D78"/>
-                </a:solidFill>
-                <a:latin typeface="微软雅黑"/>
-                <a:ea typeface="微软雅黑"/>
-                <a:cs typeface="微软雅黑"/>
-              </a:defRPr>
-            </a:pPr>
-            <a:r>
-              <a:rPr sz="2000" b="0">
-                <a:solidFill>
-                  <a:srgbClr val="1F4D78"/>
-                </a:solidFill>
-                <a:latin typeface="微软雅黑"/>
-                <a:ea typeface="微软雅黑"/>
-                <a:cs typeface="微软雅黑"/>
-              </a:rPr>
-              <a:t>问题 · 证据 · 机制</a:t>
-            </a:r>
-          </a:p>
-          <a:p xmlns:a="http://schemas.openxmlformats.org/drawingml/2006/main">
-            <a:pPr algn="ctr">
-              <a:lnSpc>
-                <a:spcPct val="118000"/>
-              </a:lnSpc>
-              <a:buNone/>
-              <a:defRPr sz="2000" b="0">
-                <a:solidFill>
-                  <a:srgbClr val="1F4D78"/>
-                </a:solidFill>
-                <a:latin typeface="微软雅黑"/>
-                <a:ea typeface="微软雅黑"/>
-                <a:cs typeface="微软雅黑"/>
-              </a:defRPr>
-            </a:pPr>
-            <a:r>
-              <a:rPr sz="2000" b="0">
-                <a:solidFill>
-                  <a:srgbClr val="1F4D78"/>
-                </a:solidFill>
-                <a:latin typeface="微软雅黑"/>
-                <a:ea typeface="微软雅黑"/>
-                <a:cs typeface="微软雅黑"/>
-              </a:rPr>
-              <a:t>最小验证</a:t>
-            </a:r>
-          </a:p>
-          <a:p xmlns:a="http://schemas.openxmlformats.org/drawingml/2006/main">
-            <a:pPr algn="ctr">
-              <a:lnSpc>
-                <a:spcPct val="118000"/>
-              </a:lnSpc>
-              <a:buNone/>
-              <a:defRPr sz="2000" b="0">
-                <a:solidFill>
-                  <a:srgbClr val="1F4D78"/>
-                </a:solidFill>
-                <a:latin typeface="微软雅黑"/>
-                <a:ea typeface="微软雅黑"/>
-                <a:cs typeface="微软雅黑"/>
-              </a:defRPr>
-            </a:pPr>
-            <a:r>
-              <a:rPr sz="2000" b="0">
-                <a:solidFill>
-                  <a:srgbClr val="1F4D78"/>
-                </a:solidFill>
-                <a:latin typeface="微软雅黑"/>
-                <a:ea typeface="微软雅黑"/>
-                <a:cs typeface="微软雅黑"/>
-              </a:rPr>
-              <a:t>最大风险</a:t>
+              <a:t>17</a:t>
             </a:r>
           </a:p>
         </p:txBody>
@@ -12124,127 +9822,22 @@
       </p:grpSpPr>
       <p:sp>
         <p:nvSpPr>
-          <p:cNvPr id="4" name="Text Placeholder 3">
-            <a:extLst xmlns:a="http://schemas.openxmlformats.org/drawingml/2006/main">
-              <a:ext uri="{FF2B5EF4-FFF2-40B4-BE49-F238E27FC236}">
-                <a16:creationId xmlns:a16="http://schemas.microsoft.com/office/drawing/2014/main" id="{4D941B40-7A0A-534E-3563-CA11753C8E3F}"/>
-              </a:ext>
-            </a:extLst>
-          </p:cNvPr>
-          <p:cNvSpPr>
-            <a:spLocks xmlns:a="http://schemas.openxmlformats.org/drawingml/2006/main" noGrp="1"/>
-          </p:cNvSpPr>
-          <p:nvPr>
-            <p:ph type="body" idx="14"/>
-          </p:nvPr>
-        </p:nvSpPr>
-        <p:spPr>
-          <a:xfrm xmlns:a="http://schemas.openxmlformats.org/drawingml/2006/main">
-            <a:off x="1028700" y="57150"/>
-            <a:ext cx="10668000" cy="571500"/>
-          </a:xfrm>
-        </p:spPr>
-        <p:txBody>
-          <a:bodyPr xmlns:a="http://schemas.openxmlformats.org/drawingml/2006/main" lIns="0" tIns="0" rIns="0" bIns="0" anchor="ctr"/>
-          <a:lstStyle xmlns:a="http://schemas.openxmlformats.org/drawingml/2006/main"/>
-          <a:p xmlns:a="http://schemas.openxmlformats.org/drawingml/2006/main">
-            <a:pPr algn="l">
-              <a:lnSpc>
-                <a:spcPct val="118000"/>
-              </a:lnSpc>
-              <a:buNone/>
-            </a:pPr>
-            <a:r>
-              <a:rPr sz="3000" b="1">
-                <a:solidFill>
-                  <a:srgbClr val="FFFFFF"/>
-                </a:solidFill>
-                <a:latin typeface="微软雅黑"/>
-                <a:ea typeface="微软雅黑"/>
-                <a:cs typeface="微软雅黑"/>
-              </a:rPr>
-              <a:t>本课只完成机制—判断—映射的最小闭环</a:t>
-            </a:r>
-            <a:endParaRPr/>
-          </a:p>
-        </p:txBody>
-      </p:sp>
-      <p:sp>
-        <p:nvSpPr>
-          <p:cNvPr id="5" name="Slide Number Placeholder 4">
-            <a:extLst xmlns:a="http://schemas.openxmlformats.org/drawingml/2006/main">
-              <a:ext uri="{FF2B5EF4-FFF2-40B4-BE49-F238E27FC236}">
-                <a16:creationId xmlns:a16="http://schemas.microsoft.com/office/drawing/2014/main" id="{EBA5909F-738E-F60C-BE8C-B3F1D94548E5}"/>
-              </a:ext>
-            </a:extLst>
-          </p:cNvPr>
-          <p:cNvSpPr>
-            <a:spLocks xmlns:a="http://schemas.openxmlformats.org/drawingml/2006/main" noGrp="1"/>
-          </p:cNvSpPr>
-          <p:nvPr>
-            <p:ph type="sldNum" idx="10"/>
-          </p:nvPr>
-        </p:nvSpPr>
-        <p:spPr/>
-        <p:txBody>
-          <a:bodyPr xmlns:a="http://schemas.openxmlformats.org/drawingml/2006/main"/>
-          <a:lstStyle xmlns:a="http://schemas.openxmlformats.org/drawingml/2006/main"/>
-          <a:p xmlns:a="http://schemas.openxmlformats.org/drawingml/2006/main">
-            <a:fld id="{202359C0-8A7A-196E-DD58-8E6569619F09}" type="slidenum">
-              <a:t>3</a:t>
-            </a:fld>
-            <a:endParaRPr/>
-          </a:p>
-        </p:txBody>
-      </p:sp>
-      <p:sp>
-        <p:nvSpPr>
-          <p:cNvPr id="6" name="route-0-bg">
-            <a:extLst xmlns:a="http://schemas.openxmlformats.org/drawingml/2006/main">
-              <a:ext uri="{FF2B5EF4-FFF2-40B4-BE49-F238E27FC236}">
-                <a16:creationId xmlns:a16="http://schemas.microsoft.com/office/drawing/2014/main" id="{2BE853D1-3B8C-49C2-BCE0-B2B317A5DCA8}"/>
-              </a:ext>
-            </a:extLst>
-          </p:cNvPr>
-          <p:cNvSpPr>
-            <a:spLocks xmlns:a="http://schemas.openxmlformats.org/drawingml/2006/main" noGrp="1"/>
-          </p:cNvSpPr>
-          <p:nvPr/>
-        </p:nvSpPr>
-        <p:spPr>
-          <a:xfrm xmlns:a="http://schemas.openxmlformats.org/drawingml/2006/main">
-            <a:off x="609600" y="1714500"/>
-            <a:ext cx="2486025" cy="952500"/>
-          </a:xfrm>
-          <a:prstGeom xmlns:a="http://schemas.openxmlformats.org/drawingml/2006/main" prst="rect">
-            <a:avLst/>
-          </a:prstGeom>
-          <a:solidFill xmlns:a="http://schemas.openxmlformats.org/drawingml/2006/main">
-            <a:srgbClr val="EDF5F0"/>
-          </a:solidFill>
-          <a:ln xmlns:a="http://schemas.openxmlformats.org/drawingml/2006/main" w="0">
-            <a:noFill/>
-          </a:ln>
-        </p:spPr>
-      </p:sp>
-      <p:sp>
-        <p:nvSpPr>
-          <p:cNvPr id="7" name="route-0">
-            <a:extLst xmlns:a="http://schemas.openxmlformats.org/drawingml/2006/main">
-              <a:ext uri="{FF2B5EF4-FFF2-40B4-BE49-F238E27FC236}">
-                <a16:creationId xmlns:a16="http://schemas.microsoft.com/office/drawing/2014/main" id="{43C57AAC-C0BC-49B4-B1E9-65CF4D10AF4F}"/>
-              </a:ext>
-            </a:extLst>
-          </p:cNvPr>
-          <p:cNvSpPr>
-            <a:spLocks xmlns:a="http://schemas.openxmlformats.org/drawingml/2006/main" noGrp="1"/>
-          </p:cNvSpPr>
-          <p:nvPr/>
-        </p:nvSpPr>
-        <p:spPr>
-          <a:xfrm xmlns:a="http://schemas.openxmlformats.org/drawingml/2006/main">
-            <a:off x="762000" y="1809750"/>
-            <a:ext cx="2181225" cy="762000"/>
+          <p:cNvPr id="7" name="judgment-title">
+            <a:extLst xmlns:a="http://schemas.openxmlformats.org/drawingml/2006/main">
+              <a:ext uri="{FF2B5EF4-FFF2-40B4-BE49-F238E27FC236}">
+                <a16:creationId xmlns:a16="http://schemas.microsoft.com/office/drawing/2014/main" id="{F9512899-6C0F-495D-8DA8-6F728D4A02C3}"/>
+              </a:ext>
+            </a:extLst>
+          </p:cNvPr>
+          <p:cNvSpPr>
+            <a:spLocks xmlns:a="http://schemas.openxmlformats.org/drawingml/2006/main" noGrp="1"/>
+          </p:cNvSpPr>
+          <p:nvPr/>
+        </p:nvSpPr>
+        <p:spPr>
+          <a:xfrm xmlns:a="http://schemas.openxmlformats.org/drawingml/2006/main">
+            <a:off x="1028700" y="76200"/>
+            <a:ext cx="10687050" cy="514350"/>
           </a:xfrm>
           <a:prstGeom xmlns:a="http://schemas.openxmlformats.org/drawingml/2006/main" prst="rect">
             <a:avLst/>
@@ -12255,17 +9848,24 @@
           </a:ln>
         </p:spPr>
         <p:txBody>
-          <a:bodyPr xmlns:a="http://schemas.openxmlformats.org/drawingml/2006/main" lIns="0" tIns="0" rIns="0" bIns="0" anchor="ctr"/>
-          <a:lstStyle xmlns:a="http://schemas.openxmlformats.org/drawingml/2006/main"/>
-          <a:p xmlns:a="http://schemas.openxmlformats.org/drawingml/2006/main">
-            <a:pPr algn="ctr">
-              <a:lnSpc>
-                <a:spcPct val="118000"/>
-              </a:lnSpc>
-              <a:buNone/>
-              <a:defRPr sz="2200" b="1">
-                <a:solidFill>
-                  <a:srgbClr val="1F4D78"/>
+          <a:bodyPr xmlns:a="http://schemas.openxmlformats.org/drawingml/2006/main" lIns="0" tIns="0" rIns="0" bIns="0" anchor="t"/>
+          <a:lstStyle xmlns:a="http://schemas.openxmlformats.org/drawingml/2006/main">
+            <a:defPPr algn="l">
+              <a:defRPr sz="3000" b="1">
+                <a:solidFill>
+                  <a:srgbClr val="FFFFFF"/>
+                </a:solidFill>
+                <a:latin typeface="微软雅黑"/>
+                <a:ea typeface="微软雅黑"/>
+                <a:cs typeface="微软雅黑"/>
+              </a:defRPr>
+            </a:defPPr>
+          </a:lstStyle>
+          <a:p xmlns:a="http://schemas.openxmlformats.org/drawingml/2006/main">
+            <a:pPr algn="l">
+              <a:defRPr sz="3000" b="1">
+                <a:solidFill>
+                  <a:srgbClr val="FFFFFF"/>
                 </a:solidFill>
                 <a:latin typeface="微软雅黑"/>
                 <a:ea typeface="微软雅黑"/>
@@ -12273,37 +9873,37 @@
               </a:defRPr>
             </a:pPr>
             <a:r>
-              <a:rPr sz="2200" b="1">
-                <a:solidFill>
-                  <a:srgbClr val="1F4D78"/>
+              <a:rPr sz="3000" b="1">
+                <a:solidFill>
+                  <a:srgbClr val="FFFFFF"/>
                 </a:solidFill>
                 <a:latin typeface="微软雅黑"/>
                 <a:ea typeface="微软雅黑"/>
                 <a:cs typeface="微软雅黑"/>
               </a:rPr>
-              <a:t>主机制</a:t>
-            </a:r>
-          </a:p>
-        </p:txBody>
-      </p:sp>
-      <p:sp>
-        <p:nvSpPr>
-          <p:cNvPr id="8" name="route-a0">
-            <a:extLst xmlns:a="http://schemas.openxmlformats.org/drawingml/2006/main">
-              <a:ext uri="{FF2B5EF4-FFF2-40B4-BE49-F238E27FC236}">
-                <a16:creationId xmlns:a16="http://schemas.microsoft.com/office/drawing/2014/main" id="{2C2793E9-2657-45A7-98FD-7DD811F6775A}"/>
-              </a:ext>
-            </a:extLst>
-          </p:cNvPr>
-          <p:cNvSpPr>
-            <a:spLocks xmlns:a="http://schemas.openxmlformats.org/drawingml/2006/main" noGrp="1"/>
-          </p:cNvSpPr>
-          <p:nvPr/>
-        </p:nvSpPr>
-        <p:spPr>
-          <a:xfrm xmlns:a="http://schemas.openxmlformats.org/drawingml/2006/main">
-            <a:off x="3095625" y="2009775"/>
-            <a:ext cx="304800" cy="438150"/>
+              <a:t>哪项实验能区分解释</a:t>
+            </a:r>
+          </a:p>
+        </p:txBody>
+      </p:sp>
+      <p:sp>
+        <p:nvSpPr>
+          <p:cNvPr id="2" name="judgment-body-0">
+            <a:extLst xmlns:a="http://schemas.openxmlformats.org/drawingml/2006/main">
+              <a:ext uri="{FF2B5EF4-FFF2-40B4-BE49-F238E27FC236}">
+                <a16:creationId xmlns:a16="http://schemas.microsoft.com/office/drawing/2014/main" id="{3B49954C-23C0-4D85-BA03-5456993643CB}"/>
+              </a:ext>
+            </a:extLst>
+          </p:cNvPr>
+          <p:cNvSpPr>
+            <a:spLocks xmlns:a="http://schemas.openxmlformats.org/drawingml/2006/main" noGrp="1"/>
+          </p:cNvSpPr>
+          <p:nvPr/>
+        </p:nvSpPr>
+        <p:spPr>
+          <a:xfrm xmlns:a="http://schemas.openxmlformats.org/drawingml/2006/main">
+            <a:off x="666750" y="1066800"/>
+            <a:ext cx="10858500" cy="1009650"/>
           </a:xfrm>
           <a:prstGeom xmlns:a="http://schemas.openxmlformats.org/drawingml/2006/main" prst="rect">
             <a:avLst/>
@@ -12314,17 +9914,24 @@
           </a:ln>
         </p:spPr>
         <p:txBody>
-          <a:bodyPr xmlns:a="http://schemas.openxmlformats.org/drawingml/2006/main" lIns="0" tIns="0" rIns="0" bIns="0" anchor="ctr"/>
-          <a:lstStyle xmlns:a="http://schemas.openxmlformats.org/drawingml/2006/main"/>
-          <a:p xmlns:a="http://schemas.openxmlformats.org/drawingml/2006/main">
-            <a:pPr algn="ctr">
-              <a:lnSpc>
-                <a:spcPct val="118000"/>
-              </a:lnSpc>
-              <a:buNone/>
-              <a:defRPr sz="2800" b="0">
-                <a:solidFill>
-                  <a:srgbClr val="1F4D78"/>
+          <a:bodyPr xmlns:a="http://schemas.openxmlformats.org/drawingml/2006/main" lIns="0" tIns="0" rIns="0" bIns="0" anchor="t"/>
+          <a:lstStyle xmlns:a="http://schemas.openxmlformats.org/drawingml/2006/main">
+            <a:defPPr algn="l">
+              <a:defRPr sz="2400" b="0">
+                <a:solidFill>
+                  <a:srgbClr val="263746"/>
+                </a:solidFill>
+                <a:latin typeface="微软雅黑"/>
+                <a:ea typeface="微软雅黑"/>
+                <a:cs typeface="微软雅黑"/>
+              </a:defRPr>
+            </a:defPPr>
+          </a:lstStyle>
+          <a:p xmlns:a="http://schemas.openxmlformats.org/drawingml/2006/main">
+            <a:pPr algn="l">
+              <a:defRPr sz="2400" b="0">
+                <a:solidFill>
+                  <a:srgbClr val="263746"/>
                 </a:solidFill>
                 <a:latin typeface="微软雅黑"/>
                 <a:ea typeface="微软雅黑"/>
@@ -12332,67 +9939,37 @@
               </a:defRPr>
             </a:pPr>
             <a:r>
-              <a:rPr sz="2800" b="0">
-                <a:solidFill>
-                  <a:srgbClr val="1F4D78"/>
+              <a:rPr sz="2400" b="0">
+                <a:solidFill>
+                  <a:srgbClr val="263746"/>
                 </a:solidFill>
                 <a:latin typeface="微软雅黑"/>
                 <a:ea typeface="微软雅黑"/>
                 <a:cs typeface="微软雅黑"/>
               </a:rPr>
-              <a:t>→</a:t>
-            </a:r>
-          </a:p>
-        </p:txBody>
-      </p:sp>
-      <p:sp>
-        <p:nvSpPr>
-          <p:cNvPr id="9" name="route-1-bg">
-            <a:extLst xmlns:a="http://schemas.openxmlformats.org/drawingml/2006/main">
-              <a:ext uri="{FF2B5EF4-FFF2-40B4-BE49-F238E27FC236}">
-                <a16:creationId xmlns:a16="http://schemas.microsoft.com/office/drawing/2014/main" id="{575D85F4-8A1D-4999-B011-85D373B1D147}"/>
-              </a:ext>
-            </a:extLst>
-          </p:cNvPr>
-          <p:cNvSpPr>
-            <a:spLocks xmlns:a="http://schemas.openxmlformats.org/drawingml/2006/main" noGrp="1"/>
-          </p:cNvSpPr>
-          <p:nvPr/>
-        </p:nvSpPr>
-        <p:spPr>
-          <a:xfrm xmlns:a="http://schemas.openxmlformats.org/drawingml/2006/main">
-            <a:off x="3400425" y="1714500"/>
-            <a:ext cx="2486025" cy="952500"/>
-          </a:xfrm>
-          <a:prstGeom xmlns:a="http://schemas.openxmlformats.org/drawingml/2006/main" prst="rect">
-            <a:avLst/>
-          </a:prstGeom>
-          <a:solidFill xmlns:a="http://schemas.openxmlformats.org/drawingml/2006/main">
-            <a:srgbClr val="F4F6F8"/>
-          </a:solidFill>
-          <a:ln xmlns:a="http://schemas.openxmlformats.org/drawingml/2006/main" w="0">
-            <a:noFill/>
-          </a:ln>
-        </p:spPr>
-      </p:sp>
-      <p:sp>
-        <p:nvSpPr>
-          <p:cNvPr id="10" name="route-1">
-            <a:extLst xmlns:a="http://schemas.openxmlformats.org/drawingml/2006/main">
-              <a:ext uri="{FF2B5EF4-FFF2-40B4-BE49-F238E27FC236}">
-                <a16:creationId xmlns:a16="http://schemas.microsoft.com/office/drawing/2014/main" id="{B23B4CA4-D0F5-409D-9997-4E2E0B9E42E3}"/>
-              </a:ext>
-            </a:extLst>
-          </p:cNvPr>
-          <p:cNvSpPr>
-            <a:spLocks xmlns:a="http://schemas.openxmlformats.org/drawingml/2006/main" noGrp="1"/>
-          </p:cNvSpPr>
-          <p:nvPr/>
-        </p:nvSpPr>
-        <p:spPr>
-          <a:xfrm xmlns:a="http://schemas.openxmlformats.org/drawingml/2006/main">
-            <a:off x="3552825" y="1809750"/>
-            <a:ext cx="2181225" cy="762000"/>
+              <a:t>观察：阅读卡遗漏较低；评分者看得到组别</a:t>
+            </a:r>
+          </a:p>
+        </p:txBody>
+      </p:sp>
+      <p:sp>
+        <p:nvSpPr>
+          <p:cNvPr id="3" name="judgment-body-1">
+            <a:extLst xmlns:a="http://schemas.openxmlformats.org/drawingml/2006/main">
+              <a:ext uri="{FF2B5EF4-FFF2-40B4-BE49-F238E27FC236}">
+                <a16:creationId xmlns:a16="http://schemas.microsoft.com/office/drawing/2014/main" id="{D618BD1E-5088-40AB-8675-78EFC224A88D}"/>
+              </a:ext>
+            </a:extLst>
+          </p:cNvPr>
+          <p:cNvSpPr>
+            <a:spLocks xmlns:a="http://schemas.openxmlformats.org/drawingml/2006/main" noGrp="1"/>
+          </p:cNvSpPr>
+          <p:nvPr/>
+        </p:nvSpPr>
+        <p:spPr>
+          <a:xfrm xmlns:a="http://schemas.openxmlformats.org/drawingml/2006/main">
+            <a:off x="666750" y="2238375"/>
+            <a:ext cx="10858500" cy="2076450"/>
           </a:xfrm>
           <a:prstGeom xmlns:a="http://schemas.openxmlformats.org/drawingml/2006/main" prst="rect">
             <a:avLst/>
@@ -12403,17 +9980,24 @@
           </a:ln>
         </p:spPr>
         <p:txBody>
-          <a:bodyPr xmlns:a="http://schemas.openxmlformats.org/drawingml/2006/main" lIns="0" tIns="0" rIns="0" bIns="0" anchor="ctr"/>
-          <a:lstStyle xmlns:a="http://schemas.openxmlformats.org/drawingml/2006/main"/>
-          <a:p xmlns:a="http://schemas.openxmlformats.org/drawingml/2006/main">
-            <a:pPr algn="ctr">
-              <a:lnSpc>
-                <a:spcPct val="118000"/>
-              </a:lnSpc>
-              <a:buNone/>
-              <a:defRPr sz="2200" b="0">
-                <a:solidFill>
-                  <a:srgbClr val="1F4D78"/>
+          <a:bodyPr xmlns:a="http://schemas.openxmlformats.org/drawingml/2006/main" lIns="0" tIns="0" rIns="0" bIns="0" anchor="t"/>
+          <a:lstStyle xmlns:a="http://schemas.openxmlformats.org/drawingml/2006/main">
+            <a:defPPr algn="l">
+              <a:defRPr sz="2400" b="0">
+                <a:solidFill>
+                  <a:srgbClr val="263746"/>
+                </a:solidFill>
+                <a:latin typeface="微软雅黑"/>
+                <a:ea typeface="微软雅黑"/>
+                <a:cs typeface="微软雅黑"/>
+              </a:defRPr>
+            </a:defPPr>
+          </a:lstStyle>
+          <a:p xmlns:a="http://schemas.openxmlformats.org/drawingml/2006/main">
+            <a:pPr algn="l">
+              <a:defRPr sz="2400" b="0">
+                <a:solidFill>
+                  <a:srgbClr val="263746"/>
                 </a:solidFill>
                 <a:latin typeface="微软雅黑"/>
                 <a:ea typeface="微软雅黑"/>
@@ -12421,37 +10005,83 @@
               </a:defRPr>
             </a:pPr>
             <a:r>
-              <a:rPr sz="2200" b="0">
-                <a:solidFill>
-                  <a:srgbClr val="1F4D78"/>
+              <a:rPr sz="2400" b="0">
+                <a:solidFill>
+                  <a:srgbClr val="263746"/>
                 </a:solidFill>
                 <a:latin typeface="微软雅黑"/>
                 <a:ea typeface="微软雅黑"/>
                 <a:cs typeface="微软雅黑"/>
               </a:rPr>
-              <a:t>可区分替代</a:t>
-            </a:r>
-          </a:p>
-        </p:txBody>
-      </p:sp>
-      <p:sp>
-        <p:nvSpPr>
-          <p:cNvPr id="11" name="route-a1">
-            <a:extLst xmlns:a="http://schemas.openxmlformats.org/drawingml/2006/main">
-              <a:ext uri="{FF2B5EF4-FFF2-40B4-BE49-F238E27FC236}">
-                <a16:creationId xmlns:a16="http://schemas.microsoft.com/office/drawing/2014/main" id="{4FB5F4A9-90C2-4D81-B2E8-8A28B892F896}"/>
-              </a:ext>
-            </a:extLst>
-          </p:cNvPr>
-          <p:cNvSpPr>
-            <a:spLocks xmlns:a="http://schemas.openxmlformats.org/drawingml/2006/main" noGrp="1"/>
-          </p:cNvSpPr>
-          <p:nvPr/>
-        </p:nvSpPr>
-        <p:spPr>
-          <a:xfrm xmlns:a="http://schemas.openxmlformats.org/drawingml/2006/main">
-            <a:off x="5886450" y="2009775"/>
-            <a:ext cx="304800" cy="438150"/>
+              <a:t>X｜重复原评分</a:t>
+            </a:r>
+          </a:p>
+          <a:p xmlns:a="http://schemas.openxmlformats.org/drawingml/2006/main">
+            <a:pPr algn="l">
+              <a:defRPr sz="2400" b="0">
+                <a:solidFill>
+                  <a:srgbClr val="263746"/>
+                </a:solidFill>
+                <a:latin typeface="微软雅黑"/>
+                <a:ea typeface="微软雅黑"/>
+                <a:cs typeface="微软雅黑"/>
+              </a:defRPr>
+            </a:pPr>
+            <a:r>
+              <a:rPr sz="2400" b="0">
+                <a:solidFill>
+                  <a:srgbClr val="263746"/>
+                </a:solidFill>
+                <a:latin typeface="微软雅黑"/>
+                <a:ea typeface="微软雅黑"/>
+                <a:cs typeface="微软雅黑"/>
+              </a:rPr>
+              <a:t>Y｜固定输出，隐藏组别和非语义格式后重评</a:t>
+            </a:r>
+          </a:p>
+          <a:p xmlns:a="http://schemas.openxmlformats.org/drawingml/2006/main">
+            <a:pPr algn="l">
+              <a:defRPr sz="2400" b="0">
+                <a:solidFill>
+                  <a:srgbClr val="263746"/>
+                </a:solidFill>
+                <a:latin typeface="微软雅黑"/>
+                <a:ea typeface="微软雅黑"/>
+                <a:cs typeface="微软雅黑"/>
+              </a:defRPr>
+            </a:pPr>
+            <a:r>
+              <a:rPr sz="2400" b="0">
+                <a:solidFill>
+                  <a:srgbClr val="263746"/>
+                </a:solidFill>
+                <a:latin typeface="微软雅黑"/>
+                <a:ea typeface="微软雅黑"/>
+                <a:cs typeface="微软雅黑"/>
+              </a:rPr>
+              <a:t>Z｜同时换文本、模型和评分者</a:t>
+            </a:r>
+          </a:p>
+        </p:txBody>
+      </p:sp>
+      <p:sp>
+        <p:nvSpPr>
+          <p:cNvPr id="4" name="judgment-body-2">
+            <a:extLst xmlns:a="http://schemas.openxmlformats.org/drawingml/2006/main">
+              <a:ext uri="{FF2B5EF4-FFF2-40B4-BE49-F238E27FC236}">
+                <a16:creationId xmlns:a16="http://schemas.microsoft.com/office/drawing/2014/main" id="{42FADEB6-1572-4D9D-881E-C20CCC59D28E}"/>
+              </a:ext>
+            </a:extLst>
+          </p:cNvPr>
+          <p:cNvSpPr>
+            <a:spLocks xmlns:a="http://schemas.openxmlformats.org/drawingml/2006/main" noGrp="1"/>
+          </p:cNvSpPr>
+          <p:nvPr/>
+        </p:nvSpPr>
+        <p:spPr>
+          <a:xfrm xmlns:a="http://schemas.openxmlformats.org/drawingml/2006/main">
+            <a:off x="666750" y="4495800"/>
+            <a:ext cx="10858500" cy="1409700"/>
           </a:xfrm>
           <a:prstGeom xmlns:a="http://schemas.openxmlformats.org/drawingml/2006/main" prst="rect">
             <a:avLst/>
@@ -12462,15 +10092,10 @@
           </a:ln>
         </p:spPr>
         <p:txBody>
-          <a:bodyPr xmlns:a="http://schemas.openxmlformats.org/drawingml/2006/main" lIns="0" tIns="0" rIns="0" bIns="0" anchor="ctr"/>
-          <a:lstStyle xmlns:a="http://schemas.openxmlformats.org/drawingml/2006/main"/>
-          <a:p xmlns:a="http://schemas.openxmlformats.org/drawingml/2006/main">
-            <a:pPr algn="ctr">
-              <a:lnSpc>
-                <a:spcPct val="118000"/>
-              </a:lnSpc>
-              <a:buNone/>
-              <a:defRPr sz="2800" b="0">
+          <a:bodyPr xmlns:a="http://schemas.openxmlformats.org/drawingml/2006/main" lIns="0" tIns="0" rIns="0" bIns="0" anchor="t"/>
+          <a:lstStyle xmlns:a="http://schemas.openxmlformats.org/drawingml/2006/main">
+            <a:defPPr algn="l">
+              <a:defRPr sz="2200" b="0">
                 <a:solidFill>
                   <a:srgbClr val="1F4D78"/>
                 </a:solidFill>
@@ -12478,9 +10103,21 @@
                 <a:ea typeface="微软雅黑"/>
                 <a:cs typeface="微软雅黑"/>
               </a:defRPr>
+            </a:defPPr>
+          </a:lstStyle>
+          <a:p xmlns:a="http://schemas.openxmlformats.org/drawingml/2006/main">
+            <a:pPr algn="l">
+              <a:defRPr sz="2200" b="0">
+                <a:solidFill>
+                  <a:srgbClr val="1F4D78"/>
+                </a:solidFill>
+                <a:latin typeface="微软雅黑"/>
+                <a:ea typeface="微软雅黑"/>
+                <a:cs typeface="微软雅黑"/>
+              </a:defRPr>
             </a:pPr>
             <a:r>
-              <a:rPr sz="2800" b="0">
+              <a:rPr sz="2200" b="0">
                 <a:solidFill>
                   <a:srgbClr val="1F4D78"/>
                 </a:solidFill>
@@ -12488,59 +10125,29 @@
                 <a:ea typeface="微软雅黑"/>
                 <a:cs typeface="微软雅黑"/>
               </a:rPr>
-              <a:t>→</a:t>
-            </a:r>
-          </a:p>
-        </p:txBody>
-      </p:sp>
-      <p:sp>
-        <p:nvSpPr>
-          <p:cNvPr id="12" name="route-2-bg">
-            <a:extLst xmlns:a="http://schemas.openxmlformats.org/drawingml/2006/main">
-              <a:ext uri="{FF2B5EF4-FFF2-40B4-BE49-F238E27FC236}">
-                <a16:creationId xmlns:a16="http://schemas.microsoft.com/office/drawing/2014/main" id="{D37E2A65-DEB3-4DAA-8C8E-0D89643B9EE4}"/>
-              </a:ext>
-            </a:extLst>
-          </p:cNvPr>
-          <p:cNvSpPr>
-            <a:spLocks xmlns:a="http://schemas.openxmlformats.org/drawingml/2006/main" noGrp="1"/>
-          </p:cNvSpPr>
-          <p:nvPr/>
-        </p:nvSpPr>
-        <p:spPr>
-          <a:xfrm xmlns:a="http://schemas.openxmlformats.org/drawingml/2006/main">
-            <a:off x="6191250" y="1714500"/>
-            <a:ext cx="2486025" cy="952500"/>
-          </a:xfrm>
-          <a:prstGeom xmlns:a="http://schemas.openxmlformats.org/drawingml/2006/main" prst="rect">
-            <a:avLst/>
-          </a:prstGeom>
-          <a:solidFill xmlns:a="http://schemas.openxmlformats.org/drawingml/2006/main">
-            <a:srgbClr val="F4F6F8"/>
-          </a:solidFill>
-          <a:ln xmlns:a="http://schemas.openxmlformats.org/drawingml/2006/main" w="0">
-            <a:noFill/>
-          </a:ln>
-        </p:spPr>
-      </p:sp>
-      <p:sp>
-        <p:nvSpPr>
-          <p:cNvPr id="13" name="route-2">
-            <a:extLst xmlns:a="http://schemas.openxmlformats.org/drawingml/2006/main">
-              <a:ext uri="{FF2B5EF4-FFF2-40B4-BE49-F238E27FC236}">
-                <a16:creationId xmlns:a16="http://schemas.microsoft.com/office/drawing/2014/main" id="{0CF81CCC-433E-4862-939A-7DADB57A0F2E}"/>
-              </a:ext>
-            </a:extLst>
-          </p:cNvPr>
-          <p:cNvSpPr>
-            <a:spLocks xmlns:a="http://schemas.openxmlformats.org/drawingml/2006/main" noGrp="1"/>
-          </p:cNvSpPr>
-          <p:nvPr/>
-        </p:nvSpPr>
-        <p:spPr>
-          <a:xfrm xmlns:a="http://schemas.openxmlformats.org/drawingml/2006/main">
-            <a:off x="6343650" y="1809750"/>
-            <a:ext cx="2181225" cy="762000"/>
+              <a:t>给 H1 与 A2 分别写预测；哪个结果仍允许两者同时成立？</a:t>
+            </a:r>
+          </a:p>
+        </p:txBody>
+      </p:sp>
+      <p:sp>
+        <p:nvSpPr>
+          <p:cNvPr id="5" name="judgment-source">
+            <a:extLst xmlns:a="http://schemas.openxmlformats.org/drawingml/2006/main">
+              <a:ext uri="{FF2B5EF4-FFF2-40B4-BE49-F238E27FC236}">
+                <a16:creationId xmlns:a16="http://schemas.microsoft.com/office/drawing/2014/main" id="{ACAEC10F-CF46-4F5D-96A4-A74B06A775B1}"/>
+              </a:ext>
+            </a:extLst>
+          </p:cNvPr>
+          <p:cNvSpPr>
+            <a:spLocks xmlns:a="http://schemas.openxmlformats.org/drawingml/2006/main" noGrp="1"/>
+          </p:cNvSpPr>
+          <p:nvPr/>
+        </p:nvSpPr>
+        <p:spPr>
+          <a:xfrm xmlns:a="http://schemas.openxmlformats.org/drawingml/2006/main">
+            <a:off x="666750" y="6276975"/>
+            <a:ext cx="10572750" cy="209550"/>
           </a:xfrm>
           <a:prstGeom xmlns:a="http://schemas.openxmlformats.org/drawingml/2006/main" prst="rect">
             <a:avLst/>
@@ -12551,17 +10158,24 @@
           </a:ln>
         </p:spPr>
         <p:txBody>
-          <a:bodyPr xmlns:a="http://schemas.openxmlformats.org/drawingml/2006/main" lIns="0" tIns="0" rIns="0" bIns="0" anchor="ctr"/>
-          <a:lstStyle xmlns:a="http://schemas.openxmlformats.org/drawingml/2006/main"/>
-          <a:p xmlns:a="http://schemas.openxmlformats.org/drawingml/2006/main">
-            <a:pPr algn="ctr">
-              <a:lnSpc>
-                <a:spcPct val="118000"/>
-              </a:lnSpc>
-              <a:buNone/>
-              <a:defRPr sz="2200" b="0">
-                <a:solidFill>
-                  <a:srgbClr val="1F4D78"/>
+          <a:bodyPr xmlns:a="http://schemas.openxmlformats.org/drawingml/2006/main" lIns="0" tIns="0" rIns="0" bIns="0" anchor="t"/>
+          <a:lstStyle xmlns:a="http://schemas.openxmlformats.org/drawingml/2006/main">
+            <a:defPPr algn="l">
+              <a:defRPr sz="1100" b="0">
+                <a:solidFill>
+                  <a:srgbClr val="667684"/>
+                </a:solidFill>
+                <a:latin typeface="微软雅黑"/>
+                <a:ea typeface="微软雅黑"/>
+                <a:cs typeface="微软雅黑"/>
+              </a:defRPr>
+            </a:defPPr>
+          </a:lstStyle>
+          <a:p xmlns:a="http://schemas.openxmlformats.org/drawingml/2006/main">
+            <a:pPr algn="l">
+              <a:defRPr sz="1100" b="0">
+                <a:solidFill>
+                  <a:srgbClr val="667684"/>
                 </a:solidFill>
                 <a:latin typeface="微软雅黑"/>
                 <a:ea typeface="微软雅黑"/>
@@ -12569,37 +10183,37 @@
               </a:defRPr>
             </a:pPr>
             <a:r>
-              <a:rPr sz="2200" b="0">
-                <a:solidFill>
-                  <a:srgbClr val="1F4D78"/>
+              <a:rPr sz="1100" b="0">
+                <a:solidFill>
+                  <a:srgbClr val="667684"/>
                 </a:solidFill>
                 <a:latin typeface="微软雅黑"/>
                 <a:ea typeface="微软雅黑"/>
                 <a:cs typeface="微软雅黑"/>
               </a:rPr>
-              <a:t>研究判断</a:t>
-            </a:r>
-          </a:p>
-        </p:txBody>
-      </p:sp>
-      <p:sp>
-        <p:nvSpPr>
-          <p:cNvPr id="14" name="route-a2">
-            <a:extLst xmlns:a="http://schemas.openxmlformats.org/drawingml/2006/main">
-              <a:ext uri="{FF2B5EF4-FFF2-40B4-BE49-F238E27FC236}">
-                <a16:creationId xmlns:a16="http://schemas.microsoft.com/office/drawing/2014/main" id="{D2B8D7FA-949B-4DE0-92B5-07F0DAB0EAAA}"/>
-              </a:ext>
-            </a:extLst>
-          </p:cNvPr>
-          <p:cNvSpPr>
-            <a:spLocks xmlns:a="http://schemas.openxmlformats.org/drawingml/2006/main" noGrp="1"/>
-          </p:cNvSpPr>
-          <p:nvPr/>
-        </p:nvSpPr>
-        <p:spPr>
-          <a:xfrm xmlns:a="http://schemas.openxmlformats.org/drawingml/2006/main">
-            <a:off x="8677275" y="2009775"/>
-            <a:ext cx="304800" cy="438150"/>
+              <a:t>来源：本课判断任务与讲义；构造材料及真实来源按材料包标识</a:t>
+            </a:r>
+          </a:p>
+        </p:txBody>
+      </p:sp>
+      <p:sp>
+        <p:nvSpPr>
+          <p:cNvPr id="6" name="judgment-page">
+            <a:extLst xmlns:a="http://schemas.openxmlformats.org/drawingml/2006/main">
+              <a:ext uri="{FF2B5EF4-FFF2-40B4-BE49-F238E27FC236}">
+                <a16:creationId xmlns:a16="http://schemas.microsoft.com/office/drawing/2014/main" id="{E66E0D51-1295-41BB-AF82-993866159EB7}"/>
+              </a:ext>
+            </a:extLst>
+          </p:cNvPr>
+          <p:cNvSpPr>
+            <a:spLocks xmlns:a="http://schemas.openxmlformats.org/drawingml/2006/main" noGrp="1"/>
+          </p:cNvSpPr>
+          <p:nvPr/>
+        </p:nvSpPr>
+        <p:spPr>
+          <a:xfrm xmlns:a="http://schemas.openxmlformats.org/drawingml/2006/main">
+            <a:off x="11715750" y="6562725"/>
+            <a:ext cx="238125" cy="171450"/>
           </a:xfrm>
           <a:prstGeom xmlns:a="http://schemas.openxmlformats.org/drawingml/2006/main" prst="rect">
             <a:avLst/>
@@ -12610,17 +10224,24 @@
           </a:ln>
         </p:spPr>
         <p:txBody>
-          <a:bodyPr xmlns:a="http://schemas.openxmlformats.org/drawingml/2006/main" lIns="0" tIns="0" rIns="0" bIns="0" anchor="ctr"/>
-          <a:lstStyle xmlns:a="http://schemas.openxmlformats.org/drawingml/2006/main"/>
-          <a:p xmlns:a="http://schemas.openxmlformats.org/drawingml/2006/main">
-            <a:pPr algn="ctr">
-              <a:lnSpc>
-                <a:spcPct val="118000"/>
-              </a:lnSpc>
-              <a:buNone/>
-              <a:defRPr sz="2800" b="0">
-                <a:solidFill>
-                  <a:srgbClr val="1F4D78"/>
+          <a:bodyPr xmlns:a="http://schemas.openxmlformats.org/drawingml/2006/main" lIns="0" tIns="0" rIns="0" bIns="0" anchor="t"/>
+          <a:lstStyle xmlns:a="http://schemas.openxmlformats.org/drawingml/2006/main">
+            <a:defPPr algn="l">
+              <a:defRPr sz="900" b="0">
+                <a:solidFill>
+                  <a:srgbClr val="A5A5A5"/>
+                </a:solidFill>
+                <a:latin typeface="微软雅黑"/>
+                <a:ea typeface="微软雅黑"/>
+                <a:cs typeface="微软雅黑"/>
+              </a:defRPr>
+            </a:defPPr>
+          </a:lstStyle>
+          <a:p xmlns:a="http://schemas.openxmlformats.org/drawingml/2006/main">
+            <a:pPr algn="l">
+              <a:defRPr sz="900" b="0">
+                <a:solidFill>
+                  <a:srgbClr val="A5A5A5"/>
                 </a:solidFill>
                 <a:latin typeface="微软雅黑"/>
                 <a:ea typeface="微软雅黑"/>
@@ -12628,222 +10249,15 @@
               </a:defRPr>
             </a:pPr>
             <a:r>
-              <a:rPr sz="2800" b="0">
-                <a:solidFill>
-                  <a:srgbClr val="1F4D78"/>
+              <a:rPr sz="900" b="0">
+                <a:solidFill>
+                  <a:srgbClr val="A5A5A5"/>
                 </a:solidFill>
                 <a:latin typeface="微软雅黑"/>
                 <a:ea typeface="微软雅黑"/>
                 <a:cs typeface="微软雅黑"/>
               </a:rPr>
-              <a:t>→</a:t>
-            </a:r>
-          </a:p>
-        </p:txBody>
-      </p:sp>
-      <p:sp>
-        <p:nvSpPr>
-          <p:cNvPr id="15" name="route-3-bg">
-            <a:extLst xmlns:a="http://schemas.openxmlformats.org/drawingml/2006/main">
-              <a:ext uri="{FF2B5EF4-FFF2-40B4-BE49-F238E27FC236}">
-                <a16:creationId xmlns:a16="http://schemas.microsoft.com/office/drawing/2014/main" id="{53E8D1E4-FE54-40DF-AB8A-8065150B6F05}"/>
-              </a:ext>
-            </a:extLst>
-          </p:cNvPr>
-          <p:cNvSpPr>
-            <a:spLocks xmlns:a="http://schemas.openxmlformats.org/drawingml/2006/main" noGrp="1"/>
-          </p:cNvSpPr>
-          <p:nvPr/>
-        </p:nvSpPr>
-        <p:spPr>
-          <a:xfrm xmlns:a="http://schemas.openxmlformats.org/drawingml/2006/main">
-            <a:off x="8982075" y="1714500"/>
-            <a:ext cx="2486025" cy="952500"/>
-          </a:xfrm>
-          <a:prstGeom xmlns:a="http://schemas.openxmlformats.org/drawingml/2006/main" prst="rect">
-            <a:avLst/>
-          </a:prstGeom>
-          <a:solidFill xmlns:a="http://schemas.openxmlformats.org/drawingml/2006/main">
-            <a:srgbClr val="F4F6F8"/>
-          </a:solidFill>
-          <a:ln xmlns:a="http://schemas.openxmlformats.org/drawingml/2006/main" w="0">
-            <a:noFill/>
-          </a:ln>
-        </p:spPr>
-      </p:sp>
-      <p:sp>
-        <p:nvSpPr>
-          <p:cNvPr id="16" name="route-3">
-            <a:extLst xmlns:a="http://schemas.openxmlformats.org/drawingml/2006/main">
-              <a:ext uri="{FF2B5EF4-FFF2-40B4-BE49-F238E27FC236}">
-                <a16:creationId xmlns:a16="http://schemas.microsoft.com/office/drawing/2014/main" id="{821AFE16-46AA-4DED-BECE-636010883FC1}"/>
-              </a:ext>
-            </a:extLst>
-          </p:cNvPr>
-          <p:cNvSpPr>
-            <a:spLocks xmlns:a="http://schemas.openxmlformats.org/drawingml/2006/main" noGrp="1"/>
-          </p:cNvSpPr>
-          <p:nvPr/>
-        </p:nvSpPr>
-        <p:spPr>
-          <a:xfrm xmlns:a="http://schemas.openxmlformats.org/drawingml/2006/main">
-            <a:off x="9134475" y="1809750"/>
-            <a:ext cx="2181225" cy="762000"/>
-          </a:xfrm>
-          <a:prstGeom xmlns:a="http://schemas.openxmlformats.org/drawingml/2006/main" prst="rect">
-            <a:avLst/>
-          </a:prstGeom>
-          <a:noFill xmlns:a="http://schemas.openxmlformats.org/drawingml/2006/main"/>
-          <a:ln xmlns:a="http://schemas.openxmlformats.org/drawingml/2006/main" w="0">
-            <a:noFill/>
-          </a:ln>
-        </p:spPr>
-        <p:txBody>
-          <a:bodyPr xmlns:a="http://schemas.openxmlformats.org/drawingml/2006/main" lIns="0" tIns="0" rIns="0" bIns="0" anchor="ctr"/>
-          <a:lstStyle xmlns:a="http://schemas.openxmlformats.org/drawingml/2006/main"/>
-          <a:p xmlns:a="http://schemas.openxmlformats.org/drawingml/2006/main">
-            <a:pPr algn="ctr">
-              <a:lnSpc>
-                <a:spcPct val="118000"/>
-              </a:lnSpc>
-              <a:buNone/>
-              <a:defRPr sz="2200" b="0">
-                <a:solidFill>
-                  <a:srgbClr val="1F4D78"/>
-                </a:solidFill>
-                <a:latin typeface="微软雅黑"/>
-                <a:ea typeface="微软雅黑"/>
-                <a:cs typeface="微软雅黑"/>
-              </a:defRPr>
-            </a:pPr>
-            <a:r>
-              <a:rPr sz="2200" b="0">
-                <a:solidFill>
-                  <a:srgbClr val="1F4D78"/>
-                </a:solidFill>
-                <a:latin typeface="微软雅黑"/>
-                <a:ea typeface="微软雅黑"/>
-                <a:cs typeface="微软雅黑"/>
-              </a:rPr>
-              <a:t>结果映射</a:t>
-            </a:r>
-          </a:p>
-        </p:txBody>
-      </p:sp>
-      <p:sp>
-        <p:nvSpPr>
-          <p:cNvPr id="17" name="minimum">
-            <a:extLst xmlns:a="http://schemas.openxmlformats.org/drawingml/2006/main">
-              <a:ext uri="{FF2B5EF4-FFF2-40B4-BE49-F238E27FC236}">
-                <a16:creationId xmlns:a16="http://schemas.microsoft.com/office/drawing/2014/main" id="{D5BD952A-E0DD-4406-9C9A-465BC32199CA}"/>
-              </a:ext>
-            </a:extLst>
-          </p:cNvPr>
-          <p:cNvSpPr>
-            <a:spLocks xmlns:a="http://schemas.openxmlformats.org/drawingml/2006/main" noGrp="1"/>
-          </p:cNvSpPr>
-          <p:nvPr/>
-        </p:nvSpPr>
-        <p:spPr>
-          <a:xfrm xmlns:a="http://schemas.openxmlformats.org/drawingml/2006/main">
-            <a:off x="1066800" y="3352800"/>
-            <a:ext cx="10058400" cy="495300"/>
-          </a:xfrm>
-          <a:prstGeom xmlns:a="http://schemas.openxmlformats.org/drawingml/2006/main" prst="rect">
-            <a:avLst/>
-          </a:prstGeom>
-          <a:noFill xmlns:a="http://schemas.openxmlformats.org/drawingml/2006/main"/>
-          <a:ln xmlns:a="http://schemas.openxmlformats.org/drawingml/2006/main" w="0">
-            <a:noFill/>
-          </a:ln>
-        </p:spPr>
-        <p:txBody>
-          <a:bodyPr xmlns:a="http://schemas.openxmlformats.org/drawingml/2006/main" lIns="0" tIns="0" rIns="0" bIns="0" anchor="t"/>
-          <a:lstStyle xmlns:a="http://schemas.openxmlformats.org/drawingml/2006/main"/>
-          <a:p xmlns:a="http://schemas.openxmlformats.org/drawingml/2006/main">
-            <a:pPr algn="ctr">
-              <a:lnSpc>
-                <a:spcPct val="118000"/>
-              </a:lnSpc>
-              <a:buNone/>
-              <a:defRPr sz="2400" b="0">
-                <a:solidFill>
-                  <a:srgbClr val="1F4D78"/>
-                </a:solidFill>
-                <a:latin typeface="微软雅黑"/>
-                <a:ea typeface="微软雅黑"/>
-                <a:cs typeface="微软雅黑"/>
-              </a:defRPr>
-            </a:pPr>
-            <a:r>
-              <a:rPr sz="2400" b="0">
-                <a:solidFill>
-                  <a:srgbClr val="1F4D78"/>
-                </a:solidFill>
-                <a:latin typeface="微软雅黑"/>
-                <a:ea typeface="微软雅黑"/>
-                <a:cs typeface="微软雅黑"/>
-              </a:rPr>
-              <a:t>课堂最低闭环：1 个主机制  +  1 个替代  +  1 条判断  +  1 张映射</a:t>
-            </a:r>
-          </a:p>
-        </p:txBody>
-      </p:sp>
-      <p:sp>
-        <p:nvSpPr>
-          <p:cNvPr id="18" name="handoff">
-            <a:extLst xmlns:a="http://schemas.openxmlformats.org/drawingml/2006/main">
-              <a:ext uri="{FF2B5EF4-FFF2-40B4-BE49-F238E27FC236}">
-                <a16:creationId xmlns:a16="http://schemas.microsoft.com/office/drawing/2014/main" id="{6D314633-12AA-4A83-A57E-879006585630}"/>
-              </a:ext>
-            </a:extLst>
-          </p:cNvPr>
-          <p:cNvSpPr>
-            <a:spLocks xmlns:a="http://schemas.openxmlformats.org/drawingml/2006/main" noGrp="1"/>
-          </p:cNvSpPr>
-          <p:nvPr/>
-        </p:nvSpPr>
-        <p:spPr>
-          <a:xfrm xmlns:a="http://schemas.openxmlformats.org/drawingml/2006/main">
-            <a:off x="1885950" y="4514850"/>
-            <a:ext cx="8420100" cy="571500"/>
-          </a:xfrm>
-          <a:prstGeom xmlns:a="http://schemas.openxmlformats.org/drawingml/2006/main" prst="rect">
-            <a:avLst/>
-          </a:prstGeom>
-          <a:noFill xmlns:a="http://schemas.openxmlformats.org/drawingml/2006/main"/>
-          <a:ln xmlns:a="http://schemas.openxmlformats.org/drawingml/2006/main" w="0">
-            <a:noFill/>
-          </a:ln>
-        </p:spPr>
-        <p:txBody>
-          <a:bodyPr xmlns:a="http://schemas.openxmlformats.org/drawingml/2006/main" lIns="0" tIns="0" rIns="0" bIns="0" anchor="t"/>
-          <a:lstStyle xmlns:a="http://schemas.openxmlformats.org/drawingml/2006/main"/>
-          <a:p xmlns:a="http://schemas.openxmlformats.org/drawingml/2006/main">
-            <a:pPr algn="ctr">
-              <a:lnSpc>
-                <a:spcPct val="118000"/>
-              </a:lnSpc>
-              <a:buNone/>
-              <a:defRPr sz="2200" b="0">
-                <a:solidFill>
-                  <a:srgbClr val="27333D"/>
-                </a:solidFill>
-                <a:latin typeface="微软雅黑"/>
-                <a:ea typeface="微软雅黑"/>
-                <a:cs typeface="微软雅黑"/>
-              </a:defRPr>
-            </a:pPr>
-            <a:r>
-              <a:rPr sz="2200" b="0">
-                <a:solidFill>
-                  <a:srgbClr val="27333D"/>
-                </a:solidFill>
-                <a:latin typeface="微软雅黑"/>
-                <a:ea typeface="微软雅黑"/>
-                <a:cs typeface="微软雅黑"/>
-              </a:rPr>
-              <a:t>这些对象直接进入第 8 课方案分享；完整工程规格留到第 9 课</a:t>
+              <a:t>3</a:t>
             </a:r>
           </a:p>
         </p:txBody>
